--- a/poster/FL_Poster_Chevuri_Aledhari.pptx
+++ b/poster/FL_Poster_Chevuri_Aledhari.pptx
@@ -4650,7 +4650,7 @@
                 <a:latin typeface="+mn-lt"/>
                 <a:ea typeface="Arial" panose="020B0604020202020204" pitchFamily="34" charset="0"/>
               </a:rPr>
-              <a:t>Code, data and the full experimental harness are open, with a script that re-checks every number on this poster.</a:t>
+              <a:t>Code, merged results and the full experimental harness are open, with a script that re-checks every number on this poster.</a:t>
             </a:r>
             <a:endParaRPr lang="en-US" sz="1400" dirty="0">
               <a:effectLst/>
@@ -4672,7 +4672,7 @@
               <a:buNone/>
             </a:pPr>
             <a:r>
-              <a:rPr lang="en-US" sz="2400" dirty="0" err="1">
+              <a:rPr lang="en-US" sz="2000" dirty="0" err="1">
                 <a:solidFill>
                   <a:schemeClr val="tx1"/>
                 </a:solidFill>
@@ -4680,7 +4680,7 @@
                 <a:latin typeface="+mn-lt"/>
                 <a:ea typeface="Arial" panose="020B0604020202020204" pitchFamily="34" charset="0"/>
               </a:rPr>
-              <a:t>osf.io/d5u2q</a:t>
+              <a:t>github.com/kunalchevuri/federated-learning-health-robustness</a:t>
             </a:r>
             <a:endParaRPr lang="en-US" sz="1400" dirty="0">
               <a:effectLst/>

--- a/poster/FL_Poster_Chevuri_Aledhari.pptx
+++ b/poster/FL_Poster_Chevuri_Aledhari.pptx
@@ -3262,20 +3262,67 @@
       </p:sp>
       <p:sp>
         <p:nvSpPr>
-          <p:cNvPr id="8" name="TextBox 7">
-            <a:extLst>
-              <a:ext uri="{FF2B5EF4-FFF2-40B4-BE49-F238E27FC236}">
-                <a16:creationId xmlns:a16="http://schemas.microsoft.com/office/drawing/2014/main" id="{4533CE1C-5C1C-6FDC-69EB-B1D10413549D}"/>
-              </a:ext>
-            </a:extLst>
-          </p:cNvPr>
+          <p:cNvPr id="17" name="Rectangle 16"/>
+          <p:cNvSpPr/>
+          <p:nvPr/>
+        </p:nvSpPr>
+        <p:spPr>
+          <a:xfrm>
+            <a:off x="548640" y="3310128"/>
+            <a:ext cx="6638544" cy="713232"/>
+          </a:xfrm>
+          <a:prstGeom prst="rect">
+            <a:avLst/>
+          </a:prstGeom>
+          <a:solidFill>
+            <a:srgbClr val="007439"/>
+          </a:solidFill>
+          <a:ln>
+            <a:noFill/>
+          </a:ln>
+          <a:effectLst/>
+        </p:spPr>
+        <p:style>
+          <a:lnRef idx="1">
+            <a:schemeClr val="accent1"/>
+          </a:lnRef>
+          <a:fillRef idx="3">
+            <a:schemeClr val="accent1"/>
+          </a:fillRef>
+          <a:effectRef idx="2">
+            <a:schemeClr val="accent1"/>
+          </a:effectRef>
+          <a:fontRef idx="minor">
+            <a:schemeClr val="lt1"/>
+          </a:fontRef>
+        </p:style>
+        <p:txBody>
+          <a:bodyPr rtlCol="0" anchor="ctr" wrap="square" lIns="146304" rIns="146304" tIns="0" bIns="0"/>
+          <a:lstStyle/>
+          <a:p>
+            <a:pPr algn="l"/>
+            <a:r>
+              <a:rPr sz="2500" b="1">
+                <a:solidFill>
+                  <a:srgbClr val="FFFFFF"/>
+                </a:solidFill>
+                <a:latin typeface="Calibri"/>
+              </a:rPr>
+              <a:t>Motivation &amp; Questions</a:t>
+            </a:r>
+          </a:p>
+        </p:txBody>
+      </p:sp>
+      <p:sp>
+        <p:nvSpPr>
+          <p:cNvPr id="18" name="TextBox 17"/>
           <p:cNvSpPr txBox="1"/>
           <p:nvPr/>
         </p:nvSpPr>
         <p:spPr>
           <a:xfrm>
-            <a:off x="7276192" y="4572000"/>
-            <a:ext cx="6766560" cy="2436564"/>
+            <a:off x="548640" y="4133088"/>
+            <a:ext cx="6638544" cy="4943856"/>
           </a:xfrm>
           <a:prstGeom prst="rect">
             <a:avLst/>
@@ -3283,131 +3330,201 @@
           <a:noFill/>
         </p:spPr>
         <p:txBody>
-          <a:bodyPr wrap="square">
+          <a:bodyPr wrap="square" lIns="54864" rIns="0" tIns="0" bIns="0">
             <a:spAutoFit/>
           </a:bodyPr>
           <a:lstStyle/>
           <a:p>
-            <a:pPr marL="285750" marR="0">
-              <a:spcBef>
-                <a:spcPts val="545"/>
-              </a:spcBef>
-              <a:spcAft>
-                <a:spcPts val="400"/>
-              </a:spcAft>
-              <a:buNone/>
-            </a:pPr>
-            <a:r>
-              <a:rPr lang="en-US" sz="2400" b="1" kern="0" spc="-10" dirty="0">
-                <a:solidFill>
-                  <a:srgbClr val="007439"/>
-                </a:solidFill>
-                <a:effectLst/>
-                <a:latin typeface="+mn-lt"/>
-                <a:ea typeface="Times New Roman" panose="02020603050405020304" pitchFamily="18" charset="0"/>
-                <a:cs typeface="Times New Roman" panose="02020603050405020304" pitchFamily="18" charset="0"/>
-              </a:rPr>
-              <a:t>RESULTS</a:t>
-            </a:r>
-            <a:endParaRPr lang="en-US" sz="2400" b="1" kern="0" dirty="0">
-              <a:solidFill>
-                <a:srgbClr val="007439"/>
-              </a:solidFill>
-              <a:effectLst/>
-              <a:latin typeface="+mn-lt"/>
-              <a:ea typeface="Times New Roman" panose="02020603050405020304" pitchFamily="18" charset="0"/>
-              <a:cs typeface="Times New Roman" panose="02020603050405020304" pitchFamily="18" charset="0"/>
-            </a:endParaRPr>
-          </a:p>
-          <a:p>
-            <a:pPr marL="285750" marR="0">
-              <a:lnSpc>
-                <a:spcPct val="100000"/>
-              </a:lnSpc>
+            <a:pPr indent="-215900" marL="215900">
               <a:spcBef>
                 <a:spcPts val="0"/>
               </a:spcBef>
               <a:spcAft>
-                <a:spcPts val="1400"/>
+                <a:spcPts val="800"/>
               </a:spcAft>
-              <a:buNone/>
+              <a:buFont typeface="Arial"/>
+              <a:buChar char="•"/>
             </a:pPr>
             <a:r>
-              <a:rPr lang="en-US" sz="2400" dirty="0" err="1">
-                <a:solidFill>
-                  <a:schemeClr val="tx1"/>
-                </a:solidFill>
-                <a:effectLst/>
-                <a:latin typeface="+mn-lt"/>
-                <a:ea typeface="Arial" panose="020B0604020202020204" pitchFamily="34" charset="0"/>
-              </a:rPr>
-              <a:t>Every rule below is scored against the unweighted-mean control, not against FedAvg alone. Figures show BRFSS at the harshest split (alpha = 0.1) unless the panel says otherwise.</a:t>
-            </a:r>
-            <a:endParaRPr lang="en-US" sz="1400" dirty="0">
-              <a:effectLst/>
-              <a:latin typeface="Arial" panose="020B0604020202020204" pitchFamily="34" charset="0"/>
-              <a:ea typeface="Arial" panose="020B0604020202020204" pitchFamily="34" charset="0"/>
-            </a:endParaRPr>
-          </a:p>
-          <a:p>
-            <a:pPr marL="285750" marR="0">
-              <a:lnSpc>
-                <a:spcPct val="100000"/>
-              </a:lnSpc>
+              <a:rPr sz="1900">
+                <a:solidFill>
+                  <a:srgbClr val="1A1A1A"/>
+                </a:solidFill>
+                <a:latin typeface="Calibri"/>
+              </a:rPr>
+              <a:t>Hospitals and health agencies hold records that could sharpen how we predict disease, but privacy law stops them pooling the data.</a:t>
+            </a:r>
+          </a:p>
+          <a:p>
+            <a:pPr indent="-215900" marL="215900">
               <a:spcBef>
                 <a:spcPts val="0"/>
               </a:spcBef>
               <a:spcAft>
-                <a:spcPts val="1400"/>
+                <a:spcPts val="800"/>
               </a:spcAft>
-              <a:buNone/>
+              <a:buFont typeface="Arial"/>
+              <a:buChar char="•"/>
             </a:pPr>
             <a:r>
-              <a:rPr lang="en-US" sz="2400" dirty="0" err="1" b="1">
-                <a:solidFill>
-                  <a:schemeClr val="tx1"/>
-                </a:solidFill>
-                <a:effectLst/>
-                <a:latin typeface="+mn-lt"/>
-                <a:ea typeface="Arial" panose="020B0604020202020204" pitchFamily="34" charset="0"/>
-              </a:rPr>
-              <a:t xml:space="preserve">Reading the charts.</a:t>
-            </a:r>
-            <a:r>
-              <a:rPr lang="en-US" sz="2400" dirty="0" err="1" b="0">
-                <a:solidFill>
-                  <a:schemeClr val="tx1"/>
-                </a:solidFill>
-                <a:effectLst/>
-                <a:latin typeface="+mn-lt"/>
-                <a:ea typeface="Arial" panose="020B0604020202020204" pitchFamily="34" charset="0"/>
-              </a:rPr>
-              <a:t xml:space="preserve">  AUC-ROC measures how well the model tells apart people who have depression from people who do not. 0.5 is a coin flip, 1.0 is perfect.</a:t>
-            </a:r>
-            <a:endParaRPr lang="en-US" sz="1400" dirty="0">
-              <a:effectLst/>
-              <a:latin typeface="Arial" panose="020B0604020202020204" pitchFamily="34" charset="0"/>
-              <a:ea typeface="Arial" panose="020B0604020202020204" pitchFamily="34" charset="0"/>
-            </a:endParaRPr>
-          </a:p>
-        </p:txBody>
-      </p:sp>
-      <p:sp>
-        <p:nvSpPr>
-          <p:cNvPr id="11" name="TextBox 10">
-            <a:extLst>
-              <a:ext uri="{FF2B5EF4-FFF2-40B4-BE49-F238E27FC236}">
-                <a16:creationId xmlns:a16="http://schemas.microsoft.com/office/drawing/2014/main" id="{19B0CD20-22B3-ABCD-BFE6-40F1E26A6196}"/>
-              </a:ext>
-            </a:extLst>
-          </p:cNvPr>
+              <a:rPr sz="1900">
+                <a:solidFill>
+                  <a:srgbClr val="1A1A1A"/>
+                </a:solidFill>
+                <a:latin typeface="Calibri"/>
+              </a:rPr>
+              <a:t>Federated learning trains one shared model without moving any patient record out of the institution holding it.</a:t>
+            </a:r>
+          </a:p>
+          <a:p>
+            <a:pPr indent="-215900" marL="215900">
+              <a:spcBef>
+                <a:spcPts val="0"/>
+              </a:spcBef>
+              <a:spcAft>
+                <a:spcPts val="800"/>
+              </a:spcAft>
+              <a:buFont typeface="Arial"/>
+              <a:buChar char="•"/>
+            </a:pPr>
+            <a:r>
+              <a:rPr sz="1900">
+                <a:solidFill>
+                  <a:srgbClr val="1A1A1A"/>
+                </a:solidFill>
+                <a:latin typeface="Calibri"/>
+              </a:rPr>
+              <a:t>The rule that merges each site's work is normally chosen for its robustness to noisy or unusual sites.</a:t>
+            </a:r>
+          </a:p>
+          <a:p>
+            <a:pPr indent="-215900" marL="215900">
+              <a:spcBef>
+                <a:spcPts val="0"/>
+              </a:spcBef>
+              <a:spcAft>
+                <a:spcPts val="800"/>
+              </a:spcAft>
+              <a:buFont typeface="Arial"/>
+              <a:buChar char="•"/>
+            </a:pPr>
+            <a:r>
+              <a:rPr sz="1900">
+                <a:solidFill>
+                  <a:srgbClr val="1A1A1A"/>
+                </a:solidFill>
+                <a:latin typeface="Calibri"/>
+              </a:rPr>
+              <a:t>Robust rules are always scored against FedAvg, which weights each site by how much data it holds, so the biggest site gets the loudest vote.</a:t>
+            </a:r>
+          </a:p>
+          <a:p>
+            <a:pPr indent="-215900" marL="215900">
+              <a:spcBef>
+                <a:spcPts val="0"/>
+              </a:spcBef>
+              <a:spcAft>
+                <a:spcPts val="800"/>
+              </a:spcAft>
+              <a:buFont typeface="Arial"/>
+              <a:buChar char="•"/>
+            </a:pPr>
+            <a:r>
+              <a:rPr sz="1900">
+                <a:solidFill>
+                  <a:srgbClr val="1A1A1A"/>
+                </a:solidFill>
+                <a:latin typeface="Calibri"/>
+              </a:rPr>
+              <a:t>Robust rules discard that weighting entirely, so two things change at once and nobody had separated them.</a:t>
+            </a:r>
+          </a:p>
+          <a:p>
+            <a:pPr indent="-215900" marL="215900">
+              <a:spcBef>
+                <a:spcPts val="0"/>
+              </a:spcBef>
+              <a:spcAft>
+                <a:spcPts val="800"/>
+              </a:spcAft>
+              <a:buFont typeface="Arial"/>
+              <a:buChar char="•"/>
+            </a:pPr>
+            <a:r>
+              <a:rPr sz="1900">
+                <a:solidFill>
+                  <a:srgbClr val="1A1A1A"/>
+                </a:solidFill>
+                <a:latin typeface="Calibri"/>
+              </a:rPr>
+              <a:t>We ask: when a robust rule wins, is it the robust statistic winning, or just the end of the loudest vote?</a:t>
+            </a:r>
+          </a:p>
+        </p:txBody>
+      </p:sp>
+      <p:sp>
+        <p:nvSpPr>
+          <p:cNvPr id="19" name="Rectangle 18"/>
+          <p:cNvSpPr/>
+          <p:nvPr/>
+        </p:nvSpPr>
+        <p:spPr>
+          <a:xfrm>
+            <a:off x="548640" y="9259823"/>
+            <a:ext cx="6638544" cy="713232"/>
+          </a:xfrm>
+          <a:prstGeom prst="rect">
+            <a:avLst/>
+          </a:prstGeom>
+          <a:solidFill>
+            <a:srgbClr val="007439"/>
+          </a:solidFill>
+          <a:ln>
+            <a:noFill/>
+          </a:ln>
+          <a:effectLst/>
+        </p:spPr>
+        <p:style>
+          <a:lnRef idx="1">
+            <a:schemeClr val="accent1"/>
+          </a:lnRef>
+          <a:fillRef idx="3">
+            <a:schemeClr val="accent1"/>
+          </a:fillRef>
+          <a:effectRef idx="2">
+            <a:schemeClr val="accent1"/>
+          </a:effectRef>
+          <a:fontRef idx="minor">
+            <a:schemeClr val="lt1"/>
+          </a:fontRef>
+        </p:style>
+        <p:txBody>
+          <a:bodyPr rtlCol="0" anchor="ctr" wrap="square" lIns="146304" rIns="146304" tIns="0" bIns="0"/>
+          <a:lstStyle/>
+          <a:p>
+            <a:pPr algn="l"/>
+            <a:r>
+              <a:rPr sz="2500" b="1">
+                <a:solidFill>
+                  <a:srgbClr val="FFFFFF"/>
+                </a:solidFill>
+                <a:latin typeface="Calibri"/>
+              </a:rPr>
+              <a:t>Background: how federated learning works</a:t>
+            </a:r>
+          </a:p>
+        </p:txBody>
+      </p:sp>
+      <p:sp>
+        <p:nvSpPr>
+          <p:cNvPr id="20" name="TextBox 19"/>
           <p:cNvSpPr txBox="1"/>
           <p:nvPr/>
         </p:nvSpPr>
         <p:spPr>
           <a:xfrm>
-            <a:off x="476250" y="4572000"/>
-            <a:ext cx="6037944" cy="3840480"/>
+            <a:off x="548640" y="10082783"/>
+            <a:ext cx="6638544" cy="802277"/>
           </a:xfrm>
           <a:prstGeom prst="rect">
             <a:avLst/>
@@ -3415,1284 +3532,36 @@
           <a:noFill/>
         </p:spPr>
         <p:txBody>
-          <a:bodyPr wrap="square">
+          <a:bodyPr wrap="square" lIns="54864" rIns="0" tIns="0" bIns="0">
             <a:spAutoFit/>
           </a:bodyPr>
           <a:lstStyle/>
           <a:p>
-            <a:pPr marL="285750" marR="0">
-              <a:spcBef>
-                <a:spcPts val="545"/>
-              </a:spcBef>
-              <a:spcAft>
-                <a:spcPts val="400"/>
-              </a:spcAft>
-              <a:buNone/>
-            </a:pPr>
-            <a:r>
-              <a:rPr lang="en-US" sz="2400" b="1" kern="0" spc="-10" dirty="0">
-                <a:solidFill>
-                  <a:srgbClr val="007439"/>
-                </a:solidFill>
-                <a:effectLst/>
-                <a:latin typeface="+mn-lt"/>
-                <a:ea typeface="Times New Roman" panose="02020603050405020304" pitchFamily="18" charset="0"/>
-                <a:cs typeface="Times New Roman" panose="02020603050405020304" pitchFamily="18" charset="0"/>
-              </a:rPr>
-              <a:t>INTRODUCTION</a:t>
-            </a:r>
-            <a:endParaRPr lang="en-US" sz="2400" b="1" kern="0" dirty="0">
-              <a:solidFill>
-                <a:srgbClr val="007439"/>
-              </a:solidFill>
-              <a:effectLst/>
-              <a:latin typeface="+mn-lt"/>
-              <a:ea typeface="Times New Roman" panose="02020603050405020304" pitchFamily="18" charset="0"/>
-              <a:cs typeface="Times New Roman" panose="02020603050405020304" pitchFamily="18" charset="0"/>
-            </a:endParaRPr>
-          </a:p>
-          <a:p>
-            <a:pPr marL="285750" marR="0">
-              <a:lnSpc>
-                <a:spcPct val="100000"/>
-              </a:lnSpc>
+            <a:pPr indent="-215900" marL="215900">
               <a:spcBef>
                 <a:spcPts val="0"/>
               </a:spcBef>
               <a:spcAft>
-                <a:spcPts val="1400"/>
+                <a:spcPts val="800"/>
               </a:spcAft>
-              <a:buNone/>
+              <a:buFont typeface="Arial"/>
+              <a:buChar char="•"/>
             </a:pPr>
             <a:r>
-              <a:rPr lang="en-US" sz="2400" dirty="0" err="1">
-                <a:solidFill>
-                  <a:schemeClr val="tx1"/>
-                </a:solidFill>
-                <a:effectLst/>
-                <a:latin typeface="+mn-lt"/>
-                <a:ea typeface="Arial" panose="020B0604020202020204" pitchFamily="34" charset="0"/>
-              </a:rPr>
-              <a:t>Hospitals, clinics and health agencies each hold records that could sharpen how we predict disease. Privacy law keeps them from pooling those records in one place.</a:t>
-            </a:r>
-            <a:endParaRPr lang="en-US" sz="1400" dirty="0">
-              <a:effectLst/>
-              <a:latin typeface="Arial" panose="020B0604020202020204" pitchFamily="34" charset="0"/>
-              <a:ea typeface="Arial" panose="020B0604020202020204" pitchFamily="34" charset="0"/>
-            </a:endParaRPr>
-          </a:p>
-          <a:p>
-            <a:pPr marL="285750" marR="0">
-              <a:lnSpc>
-                <a:spcPct val="100000"/>
-              </a:lnSpc>
-              <a:spcBef>
-                <a:spcPts val="0"/>
-              </a:spcBef>
-              <a:spcAft>
-                <a:spcPts val="1400"/>
-              </a:spcAft>
-              <a:buNone/>
-            </a:pPr>
-            <a:r>
-              <a:rPr lang="en-US" sz="2400" dirty="0" err="1">
-                <a:solidFill>
-                  <a:schemeClr val="tx1"/>
-                </a:solidFill>
-                <a:effectLst/>
-                <a:latin typeface="+mn-lt"/>
-                <a:ea typeface="Arial" panose="020B0604020202020204" pitchFamily="34" charset="0"/>
-              </a:rPr>
-              <a:t>Federated learning is the workaround, sketched below. The merge step is the real design decision, because real sites are lopsided and self-reported health data arrives with errors.</a:t>
-            </a:r>
-            <a:endParaRPr lang="en-US" sz="1400" dirty="0">
-              <a:effectLst/>
-              <a:latin typeface="Arial" panose="020B0604020202020204" pitchFamily="34" charset="0"/>
-              <a:ea typeface="Arial" panose="020B0604020202020204" pitchFamily="34" charset="0"/>
-            </a:endParaRPr>
-          </a:p>
-        </p:txBody>
-      </p:sp>
-      <p:sp>
-        <p:nvSpPr>
-          <p:cNvPr id="13" name="TextBox 12">
-            <a:extLst>
-              <a:ext uri="{FF2B5EF4-FFF2-40B4-BE49-F238E27FC236}">
-                <a16:creationId xmlns:a16="http://schemas.microsoft.com/office/drawing/2014/main" id="{E5F4D14D-1AA2-22EE-152A-DA045E782511}"/>
-              </a:ext>
-            </a:extLst>
-          </p:cNvPr>
-          <p:cNvSpPr txBox="1"/>
-          <p:nvPr/>
-        </p:nvSpPr>
-        <p:spPr>
-          <a:xfrm>
-            <a:off x="476250" y="11704320"/>
-            <a:ext cx="6037944" cy="2436564"/>
-          </a:xfrm>
-          <a:prstGeom prst="rect">
-            <a:avLst/>
-          </a:prstGeom>
-          <a:noFill/>
-        </p:spPr>
-        <p:txBody>
-          <a:bodyPr wrap="square">
-            <a:spAutoFit/>
-          </a:bodyPr>
-          <a:lstStyle/>
-          <a:p>
-            <a:pPr marL="285750" marR="0">
-              <a:spcBef>
-                <a:spcPts val="545"/>
-              </a:spcBef>
-              <a:spcAft>
-                <a:spcPts val="400"/>
-              </a:spcAft>
-              <a:buNone/>
-            </a:pPr>
-            <a:r>
-              <a:rPr lang="en-US" sz="2400" b="1" kern="0" spc="-10" dirty="0">
-                <a:solidFill>
-                  <a:srgbClr val="007439"/>
-                </a:solidFill>
-                <a:effectLst/>
-                <a:latin typeface="+mn-lt"/>
-                <a:ea typeface="Times New Roman" panose="02020603050405020304" pitchFamily="18" charset="0"/>
-                <a:cs typeface="Times New Roman" panose="02020603050405020304" pitchFamily="18" charset="0"/>
-              </a:rPr>
-              <a:t>PURPOSE</a:t>
-            </a:r>
-            <a:endParaRPr lang="en-US" sz="2400" b="1" kern="0" dirty="0">
-              <a:solidFill>
-                <a:srgbClr val="007439"/>
-              </a:solidFill>
-              <a:effectLst/>
-              <a:latin typeface="+mn-lt"/>
-              <a:ea typeface="Times New Roman" panose="02020603050405020304" pitchFamily="18" charset="0"/>
-              <a:cs typeface="Times New Roman" panose="02020603050405020304" pitchFamily="18" charset="0"/>
-            </a:endParaRPr>
-          </a:p>
-          <a:p>
-            <a:pPr marL="285750" marR="0">
-              <a:lnSpc>
-                <a:spcPct val="100000"/>
-              </a:lnSpc>
-              <a:spcBef>
-                <a:spcPts val="0"/>
-              </a:spcBef>
-              <a:spcAft>
-                <a:spcPts val="1400"/>
-              </a:spcAft>
-              <a:buNone/>
-            </a:pPr>
-            <a:r>
-              <a:rPr lang="en-US" sz="2400" dirty="0" err="1">
-                <a:solidFill>
-                  <a:schemeClr val="tx1"/>
-                </a:solidFill>
-                <a:effectLst/>
-                <a:latin typeface="+mn-lt"/>
-                <a:ea typeface="Arial" panose="020B0604020202020204" pitchFamily="34" charset="0"/>
-              </a:rPr>
-              <a:t>Robust merge rules are always scored against FedAvg, which weights each site by how many records it holds. In effect the biggest site gets the loudest vote. Robust rules drop that weighting entirely, so two things change at once.</a:t>
-            </a:r>
-            <a:endParaRPr lang="en-US" sz="1400" dirty="0">
-              <a:effectLst/>
-              <a:latin typeface="Arial" panose="020B0604020202020204" pitchFamily="34" charset="0"/>
-              <a:ea typeface="Arial" panose="020B0604020202020204" pitchFamily="34" charset="0"/>
-            </a:endParaRPr>
-          </a:p>
-          <a:p>
-            <a:pPr marL="285750" marR="0">
-              <a:lnSpc>
-                <a:spcPct val="100000"/>
-              </a:lnSpc>
-              <a:spcBef>
-                <a:spcPts val="0"/>
-              </a:spcBef>
-              <a:spcAft>
-                <a:spcPts val="1400"/>
-              </a:spcAft>
-              <a:buNone/>
-            </a:pPr>
-            <a:r>
-              <a:rPr lang="en-US" sz="2400" dirty="0" err="1" b="1">
-                <a:solidFill>
-                  <a:schemeClr val="tx1"/>
-                </a:solidFill>
-                <a:effectLst/>
-                <a:latin typeface="+mn-lt"/>
-                <a:ea typeface="Arial" panose="020B0604020202020204" pitchFamily="34" charset="0"/>
-              </a:rPr>
-              <a:t xml:space="preserve">The question.</a:t>
-            </a:r>
-            <a:r>
-              <a:rPr lang="en-US" sz="2400" dirty="0" err="1" b="0">
-                <a:solidFill>
-                  <a:schemeClr val="tx1"/>
-                </a:solidFill>
-                <a:effectLst/>
-                <a:latin typeface="+mn-lt"/>
-                <a:ea typeface="Arial" panose="020B0604020202020204" pitchFamily="34" charset="0"/>
-              </a:rPr>
-              <a:t xml:space="preserve">  When a robust rule wins, is it the robust statistic winning, or just the end of the loudest vote?</a:t>
-            </a:r>
-            <a:endParaRPr lang="en-US" sz="1400" dirty="0">
-              <a:effectLst/>
-              <a:latin typeface="Arial" panose="020B0604020202020204" pitchFamily="34" charset="0"/>
-              <a:ea typeface="Arial" panose="020B0604020202020204" pitchFamily="34" charset="0"/>
-            </a:endParaRPr>
-          </a:p>
-        </p:txBody>
-      </p:sp>
-      <p:sp>
-        <p:nvSpPr>
-          <p:cNvPr id="15" name="TextBox 14">
-            <a:extLst>
-              <a:ext uri="{FF2B5EF4-FFF2-40B4-BE49-F238E27FC236}">
-                <a16:creationId xmlns:a16="http://schemas.microsoft.com/office/drawing/2014/main" id="{D46CAF31-D57E-C647-7FD1-0D8FF812F8E9}"/>
-              </a:ext>
-            </a:extLst>
-          </p:cNvPr>
-          <p:cNvSpPr txBox="1"/>
-          <p:nvPr/>
-        </p:nvSpPr>
-        <p:spPr>
-          <a:xfrm>
-            <a:off x="476250" y="16184880"/>
-            <a:ext cx="6037944" cy="22811373"/>
-          </a:xfrm>
-          <a:prstGeom prst="rect">
-            <a:avLst/>
-          </a:prstGeom>
-          <a:noFill/>
-        </p:spPr>
-        <p:txBody>
-          <a:bodyPr wrap="square">
-            <a:spAutoFit/>
-          </a:bodyPr>
-          <a:lstStyle/>
-          <a:p>
-            <a:pPr marL="285750" marR="0">
-              <a:spcBef>
-                <a:spcPts val="545"/>
-              </a:spcBef>
-              <a:spcAft>
-                <a:spcPts val="400"/>
-              </a:spcAft>
-              <a:buNone/>
-            </a:pPr>
-            <a:r>
-              <a:rPr lang="en-US" sz="2400" b="1" kern="0" spc="-10" dirty="0">
-                <a:solidFill>
-                  <a:srgbClr val="007439"/>
-                </a:solidFill>
-                <a:effectLst/>
-                <a:latin typeface="+mn-lt"/>
-                <a:ea typeface="Times New Roman" panose="02020603050405020304" pitchFamily="18" charset="0"/>
-                <a:cs typeface="Times New Roman" panose="02020603050405020304" pitchFamily="18" charset="0"/>
-              </a:rPr>
-              <a:t>METHODS</a:t>
-            </a:r>
-            <a:endParaRPr lang="en-US" sz="2400" b="1" kern="0" dirty="0">
-              <a:solidFill>
-                <a:srgbClr val="007439"/>
-              </a:solidFill>
-              <a:effectLst/>
-              <a:latin typeface="+mn-lt"/>
-              <a:ea typeface="Times New Roman" panose="02020603050405020304" pitchFamily="18" charset="0"/>
-              <a:cs typeface="Times New Roman" panose="02020603050405020304" pitchFamily="18" charset="0"/>
-            </a:endParaRPr>
-          </a:p>
-          <a:p>
-            <a:pPr marL="285750">
-              <a:spcBef>
-                <a:spcPts val="0"/>
-              </a:spcBef>
-              <a:spcAft>
-                <a:spcPts val="1400"/>
-              </a:spcAft>
-            </a:pPr>
-            <a:r>
-              <a:rPr lang="en-US" sz="2400" dirty="0" err="1" b="1">
-                <a:solidFill>
-                  <a:schemeClr val="tx1"/>
-                </a:solidFill>
-                <a:effectLst/>
-                <a:latin typeface="+mn-lt"/>
-                <a:ea typeface="Arial" panose="020B0604020202020204" pitchFamily="34" charset="0"/>
-              </a:rPr>
-              <a:t xml:space="preserve">Seven merge rules, head to head.</a:t>
-            </a:r>
-            <a:r>
-              <a:rPr lang="en-US" sz="2400" dirty="0" err="1" b="0">
-                <a:solidFill>
-                  <a:schemeClr val="tx1"/>
-                </a:solidFill>
-                <a:effectLst/>
-                <a:latin typeface="+mn-lt"/>
-                <a:ea typeface="Arial" panose="020B0604020202020204" pitchFamily="34" charset="0"/>
-              </a:rPr>
-              <a:t xml:space="preserve">  FedAvg, FedProx, CS-Agg, Krum, trimmed mean, coordinate-wise median, and an unweighted mean we added ourselves as a control.</a:t>
-            </a:r>
-          </a:p>
-          <a:p>
-            <a:pPr marL="285750">
-              <a:spcBef>
-                <a:spcPts val="0"/>
-              </a:spcBef>
-              <a:spcAft>
-                <a:spcPts val="1400"/>
-              </a:spcAft>
-            </a:pPr>
-            <a:r>
-              <a:rPr lang="en-US" sz="2400" dirty="0" err="1" b="1">
-                <a:solidFill>
-                  <a:schemeClr val="tx1"/>
-                </a:solidFill>
-                <a:effectLst/>
-                <a:latin typeface="+mn-lt"/>
-                <a:ea typeface="Arial" panose="020B0604020202020204" pitchFamily="34" charset="0"/>
-              </a:rPr>
-              <a:t xml:space="preserve">The control is the experiment.</a:t>
-            </a:r>
-            <a:r>
-              <a:rPr lang="en-US" sz="2400" dirty="0" err="1" b="0">
-                <a:solidFill>
-                  <a:schemeClr val="tx1"/>
-                </a:solidFill>
-                <a:effectLst/>
-                <a:latin typeface="+mn-lt"/>
-                <a:ea typeface="Arial" panose="020B0604020202020204" pitchFamily="34" charset="0"/>
-              </a:rPr>
-              <a:t xml:space="preserve">  It uses no robust statistic at all, and differs from FedAvg in one respect: it ignores how much data each site holds. Anything it gains is weighting.</a:t>
-            </a:r>
-          </a:p>
-          <a:p>
-            <a:pPr marL="285750">
-              <a:spcBef>
-                <a:spcPts val="0"/>
-              </a:spcBef>
-              <a:spcAft>
-                <a:spcPts val="1400"/>
-              </a:spcAft>
-            </a:pPr>
-            <a:r>
-              <a:rPr lang="en-US" sz="2400" dirty="0" err="1" b="1">
-                <a:solidFill>
-                  <a:schemeClr val="tx1"/>
-                </a:solidFill>
-                <a:effectLst/>
-                <a:latin typeface="+mn-lt"/>
-                <a:ea typeface="Arial" panose="020B0604020202020204" pitchFamily="34" charset="0"/>
-              </a:rPr>
-              <a:t xml:space="preserve">The data.</a:t>
-            </a:r>
-            <a:r>
-              <a:rPr lang="en-US" sz="2400" dirty="0" err="1" b="0">
-                <a:solidFill>
-                  <a:schemeClr val="tx1"/>
-                </a:solidFill>
-                <a:effectLst/>
-                <a:latin typeface="+mn-lt"/>
-                <a:ea typeface="Arial" panose="020B0604020202020204" pitchFamily="34" charset="0"/>
-              </a:rPr>
-              <a:t xml:space="preserve">  CDC's 2023 BRFSS survey, 382,709 U.S. adults, predicting self-reported depression, with Breast Cancer Wisconsin alongside as a clean clinical benchmark. The shared model is a small neural network.</a:t>
-            </a:r>
-          </a:p>
-          <a:p>
-            <a:pPr marL="285750">
-              <a:spcBef>
-                <a:spcPts val="0"/>
-              </a:spcBef>
-              <a:spcAft>
-                <a:spcPts val="1400"/>
-              </a:spcAft>
-            </a:pPr>
-            <a:r>
-              <a:rPr lang="en-US" sz="2400" dirty="0" err="1" b="1">
-                <a:solidFill>
-                  <a:schemeClr val="tx1"/>
-                </a:solidFill>
-                <a:effectLst/>
-                <a:latin typeface="+mn-lt"/>
-                <a:ea typeface="Arial" panose="020B0604020202020204" pitchFamily="34" charset="0"/>
-              </a:rPr>
-              <a:t xml:space="preserve">Splitting it up.</a:t>
-            </a:r>
-            <a:r>
-              <a:rPr lang="en-US" sz="2400" dirty="0" err="1" b="0">
-                <a:solidFill>
-                  <a:schemeClr val="tx1"/>
-                </a:solidFill>
-                <a:effectLst/>
-                <a:latin typeface="+mn-lt"/>
-                <a:ea typeface="Arial" panose="020B0604020202020204" pitchFamily="34" charset="0"/>
-              </a:rPr>
-              <a:t xml:space="preserve">  Each dataset is dealt out to 20 simulated sites, deliberately unevenly. The dial, alpha, sets how lopsided: at alpha = 0.1 one site holds over a third of the data and others hold none.</a:t>
-            </a:r>
-          </a:p>
-          <a:p>
-            <a:pPr marL="285750">
-              <a:spcBef>
-                <a:spcPts val="0"/>
-              </a:spcBef>
-              <a:spcAft>
-                <a:spcPts val="1400"/>
-              </a:spcAft>
-            </a:pPr>
-            <a:r>
-              <a:rPr lang="en-US" sz="2400" dirty="0" err="1" b="1">
-                <a:solidFill>
-                  <a:schemeClr val="tx1"/>
-                </a:solidFill>
-                <a:effectLst/>
-                <a:latin typeface="+mn-lt"/>
-                <a:ea typeface="Arial" panose="020B0604020202020204" pitchFamily="34" charset="0"/>
-              </a:rPr>
-              <a:t xml:space="preserve">Breaking the labels.</a:t>
-            </a:r>
-            <a:r>
-              <a:rPr lang="en-US" sz="2400" dirty="0" err="1" b="0">
-                <a:solidFill>
-                  <a:schemeClr val="tx1"/>
-                </a:solidFill>
-                <a:effectLst/>
-                <a:latin typeface="+mn-lt"/>
-                <a:ea typeface="Arial" panose="020B0604020202020204" pitchFamily="34" charset="0"/>
-              </a:rPr>
-              <a:t xml:space="preserve">  We flip labels at 20 percent of sites, across 0 to 30 percent of their records, only the way real people get it wrong: reporting no depression when they have it.</a:t>
-            </a:r>
-          </a:p>
-          <a:p>
-            <a:pPr marL="285750">
-              <a:spcBef>
-                <a:spcPts val="0"/>
-              </a:spcBef>
-              <a:spcAft>
-                <a:spcPts val="1400"/>
-              </a:spcAft>
-            </a:pPr>
-            <a:r>
-              <a:rPr lang="en-US" sz="2400" dirty="0" err="1" b="1">
-                <a:solidFill>
-                  <a:schemeClr val="tx1"/>
-                </a:solidFill>
-                <a:effectLst/>
-                <a:latin typeface="+mn-lt"/>
-                <a:ea typeface="Arial" panose="020B0604020202020204" pitchFamily="34" charset="0"/>
-              </a:rPr>
-              <a:t xml:space="preserve">The scale of it.</a:t>
-            </a:r>
-            <a:r>
-              <a:rPr lang="en-US" sz="2400" dirty="0" err="1" b="0">
-                <a:solidFill>
-                  <a:schemeClr val="tx1"/>
-                </a:solidFill>
-                <a:effectLst/>
-                <a:latin typeface="+mn-lt"/>
-                <a:ea typeface="Arial" panose="020B0604020202020204" pitchFamily="34" charset="0"/>
-              </a:rPr>
-              <a:t xml:space="preserve">  624 conditions covering every rule, dataset, split, noise level and seed. 50 rounds each, scored on a clean held-out test set. Holm-corrected Wilcoxon tests throughout.</a:t>
-            </a:r>
-          </a:p>
-        </p:txBody>
-      </p:sp>
-      <p:sp>
-        <p:nvSpPr>
-          <p:cNvPr id="18" name="TextBox 17">
-            <a:extLst>
-              <a:ext uri="{FF2B5EF4-FFF2-40B4-BE49-F238E27FC236}">
-                <a16:creationId xmlns:a16="http://schemas.microsoft.com/office/drawing/2014/main" id="{49650CBE-7A43-B07A-2977-FBEF02B5F718}"/>
-              </a:ext>
-            </a:extLst>
-          </p:cNvPr>
-          <p:cNvSpPr txBox="1"/>
-          <p:nvPr/>
-        </p:nvSpPr>
-        <p:spPr>
-          <a:xfrm>
-            <a:off x="15254514" y="4572000"/>
-            <a:ext cx="6037944" cy="12285414"/>
-          </a:xfrm>
-          <a:prstGeom prst="rect">
-            <a:avLst/>
-          </a:prstGeom>
-          <a:noFill/>
-        </p:spPr>
-        <p:txBody>
-          <a:bodyPr wrap="square">
-            <a:spAutoFit/>
-          </a:bodyPr>
-          <a:lstStyle/>
-          <a:p>
-            <a:pPr marL="285750" marR="0">
-              <a:spcBef>
-                <a:spcPts val="545"/>
-              </a:spcBef>
-              <a:spcAft>
-                <a:spcPts val="400"/>
-              </a:spcAft>
-              <a:buNone/>
-            </a:pPr>
-            <a:r>
-              <a:rPr lang="en-US" sz="2400" b="1" kern="0" spc="-10" dirty="0">
-                <a:solidFill>
-                  <a:srgbClr val="007439"/>
-                </a:solidFill>
-                <a:effectLst/>
-                <a:latin typeface="+mn-lt"/>
-                <a:ea typeface="Times New Roman" panose="02020603050405020304" pitchFamily="18" charset="0"/>
-                <a:cs typeface="Times New Roman" panose="02020603050405020304" pitchFamily="18" charset="0"/>
-              </a:rPr>
-              <a:t>KEY FINDINGS</a:t>
-            </a:r>
-            <a:endParaRPr lang="en-US" sz="2400" b="1" kern="0" dirty="0">
-              <a:solidFill>
-                <a:srgbClr val="007439"/>
-              </a:solidFill>
-              <a:effectLst/>
-              <a:latin typeface="+mn-lt"/>
-              <a:ea typeface="Times New Roman" panose="02020603050405020304" pitchFamily="18" charset="0"/>
-              <a:cs typeface="Times New Roman" panose="02020603050405020304" pitchFamily="18" charset="0"/>
-            </a:endParaRPr>
-          </a:p>
-          <a:p>
-            <a:pPr marL="285750">
-              <a:spcBef>
-                <a:spcPts val="0"/>
-              </a:spcBef>
-              <a:spcAft>
-                <a:spcPts val="1400"/>
-              </a:spcAft>
-            </a:pPr>
-            <a:r>
-              <a:rPr lang="en-US" sz="2400" dirty="0" err="1" b="1">
-                <a:solidFill>
-                  <a:schemeClr val="tx1"/>
-                </a:solidFill>
-                <a:effectLst/>
-                <a:latin typeface="+mn-lt"/>
-                <a:ea typeface="Arial" panose="020B0604020202020204" pitchFamily="34" charset="0"/>
-              </a:rPr>
-              <a:t xml:space="preserve">1.  Most of the benefit is bookkeeping, not robustness.</a:t>
-            </a:r>
-            <a:r>
-              <a:rPr lang="en-US" sz="2400" dirty="0" err="1" b="0">
-                <a:solidFill>
-                  <a:schemeClr val="tx1"/>
-                </a:solidFill>
-                <a:effectLst/>
-                <a:latin typeface="+mn-lt"/>
-                <a:ea typeface="Arial" panose="020B0604020202020204" pitchFamily="34" charset="0"/>
-              </a:rPr>
-              <a:t xml:space="preserve">  Simply declining to over-weight the biggest site recovers 79 to 98 percent of everything the three strongest robust rules gain over FedAvg.</a:t>
-            </a:r>
-            <a:endParaRPr lang="en-US" sz="1400" dirty="0">
-              <a:latin typeface="Arial" panose="020B0604020202020204" pitchFamily="34" charset="0"/>
-              <a:ea typeface="Arial" panose="020B0604020202020204" pitchFamily="34" charset="0"/>
-            </a:endParaRPr>
-          </a:p>
-          <a:p>
-            <a:pPr marL="285750">
-              <a:spcBef>
-                <a:spcPts val="0"/>
-              </a:spcBef>
-              <a:spcAft>
-                <a:spcPts val="1400"/>
-              </a:spcAft>
-            </a:pPr>
-            <a:r>
-              <a:rPr lang="en-US" sz="2400" dirty="0" err="1" b="1">
-                <a:solidFill>
-                  <a:schemeClr val="tx1"/>
-                </a:solidFill>
-                <a:effectLst/>
-                <a:latin typeface="+mn-lt"/>
-                <a:ea typeface="Arial" panose="020B0604020202020204" pitchFamily="34" charset="0"/>
-              </a:rPr>
-              <a:t xml:space="preserve">2.  Only one rule earns its keep.</a:t>
-            </a:r>
-            <a:r>
-              <a:rPr lang="en-US" sz="2400" dirty="0" err="1" b="0">
-                <a:solidFill>
-                  <a:schemeClr val="tx1"/>
-                </a:solidFill>
-                <a:effectLst/>
-                <a:latin typeface="+mn-lt"/>
-                <a:ea typeface="Arial" panose="020B0604020202020204" pitchFamily="34" charset="0"/>
-              </a:rPr>
-              <a:t xml:space="preserve">  Coordinate-wise median clears the control by +0.0163 AUC (p &lt; 0.0001). Trimmed mean's +0.0026 is real but too small to matter, and CS-Agg cannot be told apart from the control at all (p = 0.22).</a:t>
-            </a:r>
-            <a:endParaRPr lang="en-US" sz="1400" dirty="0">
-              <a:latin typeface="Arial" panose="020B0604020202020204" pitchFamily="34" charset="0"/>
-              <a:ea typeface="Arial" panose="020B0604020202020204" pitchFamily="34" charset="0"/>
-            </a:endParaRPr>
-          </a:p>
-          <a:p>
-            <a:pPr marL="285750">
-              <a:spcBef>
-                <a:spcPts val="0"/>
-              </a:spcBef>
-              <a:spcAft>
-                <a:spcPts val="1400"/>
-              </a:spcAft>
-            </a:pPr>
-            <a:r>
-              <a:rPr lang="en-US" sz="2400" dirty="0" err="1" b="1">
-                <a:solidFill>
-                  <a:schemeClr val="tx1"/>
-                </a:solidFill>
-                <a:effectLst/>
-                <a:latin typeface="+mn-lt"/>
-                <a:ea typeface="Arial" panose="020B0604020202020204" pitchFamily="34" charset="0"/>
-              </a:rPr>
-              <a:t xml:space="preserve">3.  A popular rule does worse than doing nothing.</a:t>
-            </a:r>
-            <a:r>
-              <a:rPr lang="en-US" sz="2400" dirty="0" err="1" b="0">
-                <a:solidFill>
-                  <a:schemeClr val="tx1"/>
-                </a:solidFill>
-                <a:effectLst/>
-                <a:latin typeface="+mn-lt"/>
-                <a:ea typeface="Arial" panose="020B0604020202020204" pitchFamily="34" charset="0"/>
-              </a:rPr>
-              <a:t xml:space="preserve">  Krum lands below the control, and on one run collapses to 0.328 AUC, worse than a coin flip, from a rule chosen for its robustness.</a:t>
-            </a:r>
-            <a:endParaRPr lang="en-US" sz="1400" dirty="0">
-              <a:latin typeface="Arial" panose="020B0604020202020204" pitchFamily="34" charset="0"/>
-              <a:ea typeface="Arial" panose="020B0604020202020204" pitchFamily="34" charset="0"/>
-            </a:endParaRPr>
-          </a:p>
-          <a:p>
-            <a:pPr marL="285750">
-              <a:spcBef>
-                <a:spcPts val="0"/>
-              </a:spcBef>
-              <a:spcAft>
-                <a:spcPts val="1400"/>
-              </a:spcAft>
-            </a:pPr>
-            <a:r>
-              <a:rPr lang="en-US" sz="2400" dirty="0" err="1" b="1">
-                <a:solidFill>
-                  <a:schemeClr val="tx1"/>
-                </a:solidFill>
-                <a:effectLst/>
-                <a:latin typeface="+mn-lt"/>
-                <a:ea typeface="Arial" panose="020B0604020202020204" pitchFamily="34" charset="0"/>
-              </a:rPr>
-              <a:t xml:space="preserve">4.  Lopsided data hurts far more than broken labels.</a:t>
-            </a:r>
-            <a:r>
-              <a:rPr lang="en-US" sz="2400" dirty="0" err="1" b="0">
-                <a:solidFill>
-                  <a:schemeClr val="tx1"/>
-                </a:solidFill>
-                <a:effectLst/>
-                <a:latin typeface="+mn-lt"/>
-                <a:ea typeface="Arial" panose="020B0604020202020204" pitchFamily="34" charset="0"/>
-              </a:rPr>
-              <a:t xml:space="preserve">  About a hundred times more. That gap narrows when each site tracks more health variables, but it never closes.</a:t>
-            </a:r>
-            <a:endParaRPr lang="en-US" sz="1400" dirty="0">
-              <a:latin typeface="Arial" panose="020B0604020202020204" pitchFamily="34" charset="0"/>
-              <a:ea typeface="Arial" panose="020B0604020202020204" pitchFamily="34" charset="0"/>
-            </a:endParaRPr>
-          </a:p>
-          <a:p>
-            <a:pPr marL="285750">
-              <a:spcBef>
-                <a:spcPts val="0"/>
-              </a:spcBef>
-              <a:spcAft>
-                <a:spcPts val="1400"/>
-              </a:spcAft>
-            </a:pPr>
-            <a:r>
-              <a:rPr lang="en-US" sz="2400" dirty="0" err="1" b="1">
-                <a:solidFill>
-                  <a:schemeClr val="tx1"/>
-                </a:solidFill>
-                <a:effectLst/>
-                <a:latin typeface="+mn-lt"/>
-                <a:ea typeface="Arial" panose="020B0604020202020204" pitchFamily="34" charset="0"/>
-              </a:rPr>
-              <a:t xml:space="preserve">5.  A clean benchmark would have hidden all of this.</a:t>
-            </a:r>
-            <a:r>
-              <a:rPr lang="en-US" sz="2400" dirty="0" err="1" b="0">
-                <a:solidFill>
-                  <a:schemeClr val="tx1"/>
-                </a:solidFill>
-                <a:effectLst/>
-                <a:latin typeface="+mn-lt"/>
-                <a:ea typeface="Arial" panose="020B0604020202020204" pitchFamily="34" charset="0"/>
-              </a:rPr>
-              <a:t xml:space="preserve">  On Breast Cancer every rule but Krum reaches 0.997 AUC or better, where no difference is visible. Messy self-reported population health data is where these rules actually separate.</a:t>
-            </a:r>
-            <a:endParaRPr lang="en-US" sz="1400" dirty="0">
-              <a:latin typeface="Arial" panose="020B0604020202020204" pitchFamily="34" charset="0"/>
-              <a:ea typeface="Arial" panose="020B0604020202020204" pitchFamily="34" charset="0"/>
-            </a:endParaRPr>
-          </a:p>
-        </p:txBody>
-      </p:sp>
-      <p:sp>
-        <p:nvSpPr>
-          <p:cNvPr id="22" name="TextBox 21">
-            <a:extLst>
-              <a:ext uri="{FF2B5EF4-FFF2-40B4-BE49-F238E27FC236}">
-                <a16:creationId xmlns:a16="http://schemas.microsoft.com/office/drawing/2014/main" id="{9CA64D05-C512-D942-595F-9195ABBB95E6}"/>
-              </a:ext>
-            </a:extLst>
-          </p:cNvPr>
-          <p:cNvSpPr txBox="1"/>
-          <p:nvPr/>
-        </p:nvSpPr>
-        <p:spPr>
-          <a:xfrm>
-            <a:off x="15254514" y="15544800"/>
-            <a:ext cx="6037944" cy="6283771"/>
-          </a:xfrm>
-          <a:prstGeom prst="rect">
-            <a:avLst/>
-          </a:prstGeom>
-          <a:noFill/>
-        </p:spPr>
-        <p:txBody>
-          <a:bodyPr wrap="square">
-            <a:spAutoFit/>
-          </a:bodyPr>
-          <a:lstStyle/>
-          <a:p>
-            <a:pPr marL="285750" marR="0">
-              <a:spcBef>
-                <a:spcPts val="545"/>
-              </a:spcBef>
-              <a:spcAft>
-                <a:spcPts val="400"/>
-              </a:spcAft>
-              <a:buNone/>
-            </a:pPr>
-            <a:r>
-              <a:rPr lang="en-US" sz="2400" b="1" kern="0" spc="-10" dirty="0">
-                <a:solidFill>
-                  <a:srgbClr val="007439"/>
-                </a:solidFill>
-                <a:effectLst/>
-                <a:latin typeface="+mn-lt"/>
-                <a:ea typeface="Times New Roman" panose="02020603050405020304" pitchFamily="18" charset="0"/>
-                <a:cs typeface="Times New Roman" panose="02020603050405020304" pitchFamily="18" charset="0"/>
-              </a:rPr>
-              <a:t>CONCLUSION</a:t>
-            </a:r>
-            <a:endParaRPr lang="en-US" sz="2400" b="1" kern="0" dirty="0">
-              <a:solidFill>
-                <a:srgbClr val="007439"/>
-              </a:solidFill>
-              <a:effectLst/>
-              <a:latin typeface="+mn-lt"/>
-              <a:ea typeface="Times New Roman" panose="02020603050405020304" pitchFamily="18" charset="0"/>
-              <a:cs typeface="Times New Roman" panose="02020603050405020304" pitchFamily="18" charset="0"/>
-            </a:endParaRPr>
-          </a:p>
-          <a:p>
-            <a:pPr marL="285750">
-              <a:spcBef>
-                <a:spcPts val="0"/>
-              </a:spcBef>
-              <a:spcAft>
-                <a:spcPts val="1400"/>
-              </a:spcAft>
-            </a:pPr>
-            <a:r>
-              <a:rPr lang="en-US" sz="2400" dirty="0" err="1">
-                <a:solidFill>
-                  <a:schemeClr val="tx1"/>
-                </a:solidFill>
-                <a:effectLst/>
-                <a:latin typeface="+mn-lt"/>
-                <a:ea typeface="Arial" panose="020B0604020202020204" pitchFamily="34" charset="0"/>
-              </a:rPr>
-              <a:t>Across the datasets and partitioning studied here, most of the advantage robust aggregators hold over FedAvg comes from how they weight sites, not from the robust statistic they are named for.</a:t>
-            </a:r>
-            <a:endParaRPr lang="en-US" sz="1400" dirty="0">
-              <a:latin typeface="Arial" panose="020B0604020202020204" pitchFamily="34" charset="0"/>
-              <a:ea typeface="Arial" panose="020B0604020202020204" pitchFamily="34" charset="0"/>
-            </a:endParaRPr>
-          </a:p>
-          <a:p>
-            <a:pPr marL="285750">
-              <a:spcBef>
-                <a:spcPts val="0"/>
-              </a:spcBef>
-              <a:spcAft>
-                <a:spcPts val="1400"/>
-              </a:spcAft>
-            </a:pPr>
-            <a:r>
-              <a:rPr lang="en-US" sz="2400" dirty="0" err="1" b="1">
-                <a:solidFill>
-                  <a:schemeClr val="tx1"/>
-                </a:solidFill>
-                <a:effectLst/>
-                <a:latin typeface="+mn-lt"/>
-                <a:ea typeface="Arial" panose="020B0604020202020204" pitchFamily="34" charset="0"/>
-              </a:rPr>
-              <a:t xml:space="preserve">What to do about it.</a:t>
-            </a:r>
-            <a:r>
-              <a:rPr lang="en-US" sz="2400" dirty="0" err="1" b="0">
-                <a:solidFill>
-                  <a:schemeClr val="tx1"/>
-                </a:solidFill>
-                <a:effectLst/>
-                <a:latin typeface="+mn-lt"/>
-                <a:ea typeface="Arial" panose="020B0604020202020204" pitchFamily="34" charset="0"/>
-              </a:rPr>
-              <a:t xml:space="preserve">  Any robustness evaluation run on size-skewed data should include an unweighted-mean control. It is one line of code, and without it a reported gain cannot be credited to robustness.</a:t>
-            </a:r>
-            <a:endParaRPr lang="en-US" sz="1400" dirty="0">
-              <a:latin typeface="Arial" panose="020B0604020202020204" pitchFamily="34" charset="0"/>
-              <a:ea typeface="Arial" panose="020B0604020202020204" pitchFamily="34" charset="0"/>
-            </a:endParaRPr>
-          </a:p>
-          <a:p>
-            <a:pPr marL="285750">
-              <a:spcBef>
-                <a:spcPts val="0"/>
-              </a:spcBef>
-              <a:spcAft>
-                <a:spcPts val="1400"/>
-              </a:spcAft>
-            </a:pPr>
-            <a:r>
-              <a:rPr lang="en-US" sz="2400" dirty="0" err="1" b="1">
-                <a:solidFill>
-                  <a:schemeClr val="tx1"/>
-                </a:solidFill>
-                <a:effectLst/>
-                <a:latin typeface="+mn-lt"/>
-                <a:ea typeface="Arial" panose="020B0604020202020204" pitchFamily="34" charset="0"/>
-              </a:rPr>
-              <a:t xml:space="preserve">Why it matters in the field.</a:t>
-            </a:r>
-            <a:r>
-              <a:rPr lang="en-US" sz="2400" dirty="0" err="1" b="0">
-                <a:solidFill>
-                  <a:schemeClr val="tx1"/>
-                </a:solidFill>
-                <a:effectLst/>
-                <a:latin typeface="+mn-lt"/>
-                <a:ea typeface="Arial" panose="020B0604020202020204" pitchFamily="34" charset="0"/>
-              </a:rPr>
-              <a:t xml:space="preserve">  A rule's reputation is not evidence. Krum is widely cited and failed badly here. Coordinate-wise median is about as simple as merge rules get, and it held.</a:t>
-            </a:r>
-            <a:endParaRPr lang="en-US" sz="1400" dirty="0">
-              <a:latin typeface="Arial" panose="020B0604020202020204" pitchFamily="34" charset="0"/>
-              <a:ea typeface="Arial" panose="020B0604020202020204" pitchFamily="34" charset="0"/>
-            </a:endParaRPr>
-          </a:p>
-        </p:txBody>
-      </p:sp>
-      <p:sp>
-        <p:nvSpPr>
-          <p:cNvPr id="24" name="TextBox 23">
-            <a:extLst>
-              <a:ext uri="{FF2B5EF4-FFF2-40B4-BE49-F238E27FC236}">
-                <a16:creationId xmlns:a16="http://schemas.microsoft.com/office/drawing/2014/main" id="{1ED2C008-5246-117D-1B16-79F6DB43B572}"/>
-              </a:ext>
-            </a:extLst>
-          </p:cNvPr>
-          <p:cNvSpPr txBox="1"/>
-          <p:nvPr/>
-        </p:nvSpPr>
-        <p:spPr>
-          <a:xfrm>
-            <a:off x="15254514" y="22677120"/>
-            <a:ext cx="6037944" cy="10284867"/>
-          </a:xfrm>
-          <a:prstGeom prst="rect">
-            <a:avLst/>
-          </a:prstGeom>
-          <a:noFill/>
-        </p:spPr>
-        <p:txBody>
-          <a:bodyPr wrap="square">
-            <a:spAutoFit/>
-          </a:bodyPr>
-          <a:lstStyle/>
-          <a:p>
-            <a:pPr marL="285750" marR="0">
-              <a:spcBef>
-                <a:spcPts val="545"/>
-              </a:spcBef>
-              <a:spcAft>
-                <a:spcPts val="400"/>
-              </a:spcAft>
-              <a:buNone/>
-            </a:pPr>
-            <a:r>
-              <a:rPr lang="en-US" sz="2400" b="1" kern="0" spc="-10" dirty="0">
-                <a:solidFill>
-                  <a:srgbClr val="007439"/>
-                </a:solidFill>
-                <a:effectLst/>
-                <a:latin typeface="+mn-lt"/>
-                <a:ea typeface="Times New Roman" panose="02020603050405020304" pitchFamily="18" charset="0"/>
-                <a:cs typeface="Times New Roman" panose="02020603050405020304" pitchFamily="18" charset="0"/>
-              </a:rPr>
-              <a:t>REFERENCES</a:t>
-            </a:r>
-            <a:endParaRPr lang="en-US" sz="2400" b="1" kern="0" dirty="0">
-              <a:solidFill>
-                <a:srgbClr val="007439"/>
-              </a:solidFill>
-              <a:effectLst/>
-              <a:latin typeface="+mn-lt"/>
-              <a:ea typeface="Times New Roman" panose="02020603050405020304" pitchFamily="18" charset="0"/>
-              <a:cs typeface="Times New Roman" panose="02020603050405020304" pitchFamily="18" charset="0"/>
-            </a:endParaRPr>
-          </a:p>
-          <a:p>
-            <a:pPr marL="285750">
-              <a:spcBef>
-                <a:spcPts val="0"/>
-              </a:spcBef>
-              <a:spcAft>
-                <a:spcPts val="1400"/>
-              </a:spcAft>
-            </a:pPr>
-            <a:r>
-              <a:rPr lang="en-US" sz="2400" dirty="0" err="1">
-                <a:solidFill>
-                  <a:schemeClr val="tx1"/>
-                </a:solidFill>
-                <a:effectLst/>
-                <a:latin typeface="+mn-lt"/>
-                <a:ea typeface="Arial" panose="020B0604020202020204" pitchFamily="34" charset="0"/>
-              </a:rPr>
-              <a:t>[1]  McMahan et al. Communication-efficient learning of deep networks from decentralized data. AISTATS, 2017.</a:t>
-            </a:r>
-            <a:endParaRPr lang="en-US" sz="1400" dirty="0">
-              <a:latin typeface="Arial" panose="020B0604020202020204" pitchFamily="34" charset="0"/>
-              <a:ea typeface="Arial" panose="020B0604020202020204" pitchFamily="34" charset="0"/>
-            </a:endParaRPr>
-          </a:p>
-          <a:p>
-            <a:pPr marL="285750">
-              <a:spcBef>
-                <a:spcPts val="0"/>
-              </a:spcBef>
-              <a:spcAft>
-                <a:spcPts val="1400"/>
-              </a:spcAft>
-            </a:pPr>
-            <a:r>
-              <a:rPr lang="en-US" sz="2400" dirty="0" err="1">
-                <a:solidFill>
-                  <a:schemeClr val="tx1"/>
-                </a:solidFill>
-                <a:effectLst/>
-                <a:latin typeface="+mn-lt"/>
-                <a:ea typeface="Arial" panose="020B0604020202020204" pitchFamily="34" charset="0"/>
-              </a:rPr>
-              <a:t>[2]  Blanchard et al. Machine learning with adversaries: Byzantine tolerant gradient descent. NIPS, 2017.</a:t>
-            </a:r>
-            <a:endParaRPr lang="en-US" sz="1400" dirty="0">
-              <a:latin typeface="Arial" panose="020B0604020202020204" pitchFamily="34" charset="0"/>
-              <a:ea typeface="Arial" panose="020B0604020202020204" pitchFamily="34" charset="0"/>
-            </a:endParaRPr>
-          </a:p>
-          <a:p>
-            <a:pPr marL="285750">
-              <a:spcBef>
-                <a:spcPts val="0"/>
-              </a:spcBef>
-              <a:spcAft>
-                <a:spcPts val="1400"/>
-              </a:spcAft>
-            </a:pPr>
-            <a:r>
-              <a:rPr lang="en-US" sz="2400" dirty="0" err="1">
-                <a:solidFill>
-                  <a:schemeClr val="tx1"/>
-                </a:solidFill>
-                <a:effectLst/>
-                <a:latin typeface="+mn-lt"/>
-                <a:ea typeface="Arial" panose="020B0604020202020204" pitchFamily="34" charset="0"/>
-              </a:rPr>
-              <a:t>[3]  Yin et al. Byzantine-robust distributed learning: towards optimal statistical rates. ICML, 2018.</a:t>
-            </a:r>
-            <a:endParaRPr lang="en-US" sz="1400" dirty="0">
-              <a:latin typeface="Arial" panose="020B0604020202020204" pitchFamily="34" charset="0"/>
-              <a:ea typeface="Arial" panose="020B0604020202020204" pitchFamily="34" charset="0"/>
-            </a:endParaRPr>
-          </a:p>
-          <a:p>
-            <a:pPr marL="285750">
-              <a:spcBef>
-                <a:spcPts val="0"/>
-              </a:spcBef>
-              <a:spcAft>
-                <a:spcPts val="1400"/>
-              </a:spcAft>
-            </a:pPr>
-            <a:r>
-              <a:rPr lang="en-US" sz="2400" dirty="0" err="1">
-                <a:solidFill>
-                  <a:schemeClr val="tx1"/>
-                </a:solidFill>
-                <a:effectLst/>
-                <a:latin typeface="+mn-lt"/>
-                <a:ea typeface="Arial" panose="020B0604020202020204" pitchFamily="34" charset="0"/>
-              </a:rPr>
-              <a:t>[4]  Karimireddy et al. Byzantine-robust learning on heterogeneous datasets via bucketing. ICLR, 2022.</a:t>
-            </a:r>
-            <a:endParaRPr lang="en-US" sz="1400" dirty="0">
-              <a:latin typeface="Arial" panose="020B0604020202020204" pitchFamily="34" charset="0"/>
-              <a:ea typeface="Arial" panose="020B0604020202020204" pitchFamily="34" charset="0"/>
-            </a:endParaRPr>
-          </a:p>
-          <a:p>
-            <a:pPr marL="285750">
-              <a:spcBef>
-                <a:spcPts val="0"/>
-              </a:spcBef>
-              <a:spcAft>
-                <a:spcPts val="1400"/>
-              </a:spcAft>
-            </a:pPr>
-            <a:r>
-              <a:rPr lang="en-US" sz="2400" dirty="0" err="1">
-                <a:solidFill>
-                  <a:schemeClr val="tx1"/>
-                </a:solidFill>
-                <a:effectLst/>
-                <a:latin typeface="+mn-lt"/>
-                <a:ea typeface="Arial" panose="020B0604020202020204" pitchFamily="34" charset="0"/>
-              </a:rPr>
-              <a:t>[5]  Hsu et al. Measuring the effects of non-identical data distribution for federated visual classification. arXiv:1909.06335, 2019.</a:t>
-            </a:r>
-            <a:endParaRPr lang="en-US" sz="1400" dirty="0">
-              <a:latin typeface="Arial" panose="020B0604020202020204" pitchFamily="34" charset="0"/>
-              <a:ea typeface="Arial" panose="020B0604020202020204" pitchFamily="34" charset="0"/>
-            </a:endParaRPr>
-          </a:p>
-          <a:p>
-            <a:pPr marL="285750">
-              <a:spcBef>
-                <a:spcPts val="0"/>
-              </a:spcBef>
-              <a:spcAft>
-                <a:spcPts val="1400"/>
-              </a:spcAft>
-            </a:pPr>
-            <a:r>
-              <a:rPr lang="en-US" sz="2400" dirty="0" err="1">
-                <a:solidFill>
-                  <a:schemeClr val="tx1"/>
-                </a:solidFill>
-                <a:effectLst/>
-                <a:latin typeface="+mn-lt"/>
-                <a:ea typeface="Arial" panose="020B0604020202020204" pitchFamily="34" charset="0"/>
-              </a:rPr>
-              <a:t>[6]  Centers for Disease Control and Prevention. BRFSS 2023 survey data and documentation.</a:t>
-            </a:r>
-            <a:endParaRPr lang="en-US" sz="1400" dirty="0">
-              <a:latin typeface="Arial" panose="020B0604020202020204" pitchFamily="34" charset="0"/>
-              <a:ea typeface="Arial" panose="020B0604020202020204" pitchFamily="34" charset="0"/>
-            </a:endParaRPr>
-          </a:p>
-        </p:txBody>
-      </p:sp>
-      <p:sp>
-        <p:nvSpPr>
-          <p:cNvPr id="13" name="TextBox 12">
-            <a:extLst>
-              <a:ext uri="{FF2B5EF4-FFF2-40B4-BE49-F238E27FC236}">
-                <a16:creationId xmlns:a16="http://schemas.microsoft.com/office/drawing/2014/main" id="{E5F4D14D-1AA2-22EE-152A-DA045E782511}"/>
-              </a:ext>
-            </a:extLst>
-          </p:cNvPr>
-          <p:cNvSpPr txBox="1"/>
-          <p:nvPr/>
-        </p:nvSpPr>
-        <p:spPr>
-          <a:xfrm>
-            <a:off x="457200" y="3200400"/>
-            <a:ext cx="21031200" cy="1005840"/>
-          </a:xfrm>
-          <a:prstGeom prst="rect">
-            <a:avLst/>
-          </a:prstGeom>
-          <a:noFill/>
-        </p:spPr>
-        <p:txBody>
-          <a:bodyPr wrap="square">
-            <a:spAutoFit/>
-          </a:bodyPr>
-          <a:lstStyle/>
-          <a:p>
-            <a:pPr marL="285750" marR="0">
-              <a:spcBef>
-                <a:spcPts val="545"/>
-              </a:spcBef>
-              <a:spcAft>
-                <a:spcPts val="400"/>
-              </a:spcAft>
-              <a:buNone/>
-            </a:pPr>
-            <a:r>
-              <a:rPr lang="en-US" sz="2800" b="1" kern="0" spc="-10" dirty="0" i="1">
-                <a:solidFill>
-                  <a:srgbClr val="007439"/>
-                </a:solidFill>
-                <a:effectLst/>
-                <a:latin typeface="+mn-lt"/>
-                <a:ea typeface="Times New Roman" panose="02020603050405020304" pitchFamily="18" charset="0"/>
-                <a:cs typeface="Times New Roman" panose="02020603050405020304" pitchFamily="18" charset="0"/>
-              </a:rPr>
-              <a:t>Hospitals cannot share patient data. Federated learning gets around that. We found the field is crediting the wrong thing.</a:t>
-            </a:r>
-            <a:endParaRPr lang="en-US" sz="2400" b="1" kern="0" dirty="0">
-              <a:solidFill>
-                <a:srgbClr val="007439"/>
-              </a:solidFill>
-              <a:effectLst/>
-              <a:latin typeface="+mn-lt"/>
-              <a:ea typeface="Times New Roman" panose="02020603050405020304" pitchFamily="18" charset="0"/>
-              <a:cs typeface="Times New Roman" panose="02020603050405020304" pitchFamily="18" charset="0"/>
-            </a:endParaRPr>
-          </a:p>
-        </p:txBody>
-      </p:sp>
-      <p:sp>
-        <p:nvSpPr>
-          <p:cNvPr id="13" name="TextBox 12">
-            <a:extLst>
-              <a:ext uri="{FF2B5EF4-FFF2-40B4-BE49-F238E27FC236}">
-                <a16:creationId xmlns:a16="http://schemas.microsoft.com/office/drawing/2014/main" id="{E5F4D14D-1AA2-22EE-152A-DA045E782511}"/>
-              </a:ext>
-            </a:extLst>
-          </p:cNvPr>
-          <p:cNvSpPr txBox="1"/>
-          <p:nvPr/>
-        </p:nvSpPr>
-        <p:spPr>
-          <a:xfrm>
-            <a:off x="457200" y="28620720"/>
-            <a:ext cx="4206240" cy="2377440"/>
-          </a:xfrm>
-          <a:prstGeom prst="rect">
-            <a:avLst/>
-          </a:prstGeom>
-          <a:noFill/>
-        </p:spPr>
-        <p:txBody>
-          <a:bodyPr wrap="square">
-            <a:spAutoFit/>
-          </a:bodyPr>
-          <a:lstStyle/>
-          <a:p>
-            <a:pPr marL="285750" marR="0">
-              <a:spcBef>
-                <a:spcPts val="545"/>
-              </a:spcBef>
-              <a:spcAft>
-                <a:spcPts val="400"/>
-              </a:spcAft>
-              <a:buNone/>
-            </a:pPr>
-            <a:r>
-              <a:rPr lang="en-US" sz="2400" b="1" kern="0" spc="-10" dirty="0">
-                <a:solidFill>
-                  <a:srgbClr val="007439"/>
-                </a:solidFill>
-                <a:effectLst/>
-                <a:latin typeface="+mn-lt"/>
-                <a:ea typeface="Times New Roman" panose="02020603050405020304" pitchFamily="18" charset="0"/>
-                <a:cs typeface="Times New Roman" panose="02020603050405020304" pitchFamily="18" charset="0"/>
-              </a:rPr>
-              <a:t>CODE &amp; DATA</a:t>
-            </a:r>
-            <a:endParaRPr lang="en-US" sz="2400" b="1" kern="0" dirty="0">
-              <a:solidFill>
-                <a:srgbClr val="007439"/>
-              </a:solidFill>
-              <a:effectLst/>
-              <a:latin typeface="+mn-lt"/>
-              <a:ea typeface="Times New Roman" panose="02020603050405020304" pitchFamily="18" charset="0"/>
-              <a:cs typeface="Times New Roman" panose="02020603050405020304" pitchFamily="18" charset="0"/>
-            </a:endParaRPr>
-          </a:p>
-          <a:p>
-            <a:pPr marL="285750" marR="0">
-              <a:lnSpc>
-                <a:spcPct val="100000"/>
-              </a:lnSpc>
-              <a:spcBef>
-                <a:spcPts val="0"/>
-              </a:spcBef>
-              <a:spcAft>
-                <a:spcPts val="1400"/>
-              </a:spcAft>
-              <a:buNone/>
-            </a:pPr>
-            <a:r>
-              <a:rPr lang="en-US" sz="2400" dirty="0" err="1">
-                <a:solidFill>
-                  <a:schemeClr val="tx1"/>
-                </a:solidFill>
-                <a:effectLst/>
-                <a:latin typeface="+mn-lt"/>
-                <a:ea typeface="Arial" panose="020B0604020202020204" pitchFamily="34" charset="0"/>
-              </a:rPr>
-              <a:t>Code, merged results and the full experimental harness are open, with a script that re-checks every number on this poster.</a:t>
-            </a:r>
-            <a:endParaRPr lang="en-US" sz="1400" dirty="0">
-              <a:effectLst/>
-              <a:latin typeface="Arial" panose="020B0604020202020204" pitchFamily="34" charset="0"/>
-              <a:ea typeface="Arial" panose="020B0604020202020204" pitchFamily="34" charset="0"/>
-            </a:endParaRPr>
-          </a:p>
-          <a:p>
-            <a:pPr marL="285750" marR="0">
-              <a:lnSpc>
-                <a:spcPct val="100000"/>
-              </a:lnSpc>
-              <a:spcBef>
-                <a:spcPts val="0"/>
-              </a:spcBef>
-              <a:spcAft>
-                <a:spcPts val="1400"/>
-              </a:spcAft>
-              <a:buNone/>
-            </a:pPr>
-            <a:r>
-              <a:rPr lang="en-US" sz="2000" dirty="0" err="1">
-                <a:solidFill>
-                  <a:schemeClr val="tx1"/>
-                </a:solidFill>
-                <a:effectLst/>
-                <a:latin typeface="+mn-lt"/>
-                <a:ea typeface="Arial" panose="020B0604020202020204" pitchFamily="34" charset="0"/>
-              </a:rPr>
-              <a:t>github.com/kunalchevuri/federated-learning-health-robustness</a:t>
-            </a:r>
-            <a:endParaRPr lang="en-US" sz="1400" dirty="0">
-              <a:effectLst/>
-              <a:latin typeface="Arial" panose="020B0604020202020204" pitchFamily="34" charset="0"/>
-              <a:ea typeface="Arial" panose="020B0604020202020204" pitchFamily="34" charset="0"/>
-            </a:endParaRPr>
+              <a:rPr sz="1900">
+                <a:solidFill>
+                  <a:srgbClr val="1A1A1A"/>
+                </a:solidFill>
+                <a:latin typeface="Calibri"/>
+              </a:rPr>
+              <a:t>Each site trains on its own data and sends only the model update, which the server merges into one shared model.</a:t>
+            </a:r>
           </a:p>
         </p:txBody>
       </p:sp>
       <p:pic>
         <p:nvPicPr>
-          <p:cNvPr id="25" name="Picture 24" descr="posterD_federated.png"/>
+          <p:cNvPr id="21" name="Picture 20" descr="posterD_federated.png"/>
           <p:cNvPicPr>
             <a:picLocks noChangeAspect="1"/>
           </p:cNvPicPr>
@@ -4706,17 +3575,156 @@
         </p:blipFill>
         <p:spPr>
           <a:xfrm>
-            <a:off x="457200" y="8595360"/>
-            <a:ext cx="6035040" cy="2651760"/>
+            <a:off x="548640" y="11067941"/>
+            <a:ext cx="6638544" cy="2606040"/>
           </a:xfrm>
           <a:prstGeom prst="rect">
             <a:avLst/>
           </a:prstGeom>
         </p:spPr>
       </p:pic>
+      <p:sp>
+        <p:nvSpPr>
+          <p:cNvPr id="22" name="Rectangle 21"/>
+          <p:cNvSpPr/>
+          <p:nvPr/>
+        </p:nvSpPr>
+        <p:spPr>
+          <a:xfrm>
+            <a:off x="548640" y="13856861"/>
+            <a:ext cx="6638544" cy="713232"/>
+          </a:xfrm>
+          <a:prstGeom prst="rect">
+            <a:avLst/>
+          </a:prstGeom>
+          <a:solidFill>
+            <a:srgbClr val="007439"/>
+          </a:solidFill>
+          <a:ln>
+            <a:noFill/>
+          </a:ln>
+          <a:effectLst/>
+        </p:spPr>
+        <p:style>
+          <a:lnRef idx="1">
+            <a:schemeClr val="accent1"/>
+          </a:lnRef>
+          <a:fillRef idx="3">
+            <a:schemeClr val="accent1"/>
+          </a:fillRef>
+          <a:effectRef idx="2">
+            <a:schemeClr val="accent1"/>
+          </a:effectRef>
+          <a:fontRef idx="minor">
+            <a:schemeClr val="lt1"/>
+          </a:fontRef>
+        </p:style>
+        <p:txBody>
+          <a:bodyPr rtlCol="0" anchor="ctr" wrap="square" lIns="146304" rIns="146304" tIns="0" bIns="0"/>
+          <a:lstStyle/>
+          <a:p>
+            <a:pPr algn="l"/>
+            <a:r>
+              <a:rPr sz="2500" b="1">
+                <a:solidFill>
+                  <a:srgbClr val="FFFFFF"/>
+                </a:solidFill>
+                <a:latin typeface="Calibri"/>
+              </a:rPr>
+              <a:t>Dataset</a:t>
+            </a:r>
+          </a:p>
+        </p:txBody>
+      </p:sp>
+      <p:sp>
+        <p:nvSpPr>
+          <p:cNvPr id="23" name="TextBox 22"/>
+          <p:cNvSpPr txBox="1"/>
+          <p:nvPr/>
+        </p:nvSpPr>
+        <p:spPr>
+          <a:xfrm>
+            <a:off x="548640" y="14679821"/>
+            <a:ext cx="6638544" cy="2517648"/>
+          </a:xfrm>
+          <a:prstGeom prst="rect">
+            <a:avLst/>
+          </a:prstGeom>
+          <a:noFill/>
+        </p:spPr>
+        <p:txBody>
+          <a:bodyPr wrap="square" lIns="54864" rIns="0" tIns="0" bIns="0">
+            <a:spAutoFit/>
+          </a:bodyPr>
+          <a:lstStyle/>
+          <a:p>
+            <a:pPr indent="-215900" marL="215900">
+              <a:spcBef>
+                <a:spcPts val="0"/>
+              </a:spcBef>
+              <a:spcAft>
+                <a:spcPts val="800"/>
+              </a:spcAft>
+              <a:buFont typeface="Arial"/>
+              <a:buChar char="•"/>
+            </a:pPr>
+            <a:r>
+              <a:rPr sz="1900">
+                <a:solidFill>
+                  <a:srgbClr val="1A1A1A"/>
+                </a:solidFill>
+                <a:latin typeface="Calibri"/>
+              </a:rPr>
+              <a:t>CDC BRFSS 2023: 382,709 U.S. adults, predicting self-reported depression, which 20.7% of respondents report.</a:t>
+            </a:r>
+          </a:p>
+          <a:p>
+            <a:pPr indent="-215900" marL="215900">
+              <a:spcBef>
+                <a:spcPts val="0"/>
+              </a:spcBef>
+              <a:spcAft>
+                <a:spcPts val="800"/>
+              </a:spcAft>
+              <a:buFont typeface="Arial"/>
+              <a:buChar char="•"/>
+            </a:pPr>
+            <a:r>
+              <a:rPr sz="1900">
+                <a:solidFill>
+                  <a:srgbClr val="1A1A1A"/>
+                </a:solidFill>
+                <a:latin typeface="Calibri"/>
+              </a:rPr>
+              <a:t>UCI Breast Cancer Wisconsin runs alongside as a clean clinical benchmark.</a:t>
+            </a:r>
+          </a:p>
+          <a:p>
+            <a:pPr indent="-215900" marL="215900">
+              <a:spcBef>
+                <a:spcPts val="0"/>
+              </a:spcBef>
+              <a:spcAft>
+                <a:spcPts val="800"/>
+              </a:spcAft>
+              <a:buFont typeface="Arial"/>
+              <a:buChar char="•"/>
+            </a:pPr>
+            <a:r>
+              <a:rPr sz="1900">
+                <a:solidFill>
+                  <a:srgbClr val="1A1A1A"/>
+                </a:solidFill>
+                <a:latin typeface="Calibri"/>
+              </a:rPr>
+              <a:t>Each dataset is dealt to 20 simulated sites by Dirichlet partitioning, whose dial alpha sets how lopsided the split is.</a:t>
+            </a:r>
+          </a:p>
+        </p:txBody>
+      </p:sp>
       <p:pic>
         <p:nvPicPr>
-          <p:cNvPr id="26" name="Picture 25" descr="posterA_decomposition.png"/>
+          <p:cNvPr id="24" name="Picture 23" descr="posterF_partition.png"/>
           <p:cNvPicPr>
             <a:picLocks noChangeAspect="1"/>
           </p:cNvPicPr>
@@ -4730,17 +3738,175 @@
         </p:blipFill>
         <p:spPr>
           <a:xfrm>
-            <a:off x="7589520" y="8503920"/>
-            <a:ext cx="6766560" cy="7680960"/>
+            <a:off x="548640" y="17380349"/>
+            <a:ext cx="6638544" cy="3977639"/>
           </a:xfrm>
           <a:prstGeom prst="rect">
             <a:avLst/>
           </a:prstGeom>
         </p:spPr>
       </p:pic>
+      <p:sp>
+        <p:nvSpPr>
+          <p:cNvPr id="25" name="TextBox 24"/>
+          <p:cNvSpPr txBox="1"/>
+          <p:nvPr/>
+        </p:nvSpPr>
+        <p:spPr>
+          <a:xfrm>
+            <a:off x="548640" y="21540869"/>
+            <a:ext cx="6638544" cy="802277"/>
+          </a:xfrm>
+          <a:prstGeom prst="rect">
+            <a:avLst/>
+          </a:prstGeom>
+          <a:noFill/>
+        </p:spPr>
+        <p:txBody>
+          <a:bodyPr wrap="square" lIns="54864" rIns="0" tIns="0" bIns="0">
+            <a:spAutoFit/>
+          </a:bodyPr>
+          <a:lstStyle/>
+          <a:p>
+            <a:pPr indent="-215900" marL="215900">
+              <a:spcBef>
+                <a:spcPts val="0"/>
+              </a:spcBef>
+              <a:spcAft>
+                <a:spcPts val="800"/>
+              </a:spcAft>
+              <a:buFont typeface="Arial"/>
+              <a:buChar char="•"/>
+            </a:pPr>
+            <a:r>
+              <a:rPr sz="1900">
+                <a:solidFill>
+                  <a:srgbClr val="1A1A1A"/>
+                </a:solidFill>
+                <a:latin typeface="Calibri"/>
+              </a:rPr>
+              <a:t>At alpha = 0.1 one site holds 106,481 training rows, 34.8% of the total, while two sites receive nothing at all.</a:t>
+            </a:r>
+          </a:p>
+        </p:txBody>
+      </p:sp>
+      <p:sp>
+        <p:nvSpPr>
+          <p:cNvPr id="26" name="Rectangle 25"/>
+          <p:cNvSpPr/>
+          <p:nvPr/>
+        </p:nvSpPr>
+        <p:spPr>
+          <a:xfrm>
+            <a:off x="548640" y="22526026"/>
+            <a:ext cx="6638544" cy="713232"/>
+          </a:xfrm>
+          <a:prstGeom prst="rect">
+            <a:avLst/>
+          </a:prstGeom>
+          <a:solidFill>
+            <a:srgbClr val="007439"/>
+          </a:solidFill>
+          <a:ln>
+            <a:noFill/>
+          </a:ln>
+          <a:effectLst/>
+        </p:spPr>
+        <p:style>
+          <a:lnRef idx="1">
+            <a:schemeClr val="accent1"/>
+          </a:lnRef>
+          <a:fillRef idx="3">
+            <a:schemeClr val="accent1"/>
+          </a:fillRef>
+          <a:effectRef idx="2">
+            <a:schemeClr val="accent1"/>
+          </a:effectRef>
+          <a:fontRef idx="minor">
+            <a:schemeClr val="lt1"/>
+          </a:fontRef>
+        </p:style>
+        <p:txBody>
+          <a:bodyPr rtlCol="0" anchor="ctr" wrap="square" lIns="146304" rIns="146304" tIns="0" bIns="0"/>
+          <a:lstStyle/>
+          <a:p>
+            <a:pPr algn="l"/>
+            <a:r>
+              <a:rPr sz="2500" b="1">
+                <a:solidFill>
+                  <a:srgbClr val="FFFFFF"/>
+                </a:solidFill>
+                <a:latin typeface="Calibri"/>
+              </a:rPr>
+              <a:t>Code &amp; Data</a:t>
+            </a:r>
+          </a:p>
+        </p:txBody>
+      </p:sp>
+      <p:sp>
+        <p:nvSpPr>
+          <p:cNvPr id="27" name="TextBox 26"/>
+          <p:cNvSpPr txBox="1"/>
+          <p:nvPr/>
+        </p:nvSpPr>
+        <p:spPr>
+          <a:xfrm>
+            <a:off x="548640" y="23348986"/>
+            <a:ext cx="4992624" cy="1806810"/>
+          </a:xfrm>
+          <a:prstGeom prst="rect">
+            <a:avLst/>
+          </a:prstGeom>
+          <a:noFill/>
+        </p:spPr>
+        <p:txBody>
+          <a:bodyPr wrap="square" lIns="54864" rIns="0" tIns="0" bIns="0">
+            <a:spAutoFit/>
+          </a:bodyPr>
+          <a:lstStyle/>
+          <a:p>
+            <a:pPr>
+              <a:spcBef>
+                <a:spcPts val="0"/>
+              </a:spcBef>
+              <a:spcAft>
+                <a:spcPts val="800"/>
+              </a:spcAft>
+            </a:pPr>
+            <a:r>
+              <a:rPr sz="1900">
+                <a:solidFill>
+                  <a:srgbClr val="1A1A1A"/>
+                </a:solidFill>
+                <a:latin typeface="Calibri"/>
+              </a:rPr>
+              <a:t>All code, the merged results and a script that re-checks every number on this poster are openly available.</a:t>
+            </a:r>
+          </a:p>
+          <a:p>
+            <a:pPr>
+              <a:spcBef>
+                <a:spcPts val="0"/>
+              </a:spcBef>
+              <a:spcAft>
+                <a:spcPts val="800"/>
+              </a:spcAft>
+            </a:pPr>
+            <a:r>
+              <a:rPr sz="1900">
+                <a:solidFill>
+                  <a:srgbClr val="1A1A1A"/>
+                </a:solidFill>
+                <a:latin typeface="Calibri"/>
+              </a:rPr>
+              <a:t>github.com/kunalchevuri/federated-learning-health-robustness</a:t>
+            </a:r>
+          </a:p>
+        </p:txBody>
+      </p:sp>
       <p:pic>
         <p:nvPicPr>
-          <p:cNvPr id="27" name="Picture 26" descr="posterB_both_datasets.png"/>
+          <p:cNvPr id="28" name="Picture 27" descr="posterE_qr.png"/>
           <p:cNvPicPr>
             <a:picLocks noChangeAspect="1"/>
           </p:cNvPicPr>
@@ -4754,17 +3920,557 @@
         </p:blipFill>
         <p:spPr>
           <a:xfrm>
-            <a:off x="7589520" y="16550640"/>
-            <a:ext cx="6766560" cy="7498079"/>
+            <a:off x="5724144" y="23367274"/>
+            <a:ext cx="1417320" cy="1417320"/>
           </a:xfrm>
           <a:prstGeom prst="rect">
             <a:avLst/>
           </a:prstGeom>
         </p:spPr>
       </p:pic>
+      <p:sp>
+        <p:nvSpPr>
+          <p:cNvPr id="29" name="Rectangle 28"/>
+          <p:cNvSpPr/>
+          <p:nvPr/>
+        </p:nvSpPr>
+        <p:spPr>
+          <a:xfrm>
+            <a:off x="548640" y="25338677"/>
+            <a:ext cx="6638544" cy="713232"/>
+          </a:xfrm>
+          <a:prstGeom prst="rect">
+            <a:avLst/>
+          </a:prstGeom>
+          <a:solidFill>
+            <a:srgbClr val="007439"/>
+          </a:solidFill>
+          <a:ln>
+            <a:noFill/>
+          </a:ln>
+          <a:effectLst/>
+        </p:spPr>
+        <p:style>
+          <a:lnRef idx="1">
+            <a:schemeClr val="accent1"/>
+          </a:lnRef>
+          <a:fillRef idx="3">
+            <a:schemeClr val="accent1"/>
+          </a:fillRef>
+          <a:effectRef idx="2">
+            <a:schemeClr val="accent1"/>
+          </a:effectRef>
+          <a:fontRef idx="minor">
+            <a:schemeClr val="lt1"/>
+          </a:fontRef>
+        </p:style>
+        <p:txBody>
+          <a:bodyPr rtlCol="0" anchor="ctr" wrap="square" lIns="146304" rIns="146304" tIns="0" bIns="0"/>
+          <a:lstStyle/>
+          <a:p>
+            <a:pPr algn="l"/>
+            <a:r>
+              <a:rPr sz="2500" b="1">
+                <a:solidFill>
+                  <a:srgbClr val="FFFFFF"/>
+                </a:solidFill>
+                <a:latin typeface="Calibri"/>
+              </a:rPr>
+              <a:t>References</a:t>
+            </a:r>
+          </a:p>
+        </p:txBody>
+      </p:sp>
+      <p:sp>
+        <p:nvSpPr>
+          <p:cNvPr id="30" name="TextBox 29"/>
+          <p:cNvSpPr txBox="1"/>
+          <p:nvPr/>
+        </p:nvSpPr>
+        <p:spPr>
+          <a:xfrm>
+            <a:off x="548640" y="26161637"/>
+            <a:ext cx="6638544" cy="3552661"/>
+          </a:xfrm>
+          <a:prstGeom prst="rect">
+            <a:avLst/>
+          </a:prstGeom>
+          <a:noFill/>
+        </p:spPr>
+        <p:txBody>
+          <a:bodyPr wrap="square" lIns="54864" rIns="0" tIns="0" bIns="0">
+            <a:spAutoFit/>
+          </a:bodyPr>
+          <a:lstStyle/>
+          <a:p>
+            <a:pPr>
+              <a:spcBef>
+                <a:spcPts val="0"/>
+              </a:spcBef>
+              <a:spcAft>
+                <a:spcPts val="800"/>
+              </a:spcAft>
+            </a:pPr>
+            <a:r>
+              <a:rPr sz="1600">
+                <a:solidFill>
+                  <a:srgbClr val="1A1A1A"/>
+                </a:solidFill>
+                <a:latin typeface="Calibri"/>
+              </a:rPr>
+              <a:t>[1]  McMahan et al. Communication-efficient learning of deep networks from decentralized data. AISTATS, 2017.</a:t>
+            </a:r>
+          </a:p>
+          <a:p>
+            <a:pPr>
+              <a:spcBef>
+                <a:spcPts val="0"/>
+              </a:spcBef>
+              <a:spcAft>
+                <a:spcPts val="800"/>
+              </a:spcAft>
+            </a:pPr>
+            <a:r>
+              <a:rPr sz="1600">
+                <a:solidFill>
+                  <a:srgbClr val="1A1A1A"/>
+                </a:solidFill>
+                <a:latin typeface="Calibri"/>
+              </a:rPr>
+              <a:t>[2]  Blanchard et al. Machine learning with adversaries: Byzantine tolerant gradient descent. NIPS, 2017.</a:t>
+            </a:r>
+          </a:p>
+          <a:p>
+            <a:pPr>
+              <a:spcBef>
+                <a:spcPts val="0"/>
+              </a:spcBef>
+              <a:spcAft>
+                <a:spcPts val="800"/>
+              </a:spcAft>
+            </a:pPr>
+            <a:r>
+              <a:rPr sz="1600">
+                <a:solidFill>
+                  <a:srgbClr val="1A1A1A"/>
+                </a:solidFill>
+                <a:latin typeface="Calibri"/>
+              </a:rPr>
+              <a:t>[3]  Yin et al. Byzantine-robust distributed learning: towards optimal statistical rates. ICML, 2018.</a:t>
+            </a:r>
+          </a:p>
+          <a:p>
+            <a:pPr>
+              <a:spcBef>
+                <a:spcPts val="0"/>
+              </a:spcBef>
+              <a:spcAft>
+                <a:spcPts val="800"/>
+              </a:spcAft>
+            </a:pPr>
+            <a:r>
+              <a:rPr sz="1600">
+                <a:solidFill>
+                  <a:srgbClr val="1A1A1A"/>
+                </a:solidFill>
+                <a:latin typeface="Calibri"/>
+              </a:rPr>
+              <a:t>[4]  Karimireddy et al. Byzantine-robust learning on heterogeneous datasets via bucketing. ICLR, 2022.</a:t>
+            </a:r>
+          </a:p>
+          <a:p>
+            <a:pPr>
+              <a:spcBef>
+                <a:spcPts val="0"/>
+              </a:spcBef>
+              <a:spcAft>
+                <a:spcPts val="800"/>
+              </a:spcAft>
+            </a:pPr>
+            <a:r>
+              <a:rPr sz="1600">
+                <a:solidFill>
+                  <a:srgbClr val="1A1A1A"/>
+                </a:solidFill>
+                <a:latin typeface="Calibri"/>
+              </a:rPr>
+              <a:t>[5]  Hsu et al. Measuring the effects of non-identical data distribution for federated visual classification. arXiv:1909.06335, 2019.</a:t>
+            </a:r>
+          </a:p>
+          <a:p>
+            <a:pPr>
+              <a:spcBef>
+                <a:spcPts val="0"/>
+              </a:spcBef>
+              <a:spcAft>
+                <a:spcPts val="800"/>
+              </a:spcAft>
+            </a:pPr>
+            <a:r>
+              <a:rPr sz="1600">
+                <a:solidFill>
+                  <a:srgbClr val="1A1A1A"/>
+                </a:solidFill>
+                <a:latin typeface="Calibri"/>
+              </a:rPr>
+              <a:t>[6]  CDC. BRFSS 2023 survey data and documentation.</a:t>
+            </a:r>
+          </a:p>
+        </p:txBody>
+      </p:sp>
+      <p:sp>
+        <p:nvSpPr>
+          <p:cNvPr id="31" name="Rectangle 30"/>
+          <p:cNvSpPr/>
+          <p:nvPr/>
+        </p:nvSpPr>
+        <p:spPr>
+          <a:xfrm>
+            <a:off x="7644383" y="3310128"/>
+            <a:ext cx="6638544" cy="713232"/>
+          </a:xfrm>
+          <a:prstGeom prst="rect">
+            <a:avLst/>
+          </a:prstGeom>
+          <a:solidFill>
+            <a:srgbClr val="007439"/>
+          </a:solidFill>
+          <a:ln>
+            <a:noFill/>
+          </a:ln>
+          <a:effectLst/>
+        </p:spPr>
+        <p:style>
+          <a:lnRef idx="1">
+            <a:schemeClr val="accent1"/>
+          </a:lnRef>
+          <a:fillRef idx="3">
+            <a:schemeClr val="accent1"/>
+          </a:fillRef>
+          <a:effectRef idx="2">
+            <a:schemeClr val="accent1"/>
+          </a:effectRef>
+          <a:fontRef idx="minor">
+            <a:schemeClr val="lt1"/>
+          </a:fontRef>
+        </p:style>
+        <p:txBody>
+          <a:bodyPr rtlCol="0" anchor="ctr" wrap="square" lIns="146304" rIns="146304" tIns="0" bIns="0"/>
+          <a:lstStyle/>
+          <a:p>
+            <a:pPr algn="l"/>
+            <a:r>
+              <a:rPr sz="2500" b="1">
+                <a:solidFill>
+                  <a:srgbClr val="FFFFFF"/>
+                </a:solidFill>
+                <a:latin typeface="Calibri"/>
+              </a:rPr>
+              <a:t>Methods</a:t>
+            </a:r>
+          </a:p>
+        </p:txBody>
+      </p:sp>
+      <p:sp>
+        <p:nvSpPr>
+          <p:cNvPr id="32" name="TextBox 31"/>
+          <p:cNvSpPr txBox="1"/>
+          <p:nvPr/>
+        </p:nvSpPr>
+        <p:spPr>
+          <a:xfrm>
+            <a:off x="7644383" y="4133088"/>
+            <a:ext cx="6638544" cy="6365530"/>
+          </a:xfrm>
+          <a:prstGeom prst="rect">
+            <a:avLst/>
+          </a:prstGeom>
+          <a:noFill/>
+        </p:spPr>
+        <p:txBody>
+          <a:bodyPr wrap="square" lIns="54864" rIns="0" tIns="0" bIns="0">
+            <a:spAutoFit/>
+          </a:bodyPr>
+          <a:lstStyle/>
+          <a:p>
+            <a:pPr indent="-215900" marL="215900">
+              <a:spcBef>
+                <a:spcPts val="0"/>
+              </a:spcBef>
+              <a:spcAft>
+                <a:spcPts val="800"/>
+              </a:spcAft>
+              <a:buFont typeface="Arial"/>
+              <a:buChar char="•"/>
+            </a:pPr>
+            <a:r>
+              <a:rPr sz="1900">
+                <a:solidFill>
+                  <a:srgbClr val="1A1A1A"/>
+                </a:solidFill>
+                <a:latin typeface="Calibri"/>
+              </a:rPr>
+              <a:t>Seven merge rules run head to head: FedAvg, FedProx, CS-Agg, Krum, trimmed mean, coordinate-wise median, and an unweighted mean.</a:t>
+            </a:r>
+          </a:p>
+          <a:p>
+            <a:pPr indent="-215900" marL="215900">
+              <a:spcBef>
+                <a:spcPts val="0"/>
+              </a:spcBef>
+              <a:spcAft>
+                <a:spcPts val="800"/>
+              </a:spcAft>
+              <a:buFont typeface="Arial"/>
+              <a:buChar char="•"/>
+            </a:pPr>
+            <a:r>
+              <a:rPr sz="1900">
+                <a:solidFill>
+                  <a:srgbClr val="1A1A1A"/>
+                </a:solidFill>
+                <a:latin typeface="Calibri"/>
+              </a:rPr>
+              <a:t>The unweighted mean is our control: it uses no robust statistic and differs from FedAvg only in ignoring how much data each site holds.</a:t>
+            </a:r>
+          </a:p>
+          <a:p>
+            <a:pPr indent="-215900" marL="215900">
+              <a:spcBef>
+                <a:spcPts val="0"/>
+              </a:spcBef>
+              <a:spcAft>
+                <a:spcPts val="800"/>
+              </a:spcAft>
+              <a:buFont typeface="Arial"/>
+              <a:buChar char="•"/>
+            </a:pPr>
+            <a:r>
+              <a:rPr sz="1900">
+                <a:solidFill>
+                  <a:srgbClr val="1A1A1A"/>
+                </a:solidFill>
+                <a:latin typeface="Calibri"/>
+              </a:rPr>
+              <a:t>Anything the control gains over FedAvg is therefore weighting alone, which is what isolates the effect.</a:t>
+            </a:r>
+          </a:p>
+          <a:p>
+            <a:pPr indent="-215900" marL="215900">
+              <a:spcBef>
+                <a:spcPts val="0"/>
+              </a:spcBef>
+              <a:spcAft>
+                <a:spcPts val="800"/>
+              </a:spcAft>
+              <a:buFont typeface="Arial"/>
+              <a:buChar char="•"/>
+            </a:pPr>
+            <a:r>
+              <a:rPr sz="1900">
+                <a:solidFill>
+                  <a:srgbClr val="1A1A1A"/>
+                </a:solidFill>
+                <a:latin typeface="Calibri"/>
+              </a:rPr>
+              <a:t>Labels are flipped at 20% of sites, across 0 to 30% of their records.</a:t>
+            </a:r>
+          </a:p>
+          <a:p>
+            <a:pPr indent="-215900" marL="215900">
+              <a:spcBef>
+                <a:spcPts val="0"/>
+              </a:spcBef>
+              <a:spcAft>
+                <a:spcPts val="800"/>
+              </a:spcAft>
+              <a:buFont typeface="Arial"/>
+              <a:buChar char="•"/>
+            </a:pPr>
+            <a:r>
+              <a:rPr sz="1900">
+                <a:solidFill>
+                  <a:srgbClr val="1A1A1A"/>
+                </a:solidFill>
+                <a:latin typeface="Calibri"/>
+              </a:rPr>
+              <a:t>On BRFSS we flip them only the way real people err, reporting no depression when they have it.</a:t>
+            </a:r>
+          </a:p>
+          <a:p>
+            <a:pPr indent="-215900" marL="215900">
+              <a:spcBef>
+                <a:spcPts val="0"/>
+              </a:spcBef>
+              <a:spcAft>
+                <a:spcPts val="800"/>
+              </a:spcAft>
+              <a:buFont typeface="Arial"/>
+              <a:buChar char="•"/>
+            </a:pPr>
+            <a:r>
+              <a:rPr sz="1900">
+                <a:solidFill>
+                  <a:srgbClr val="1A1A1A"/>
+                </a:solidFill>
+                <a:latin typeface="Calibri"/>
+              </a:rPr>
+              <a:t>624 conditions cover every combination of rule, dataset, split, noise level and random seed.</a:t>
+            </a:r>
+          </a:p>
+          <a:p>
+            <a:pPr indent="-215900" marL="215900">
+              <a:spcBef>
+                <a:spcPts val="0"/>
+              </a:spcBef>
+              <a:spcAft>
+                <a:spcPts val="800"/>
+              </a:spcAft>
+              <a:buFont typeface="Arial"/>
+              <a:buChar char="•"/>
+            </a:pPr>
+            <a:r>
+              <a:rPr sz="1900">
+                <a:solidFill>
+                  <a:srgbClr val="1A1A1A"/>
+                </a:solidFill>
+                <a:latin typeface="Calibri"/>
+              </a:rPr>
+              <a:t>Each runs 50 rounds, scored by AUC-ROC on a clean held-out test set the sites never see.</a:t>
+            </a:r>
+          </a:p>
+          <a:p>
+            <a:pPr indent="-215900" marL="215900">
+              <a:spcBef>
+                <a:spcPts val="0"/>
+              </a:spcBef>
+              <a:spcAft>
+                <a:spcPts val="800"/>
+              </a:spcAft>
+              <a:buFont typeface="Arial"/>
+              <a:buChar char="•"/>
+            </a:pPr>
+            <a:r>
+              <a:rPr sz="1900">
+                <a:solidFill>
+                  <a:srgbClr val="1A1A1A"/>
+                </a:solidFill>
+                <a:latin typeface="Calibri"/>
+              </a:rPr>
+              <a:t>Differences are tested with Wilcoxon signed-rank, Holm-corrected within each of three comparison families.</a:t>
+            </a:r>
+          </a:p>
+        </p:txBody>
+      </p:sp>
+      <p:sp>
+        <p:nvSpPr>
+          <p:cNvPr id="33" name="Rectangle 32"/>
+          <p:cNvSpPr/>
+          <p:nvPr/>
+        </p:nvSpPr>
+        <p:spPr>
+          <a:xfrm>
+            <a:off x="7644383" y="10681498"/>
+            <a:ext cx="6638544" cy="713232"/>
+          </a:xfrm>
+          <a:prstGeom prst="rect">
+            <a:avLst/>
+          </a:prstGeom>
+          <a:solidFill>
+            <a:srgbClr val="007439"/>
+          </a:solidFill>
+          <a:ln>
+            <a:noFill/>
+          </a:ln>
+          <a:effectLst/>
+        </p:spPr>
+        <p:style>
+          <a:lnRef idx="1">
+            <a:schemeClr val="accent1"/>
+          </a:lnRef>
+          <a:fillRef idx="3">
+            <a:schemeClr val="accent1"/>
+          </a:fillRef>
+          <a:effectRef idx="2">
+            <a:schemeClr val="accent1"/>
+          </a:effectRef>
+          <a:fontRef idx="minor">
+            <a:schemeClr val="lt1"/>
+          </a:fontRef>
+        </p:style>
+        <p:txBody>
+          <a:bodyPr rtlCol="0" anchor="ctr" wrap="square" lIns="146304" rIns="146304" tIns="0" bIns="0"/>
+          <a:lstStyle/>
+          <a:p>
+            <a:pPr algn="l"/>
+            <a:r>
+              <a:rPr sz="2500" b="1">
+                <a:solidFill>
+                  <a:srgbClr val="FFFFFF"/>
+                </a:solidFill>
+                <a:latin typeface="Calibri"/>
+              </a:rPr>
+              <a:t>Results</a:t>
+            </a:r>
+          </a:p>
+        </p:txBody>
+      </p:sp>
+      <p:sp>
+        <p:nvSpPr>
+          <p:cNvPr id="34" name="Rectangle 33"/>
+          <p:cNvSpPr/>
+          <p:nvPr/>
+        </p:nvSpPr>
+        <p:spPr>
+          <a:xfrm>
+            <a:off x="7644383" y="11504458"/>
+            <a:ext cx="6638544" cy="566928"/>
+          </a:xfrm>
+          <a:prstGeom prst="rect">
+            <a:avLst/>
+          </a:prstGeom>
+          <a:solidFill>
+            <a:srgbClr val="3F8C5C"/>
+          </a:solidFill>
+          <a:ln>
+            <a:noFill/>
+          </a:ln>
+          <a:effectLst/>
+        </p:spPr>
+        <p:style>
+          <a:lnRef idx="1">
+            <a:schemeClr val="accent1"/>
+          </a:lnRef>
+          <a:fillRef idx="3">
+            <a:schemeClr val="accent1"/>
+          </a:fillRef>
+          <a:effectRef idx="2">
+            <a:schemeClr val="accent1"/>
+          </a:effectRef>
+          <a:fontRef idx="minor">
+            <a:schemeClr val="lt1"/>
+          </a:fontRef>
+        </p:style>
+        <p:txBody>
+          <a:bodyPr rtlCol="0" anchor="ctr" wrap="square" lIns="146304" rIns="146304" tIns="0" bIns="0"/>
+          <a:lstStyle/>
+          <a:p>
+            <a:pPr algn="l"/>
+            <a:r>
+              <a:rPr sz="1900" b="1">
+                <a:solidFill>
+                  <a:srgbClr val="FFFFFF"/>
+                </a:solidFill>
+                <a:latin typeface="Calibri"/>
+              </a:rPr>
+              <a:t>Most of the gain over FedAvg is weighting, not robustness</a:t>
+            </a:r>
+          </a:p>
+        </p:txBody>
+      </p:sp>
       <p:pic>
         <p:nvPicPr>
-          <p:cNvPr id="28" name="Picture 27" descr="posterC_runlevel.png"/>
+          <p:cNvPr id="35" name="Picture 34" descr="posterA_decomposition.png"/>
           <p:cNvPicPr>
             <a:picLocks noChangeAspect="1"/>
           </p:cNvPicPr>
@@ -4778,17 +4484,156 @@
         </p:blipFill>
         <p:spPr>
           <a:xfrm>
-            <a:off x="7589520" y="24414480"/>
-            <a:ext cx="6766560" cy="6492240"/>
+            <a:off x="7644383" y="12181114"/>
+            <a:ext cx="6638544" cy="6766560"/>
           </a:xfrm>
           <a:prstGeom prst="rect">
             <a:avLst/>
           </a:prstGeom>
         </p:spPr>
       </p:pic>
+      <p:sp>
+        <p:nvSpPr>
+          <p:cNvPr id="36" name="TextBox 35"/>
+          <p:cNvSpPr txBox="1"/>
+          <p:nvPr/>
+        </p:nvSpPr>
+        <p:spPr>
+          <a:xfrm>
+            <a:off x="7644383" y="19130554"/>
+            <a:ext cx="6638544" cy="2223951"/>
+          </a:xfrm>
+          <a:prstGeom prst="rect">
+            <a:avLst/>
+          </a:prstGeom>
+          <a:noFill/>
+        </p:spPr>
+        <p:txBody>
+          <a:bodyPr wrap="square" lIns="54864" rIns="0" tIns="0" bIns="0">
+            <a:spAutoFit/>
+          </a:bodyPr>
+          <a:lstStyle/>
+          <a:p>
+            <a:pPr indent="-215900" marL="215900">
+              <a:spcBef>
+                <a:spcPts val="0"/>
+              </a:spcBef>
+              <a:spcAft>
+                <a:spcPts val="800"/>
+              </a:spcAft>
+              <a:buFont typeface="Arial"/>
+              <a:buChar char="•"/>
+            </a:pPr>
+            <a:r>
+              <a:rPr sz="1900">
+                <a:solidFill>
+                  <a:srgbClr val="1A1A1A"/>
+                </a:solidFill>
+                <a:latin typeface="Calibri"/>
+              </a:rPr>
+              <a:t>The control alone recovers 79 to 98% of what the three strongest robust rules gain over FedAvg.</a:t>
+            </a:r>
+          </a:p>
+          <a:p>
+            <a:pPr indent="-215900" marL="215900">
+              <a:spcBef>
+                <a:spcPts val="0"/>
+              </a:spcBef>
+              <a:spcAft>
+                <a:spcPts val="800"/>
+              </a:spcAft>
+              <a:buFont typeface="Arial"/>
+              <a:buChar char="•"/>
+            </a:pPr>
+            <a:r>
+              <a:rPr sz="1900">
+                <a:solidFill>
+                  <a:srgbClr val="1A1A1A"/>
+                </a:solidFill>
+                <a:latin typeface="Calibri"/>
+              </a:rPr>
+              <a:t>Only coordinate-wise median clearly clears it, at +0.0163 AUC (Holm p &lt; 0.0001).</a:t>
+            </a:r>
+          </a:p>
+          <a:p>
+            <a:pPr indent="-215900" marL="215900">
+              <a:spcBef>
+                <a:spcPts val="0"/>
+              </a:spcBef>
+              <a:spcAft>
+                <a:spcPts val="800"/>
+              </a:spcAft>
+              <a:buFont typeface="Arial"/>
+              <a:buChar char="•"/>
+            </a:pPr>
+            <a:r>
+              <a:rPr sz="1900">
+                <a:solidFill>
+                  <a:srgbClr val="1A1A1A"/>
+                </a:solidFill>
+                <a:latin typeface="Calibri"/>
+              </a:rPr>
+              <a:t>Trimmed mean's +0.0026 is significant but negligible, and CS-Agg cannot be told apart from the control (p = 0.22).</a:t>
+            </a:r>
+          </a:p>
+        </p:txBody>
+      </p:sp>
+      <p:sp>
+        <p:nvSpPr>
+          <p:cNvPr id="37" name="Rectangle 36"/>
+          <p:cNvSpPr/>
+          <p:nvPr/>
+        </p:nvSpPr>
+        <p:spPr>
+          <a:xfrm>
+            <a:off x="7644383" y="21537385"/>
+            <a:ext cx="6638544" cy="566928"/>
+          </a:xfrm>
+          <a:prstGeom prst="rect">
+            <a:avLst/>
+          </a:prstGeom>
+          <a:solidFill>
+            <a:srgbClr val="3F8C5C"/>
+          </a:solidFill>
+          <a:ln>
+            <a:noFill/>
+          </a:ln>
+          <a:effectLst/>
+        </p:spPr>
+        <p:style>
+          <a:lnRef idx="1">
+            <a:schemeClr val="accent1"/>
+          </a:lnRef>
+          <a:fillRef idx="3">
+            <a:schemeClr val="accent1"/>
+          </a:fillRef>
+          <a:effectRef idx="2">
+            <a:schemeClr val="accent1"/>
+          </a:effectRef>
+          <a:fontRef idx="minor">
+            <a:schemeClr val="lt1"/>
+          </a:fontRef>
+        </p:style>
+        <p:txBody>
+          <a:bodyPr rtlCol="0" anchor="ctr" wrap="square" lIns="146304" rIns="146304" tIns="0" bIns="0"/>
+          <a:lstStyle/>
+          <a:p>
+            <a:pPr algn="l"/>
+            <a:r>
+              <a:rPr sz="1900" b="1">
+                <a:solidFill>
+                  <a:srgbClr val="FFFFFF"/>
+                </a:solidFill>
+                <a:latin typeface="Calibri"/>
+              </a:rPr>
+              <a:t>Krum is unreliable, not merely weaker</a:t>
+            </a:r>
+          </a:p>
+        </p:txBody>
+      </p:sp>
       <p:pic>
         <p:nvPicPr>
-          <p:cNvPr id="29" name="Picture 28" descr="posterE_qr.png"/>
+          <p:cNvPr id="38" name="Picture 37" descr="posterC_runlevel.png"/>
           <p:cNvPicPr>
             <a:picLocks noChangeAspect="1"/>
           </p:cNvPicPr>
@@ -4802,14 +4647,812 @@
         </p:blipFill>
         <p:spPr>
           <a:xfrm>
-            <a:off x="4892040" y="29077920"/>
-            <a:ext cx="1554480" cy="1554480"/>
+            <a:off x="7644383" y="22214041"/>
+            <a:ext cx="6638544" cy="5669280"/>
           </a:xfrm>
           <a:prstGeom prst="rect">
             <a:avLst/>
           </a:prstGeom>
         </p:spPr>
       </p:pic>
+      <p:sp>
+        <p:nvSpPr>
+          <p:cNvPr id="39" name="TextBox 38"/>
+          <p:cNvSpPr txBox="1"/>
+          <p:nvPr/>
+        </p:nvSpPr>
+        <p:spPr>
+          <a:xfrm>
+            <a:off x="7644383" y="28066201"/>
+            <a:ext cx="6638544" cy="802277"/>
+          </a:xfrm>
+          <a:prstGeom prst="rect">
+            <a:avLst/>
+          </a:prstGeom>
+          <a:noFill/>
+        </p:spPr>
+        <p:txBody>
+          <a:bodyPr wrap="square" lIns="54864" rIns="0" tIns="0" bIns="0">
+            <a:spAutoFit/>
+          </a:bodyPr>
+          <a:lstStyle/>
+          <a:p>
+            <a:pPr indent="-215900" marL="215900">
+              <a:spcBef>
+                <a:spcPts val="0"/>
+              </a:spcBef>
+              <a:spcAft>
+                <a:spcPts val="800"/>
+              </a:spcAft>
+              <a:buFont typeface="Arial"/>
+              <a:buChar char="•"/>
+            </a:pPr>
+            <a:r>
+              <a:rPr sz="1900">
+                <a:solidFill>
+                  <a:srgbClr val="1A1A1A"/>
+                </a:solidFill>
+                <a:latin typeface="Calibri"/>
+              </a:rPr>
+              <a:t>Krum lands below the control and collapses to 0.328 AUC on one run, worse than a coin flip.</a:t>
+            </a:r>
+          </a:p>
+        </p:txBody>
+      </p:sp>
+      <p:sp>
+        <p:nvSpPr>
+          <p:cNvPr id="40" name="Rectangle 39"/>
+          <p:cNvSpPr/>
+          <p:nvPr/>
+        </p:nvSpPr>
+        <p:spPr>
+          <a:xfrm>
+            <a:off x="14740128" y="3310128"/>
+            <a:ext cx="6638544" cy="713232"/>
+          </a:xfrm>
+          <a:prstGeom prst="rect">
+            <a:avLst/>
+          </a:prstGeom>
+          <a:solidFill>
+            <a:srgbClr val="007439"/>
+          </a:solidFill>
+          <a:ln>
+            <a:noFill/>
+          </a:ln>
+          <a:effectLst/>
+        </p:spPr>
+        <p:style>
+          <a:lnRef idx="1">
+            <a:schemeClr val="accent1"/>
+          </a:lnRef>
+          <a:fillRef idx="3">
+            <a:schemeClr val="accent1"/>
+          </a:fillRef>
+          <a:effectRef idx="2">
+            <a:schemeClr val="accent1"/>
+          </a:effectRef>
+          <a:fontRef idx="minor">
+            <a:schemeClr val="lt1"/>
+          </a:fontRef>
+        </p:style>
+        <p:txBody>
+          <a:bodyPr rtlCol="0" anchor="ctr" wrap="square" lIns="146304" rIns="146304" tIns="0" bIns="0"/>
+          <a:lstStyle/>
+          <a:p>
+            <a:pPr algn="l"/>
+            <a:r>
+              <a:rPr sz="2500" b="1">
+                <a:solidFill>
+                  <a:srgbClr val="FFFFFF"/>
+                </a:solidFill>
+                <a:latin typeface="Calibri"/>
+              </a:rPr>
+              <a:t>Results, continued</a:t>
+            </a:r>
+          </a:p>
+        </p:txBody>
+      </p:sp>
+      <p:sp>
+        <p:nvSpPr>
+          <p:cNvPr id="41" name="Rectangle 40"/>
+          <p:cNvSpPr/>
+          <p:nvPr/>
+        </p:nvSpPr>
+        <p:spPr>
+          <a:xfrm>
+            <a:off x="14740128" y="4133088"/>
+            <a:ext cx="6638544" cy="566928"/>
+          </a:xfrm>
+          <a:prstGeom prst="rect">
+            <a:avLst/>
+          </a:prstGeom>
+          <a:solidFill>
+            <a:srgbClr val="3F8C5C"/>
+          </a:solidFill>
+          <a:ln>
+            <a:noFill/>
+          </a:ln>
+          <a:effectLst/>
+        </p:spPr>
+        <p:style>
+          <a:lnRef idx="1">
+            <a:schemeClr val="accent1"/>
+          </a:lnRef>
+          <a:fillRef idx="3">
+            <a:schemeClr val="accent1"/>
+          </a:fillRef>
+          <a:effectRef idx="2">
+            <a:schemeClr val="accent1"/>
+          </a:effectRef>
+          <a:fontRef idx="minor">
+            <a:schemeClr val="lt1"/>
+          </a:fontRef>
+        </p:style>
+        <p:txBody>
+          <a:bodyPr rtlCol="0" anchor="ctr" wrap="square" lIns="146304" rIns="146304" tIns="0" bIns="0"/>
+          <a:lstStyle/>
+          <a:p>
+            <a:pPr algn="l"/>
+            <a:r>
+              <a:rPr sz="1900" b="1">
+                <a:solidFill>
+                  <a:srgbClr val="FFFFFF"/>
+                </a:solidFill>
+                <a:latin typeface="Calibri"/>
+              </a:rPr>
+              <a:t>Lopsided data hurts far more than broken labels</a:t>
+            </a:r>
+          </a:p>
+        </p:txBody>
+      </p:sp>
+      <p:pic>
+        <p:nvPicPr>
+          <p:cNvPr id="42" name="Picture 41" descr="posterG_stressors.png"/>
+          <p:cNvPicPr>
+            <a:picLocks noChangeAspect="1"/>
+          </p:cNvPicPr>
+          <p:nvPr/>
+        </p:nvPicPr>
+        <p:blipFill>
+          <a:blip r:embed="rId9"/>
+          <a:stretch>
+            <a:fillRect/>
+          </a:stretch>
+        </p:blipFill>
+        <p:spPr>
+          <a:xfrm>
+            <a:off x="14740128" y="4809744"/>
+            <a:ext cx="6638544" cy="4023360"/>
+          </a:xfrm>
+          <a:prstGeom prst="rect">
+            <a:avLst/>
+          </a:prstGeom>
+        </p:spPr>
+      </p:pic>
+      <p:sp>
+        <p:nvSpPr>
+          <p:cNvPr id="43" name="TextBox 42"/>
+          <p:cNvSpPr txBox="1"/>
+          <p:nvPr/>
+        </p:nvSpPr>
+        <p:spPr>
+          <a:xfrm>
+            <a:off x="14740128" y="9015984"/>
+            <a:ext cx="6638544" cy="1513114"/>
+          </a:xfrm>
+          <a:prstGeom prst="rect">
+            <a:avLst/>
+          </a:prstGeom>
+          <a:noFill/>
+        </p:spPr>
+        <p:txBody>
+          <a:bodyPr wrap="square" lIns="54864" rIns="0" tIns="0" bIns="0">
+            <a:spAutoFit/>
+          </a:bodyPr>
+          <a:lstStyle/>
+          <a:p>
+            <a:pPr indent="-215900" marL="215900">
+              <a:spcBef>
+                <a:spcPts val="0"/>
+              </a:spcBef>
+              <a:spcAft>
+                <a:spcPts val="800"/>
+              </a:spcAft>
+              <a:buFont typeface="Arial"/>
+              <a:buChar char="•"/>
+            </a:pPr>
+            <a:r>
+              <a:rPr sz="1900">
+                <a:solidFill>
+                  <a:srgbClr val="1A1A1A"/>
+                </a:solidFill>
+                <a:latin typeface="Calibri"/>
+              </a:rPr>
+              <a:t>Moving from alpha = 1.0 to 0.1 costs FedAvg 0.2348 AUC, while 0% to 30% label noise costs it 0.0016.</a:t>
+            </a:r>
+          </a:p>
+          <a:p>
+            <a:pPr indent="-215900" marL="215900">
+              <a:spcBef>
+                <a:spcPts val="0"/>
+              </a:spcBef>
+              <a:spcAft>
+                <a:spcPts val="800"/>
+              </a:spcAft>
+              <a:buFont typeface="Arial"/>
+              <a:buChar char="•"/>
+            </a:pPr>
+            <a:r>
+              <a:rPr sz="1900">
+                <a:solidFill>
+                  <a:srgbClr val="1A1A1A"/>
+                </a:solidFill>
+                <a:latin typeface="Calibri"/>
+              </a:rPr>
+              <a:t>That 149x gap narrows to about 14x when sites track twelve health variables instead of four, but it never closes.</a:t>
+            </a:r>
+          </a:p>
+        </p:txBody>
+      </p:sp>
+      <p:sp>
+        <p:nvSpPr>
+          <p:cNvPr id="44" name="Rectangle 43"/>
+          <p:cNvSpPr/>
+          <p:nvPr/>
+        </p:nvSpPr>
+        <p:spPr>
+          <a:xfrm>
+            <a:off x="14740128" y="10711978"/>
+            <a:ext cx="6638544" cy="566928"/>
+          </a:xfrm>
+          <a:prstGeom prst="rect">
+            <a:avLst/>
+          </a:prstGeom>
+          <a:solidFill>
+            <a:srgbClr val="3F8C5C"/>
+          </a:solidFill>
+          <a:ln>
+            <a:noFill/>
+          </a:ln>
+          <a:effectLst/>
+        </p:spPr>
+        <p:style>
+          <a:lnRef idx="1">
+            <a:schemeClr val="accent1"/>
+          </a:lnRef>
+          <a:fillRef idx="3">
+            <a:schemeClr val="accent1"/>
+          </a:fillRef>
+          <a:effectRef idx="2">
+            <a:schemeClr val="accent1"/>
+          </a:effectRef>
+          <a:fontRef idx="minor">
+            <a:schemeClr val="lt1"/>
+          </a:fontRef>
+        </p:style>
+        <p:txBody>
+          <a:bodyPr rtlCol="0" anchor="ctr" wrap="square" lIns="146304" rIns="146304" tIns="0" bIns="0"/>
+          <a:lstStyle/>
+          <a:p>
+            <a:pPr algn="l"/>
+            <a:r>
+              <a:rPr sz="1900" b="1">
+                <a:solidFill>
+                  <a:srgbClr val="FFFFFF"/>
+                </a:solidFill>
+                <a:latin typeface="Calibri"/>
+              </a:rPr>
+              <a:t>A clean benchmark would have hidden all of this</a:t>
+            </a:r>
+          </a:p>
+        </p:txBody>
+      </p:sp>
+      <p:pic>
+        <p:nvPicPr>
+          <p:cNvPr id="45" name="Picture 44" descr="posterB_both_datasets.png"/>
+          <p:cNvPicPr>
+            <a:picLocks noChangeAspect="1"/>
+          </p:cNvPicPr>
+          <p:nvPr/>
+        </p:nvPicPr>
+        <p:blipFill>
+          <a:blip r:embed="rId10"/>
+          <a:stretch>
+            <a:fillRect/>
+          </a:stretch>
+        </p:blipFill>
+        <p:spPr>
+          <a:xfrm>
+            <a:off x="14740128" y="11388634"/>
+            <a:ext cx="6638544" cy="6583680"/>
+          </a:xfrm>
+          <a:prstGeom prst="rect">
+            <a:avLst/>
+          </a:prstGeom>
+        </p:spPr>
+      </p:pic>
+      <p:sp>
+        <p:nvSpPr>
+          <p:cNvPr id="46" name="TextBox 45"/>
+          <p:cNvSpPr txBox="1"/>
+          <p:nvPr/>
+        </p:nvSpPr>
+        <p:spPr>
+          <a:xfrm>
+            <a:off x="14740128" y="18155194"/>
+            <a:ext cx="6638544" cy="1513114"/>
+          </a:xfrm>
+          <a:prstGeom prst="rect">
+            <a:avLst/>
+          </a:prstGeom>
+          <a:noFill/>
+        </p:spPr>
+        <p:txBody>
+          <a:bodyPr wrap="square" lIns="54864" rIns="0" tIns="0" bIns="0">
+            <a:spAutoFit/>
+          </a:bodyPr>
+          <a:lstStyle/>
+          <a:p>
+            <a:pPr indent="-215900" marL="215900">
+              <a:spcBef>
+                <a:spcPts val="0"/>
+              </a:spcBef>
+              <a:spcAft>
+                <a:spcPts val="800"/>
+              </a:spcAft>
+              <a:buFont typeface="Arial"/>
+              <a:buChar char="•"/>
+            </a:pPr>
+            <a:r>
+              <a:rPr sz="1900">
+                <a:solidFill>
+                  <a:srgbClr val="1A1A1A"/>
+                </a:solidFill>
+                <a:latin typeface="Calibri"/>
+              </a:rPr>
+              <a:t>On Breast Cancer every rule but Krum reaches 0.997 AUC or better, where no difference between them is visible.</a:t>
+            </a:r>
+          </a:p>
+          <a:p>
+            <a:pPr indent="-215900" marL="215900">
+              <a:spcBef>
+                <a:spcPts val="0"/>
+              </a:spcBef>
+              <a:spcAft>
+                <a:spcPts val="800"/>
+              </a:spcAft>
+              <a:buFont typeface="Arial"/>
+              <a:buChar char="•"/>
+            </a:pPr>
+            <a:r>
+              <a:rPr sz="1900">
+                <a:solidFill>
+                  <a:srgbClr val="1A1A1A"/>
+                </a:solidFill>
+                <a:latin typeface="Calibri"/>
+              </a:rPr>
+              <a:t>Messy, self-reported population health data is where these rules actually separate.</a:t>
+            </a:r>
+          </a:p>
+        </p:txBody>
+      </p:sp>
+      <p:sp>
+        <p:nvSpPr>
+          <p:cNvPr id="47" name="Rectangle 46"/>
+          <p:cNvSpPr/>
+          <p:nvPr/>
+        </p:nvSpPr>
+        <p:spPr>
+          <a:xfrm>
+            <a:off x="14740128" y="19851188"/>
+            <a:ext cx="6638544" cy="713232"/>
+          </a:xfrm>
+          <a:prstGeom prst="rect">
+            <a:avLst/>
+          </a:prstGeom>
+          <a:solidFill>
+            <a:srgbClr val="007439"/>
+          </a:solidFill>
+          <a:ln>
+            <a:noFill/>
+          </a:ln>
+          <a:effectLst/>
+        </p:spPr>
+        <p:style>
+          <a:lnRef idx="1">
+            <a:schemeClr val="accent1"/>
+          </a:lnRef>
+          <a:fillRef idx="3">
+            <a:schemeClr val="accent1"/>
+          </a:fillRef>
+          <a:effectRef idx="2">
+            <a:schemeClr val="accent1"/>
+          </a:effectRef>
+          <a:fontRef idx="minor">
+            <a:schemeClr val="lt1"/>
+          </a:fontRef>
+        </p:style>
+        <p:txBody>
+          <a:bodyPr rtlCol="0" anchor="ctr" wrap="square" lIns="146304" rIns="146304" tIns="0" bIns="0"/>
+          <a:lstStyle/>
+          <a:p>
+            <a:pPr algn="l"/>
+            <a:r>
+              <a:rPr sz="2500" b="1">
+                <a:solidFill>
+                  <a:srgbClr val="FFFFFF"/>
+                </a:solidFill>
+                <a:latin typeface="Calibri"/>
+              </a:rPr>
+              <a:t>Future Directions</a:t>
+            </a:r>
+          </a:p>
+        </p:txBody>
+      </p:sp>
+      <p:sp>
+        <p:nvSpPr>
+          <p:cNvPr id="48" name="TextBox 47"/>
+          <p:cNvSpPr txBox="1"/>
+          <p:nvPr/>
+        </p:nvSpPr>
+        <p:spPr>
+          <a:xfrm>
+            <a:off x="14740128" y="20674148"/>
+            <a:ext cx="6638544" cy="2223951"/>
+          </a:xfrm>
+          <a:prstGeom prst="rect">
+            <a:avLst/>
+          </a:prstGeom>
+          <a:noFill/>
+        </p:spPr>
+        <p:txBody>
+          <a:bodyPr wrap="square" lIns="54864" rIns="0" tIns="0" bIns="0">
+            <a:spAutoFit/>
+          </a:bodyPr>
+          <a:lstStyle/>
+          <a:p>
+            <a:pPr indent="-215900" marL="215900">
+              <a:spcBef>
+                <a:spcPts val="0"/>
+              </a:spcBef>
+              <a:spcAft>
+                <a:spcPts val="800"/>
+              </a:spcAft>
+              <a:buFont typeface="Arial"/>
+              <a:buChar char="•"/>
+            </a:pPr>
+            <a:r>
+              <a:rPr sz="1900">
+                <a:solidFill>
+                  <a:srgbClr val="1A1A1A"/>
+                </a:solidFill>
+                <a:latin typeface="Calibri"/>
+              </a:rPr>
+              <a:t>Test adaptive Byzantine attackers, not only the label noise studied here.</a:t>
+            </a:r>
+          </a:p>
+          <a:p>
+            <a:pPr indent="-215900" marL="215900">
+              <a:spcBef>
+                <a:spcPts val="0"/>
+              </a:spcBef>
+              <a:spcAft>
+                <a:spcPts val="800"/>
+              </a:spcAft>
+              <a:buFont typeface="Arial"/>
+              <a:buChar char="•"/>
+            </a:pPr>
+            <a:r>
+              <a:rPr sz="1900">
+                <a:solidFill>
+                  <a:srgbClr val="1A1A1A"/>
+                </a:solidFill>
+                <a:latin typeface="Calibri"/>
+              </a:rPr>
+              <a:t>Replace the simulated Dirichlet split with data partitioned across real institutions.</a:t>
+            </a:r>
+          </a:p>
+          <a:p>
+            <a:pPr indent="-215900" marL="215900">
+              <a:spcBef>
+                <a:spcPts val="0"/>
+              </a:spcBef>
+              <a:spcAft>
+                <a:spcPts val="800"/>
+              </a:spcAft>
+              <a:buFont typeface="Arial"/>
+              <a:buChar char="•"/>
+            </a:pPr>
+            <a:r>
+              <a:rPr sz="1900">
+                <a:solidFill>
+                  <a:srgbClr val="1A1A1A"/>
+                </a:solidFill>
+                <a:latin typeface="Calibri"/>
+              </a:rPr>
+              <a:t>Check whether the weighting effect persists for deeper models and larger numbers of sites.</a:t>
+            </a:r>
+          </a:p>
+        </p:txBody>
+      </p:sp>
+      <p:sp>
+        <p:nvSpPr>
+          <p:cNvPr id="49" name="Rectangle 48"/>
+          <p:cNvSpPr/>
+          <p:nvPr/>
+        </p:nvSpPr>
+        <p:spPr>
+          <a:xfrm>
+            <a:off x="14740128" y="23080979"/>
+            <a:ext cx="6638544" cy="713232"/>
+          </a:xfrm>
+          <a:prstGeom prst="rect">
+            <a:avLst/>
+          </a:prstGeom>
+          <a:solidFill>
+            <a:srgbClr val="007439"/>
+          </a:solidFill>
+          <a:ln>
+            <a:noFill/>
+          </a:ln>
+          <a:effectLst/>
+        </p:spPr>
+        <p:style>
+          <a:lnRef idx="1">
+            <a:schemeClr val="accent1"/>
+          </a:lnRef>
+          <a:fillRef idx="3">
+            <a:schemeClr val="accent1"/>
+          </a:fillRef>
+          <a:effectRef idx="2">
+            <a:schemeClr val="accent1"/>
+          </a:effectRef>
+          <a:fontRef idx="minor">
+            <a:schemeClr val="lt1"/>
+          </a:fontRef>
+        </p:style>
+        <p:txBody>
+          <a:bodyPr rtlCol="0" anchor="ctr" wrap="square" lIns="146304" rIns="146304" tIns="0" bIns="0"/>
+          <a:lstStyle/>
+          <a:p>
+            <a:pPr algn="l"/>
+            <a:r>
+              <a:rPr sz="2500" b="1">
+                <a:solidFill>
+                  <a:srgbClr val="FFFFFF"/>
+                </a:solidFill>
+                <a:latin typeface="Calibri"/>
+              </a:rPr>
+              <a:t>Conclusions</a:t>
+            </a:r>
+          </a:p>
+        </p:txBody>
+      </p:sp>
+      <p:sp>
+        <p:nvSpPr>
+          <p:cNvPr id="50" name="TextBox 49"/>
+          <p:cNvSpPr txBox="1"/>
+          <p:nvPr/>
+        </p:nvSpPr>
+        <p:spPr>
+          <a:xfrm>
+            <a:off x="14740128" y="23903940"/>
+            <a:ext cx="6638544" cy="3522181"/>
+          </a:xfrm>
+          <a:prstGeom prst="rect">
+            <a:avLst/>
+          </a:prstGeom>
+          <a:noFill/>
+        </p:spPr>
+        <p:txBody>
+          <a:bodyPr wrap="square" lIns="54864" rIns="0" tIns="0" bIns="0">
+            <a:spAutoFit/>
+          </a:bodyPr>
+          <a:lstStyle/>
+          <a:p>
+            <a:pPr indent="-215900" marL="215900">
+              <a:spcBef>
+                <a:spcPts val="0"/>
+              </a:spcBef>
+              <a:spcAft>
+                <a:spcPts val="800"/>
+              </a:spcAft>
+              <a:buFont typeface="Arial"/>
+              <a:buChar char="•"/>
+            </a:pPr>
+            <a:r>
+              <a:rPr sz="1900">
+                <a:solidFill>
+                  <a:srgbClr val="1A1A1A"/>
+                </a:solidFill>
+                <a:latin typeface="Calibri"/>
+              </a:rPr>
+              <a:t>Most of the advantage robust aggregators hold over FedAvg comes from how they weight sites, not from the robust statistic they are named for.</a:t>
+            </a:r>
+          </a:p>
+          <a:p>
+            <a:pPr indent="-215900" marL="215900">
+              <a:spcBef>
+                <a:spcPts val="0"/>
+              </a:spcBef>
+              <a:spcAft>
+                <a:spcPts val="800"/>
+              </a:spcAft>
+              <a:buFont typeface="Arial"/>
+              <a:buChar char="•"/>
+            </a:pPr>
+            <a:r>
+              <a:rPr sz="1900">
+                <a:solidFill>
+                  <a:srgbClr val="1A1A1A"/>
+                </a:solidFill>
+                <a:latin typeface="Calibri"/>
+              </a:rPr>
+              <a:t>Any robustness evaluation run on size-skewed data should include an unweighted-mean control.</a:t>
+            </a:r>
+          </a:p>
+          <a:p>
+            <a:pPr indent="-215900" marL="215900">
+              <a:spcBef>
+                <a:spcPts val="0"/>
+              </a:spcBef>
+              <a:spcAft>
+                <a:spcPts val="800"/>
+              </a:spcAft>
+              <a:buFont typeface="Arial"/>
+              <a:buChar char="•"/>
+            </a:pPr>
+            <a:r>
+              <a:rPr sz="1900">
+                <a:solidFill>
+                  <a:srgbClr val="1A1A1A"/>
+                </a:solidFill>
+                <a:latin typeface="Calibri"/>
+              </a:rPr>
+              <a:t>The control costs one line of code, and without it a reported gain cannot be credited to robustness.</a:t>
+            </a:r>
+          </a:p>
+          <a:p>
+            <a:pPr indent="-215900" marL="215900">
+              <a:spcBef>
+                <a:spcPts val="0"/>
+              </a:spcBef>
+              <a:spcAft>
+                <a:spcPts val="800"/>
+              </a:spcAft>
+              <a:buFont typeface="Arial"/>
+              <a:buChar char="•"/>
+            </a:pPr>
+            <a:r>
+              <a:rPr sz="1900">
+                <a:solidFill>
+                  <a:srgbClr val="1A1A1A"/>
+                </a:solidFill>
+                <a:latin typeface="Calibri"/>
+              </a:rPr>
+              <a:t>A rule's reputation is not evidence: Krum is widely cited and failed here, while coordinate-wise median is simple and held.</a:t>
+            </a:r>
+          </a:p>
+        </p:txBody>
+      </p:sp>
+      <p:sp>
+        <p:nvSpPr>
+          <p:cNvPr id="51" name="Rectangle 50"/>
+          <p:cNvSpPr/>
+          <p:nvPr/>
+        </p:nvSpPr>
+        <p:spPr>
+          <a:xfrm>
+            <a:off x="14740128" y="27609001"/>
+            <a:ext cx="6638544" cy="713232"/>
+          </a:xfrm>
+          <a:prstGeom prst="rect">
+            <a:avLst/>
+          </a:prstGeom>
+          <a:solidFill>
+            <a:srgbClr val="007439"/>
+          </a:solidFill>
+          <a:ln>
+            <a:noFill/>
+          </a:ln>
+          <a:effectLst/>
+        </p:spPr>
+        <p:style>
+          <a:lnRef idx="1">
+            <a:schemeClr val="accent1"/>
+          </a:lnRef>
+          <a:fillRef idx="3">
+            <a:schemeClr val="accent1"/>
+          </a:fillRef>
+          <a:effectRef idx="2">
+            <a:schemeClr val="accent1"/>
+          </a:effectRef>
+          <a:fontRef idx="minor">
+            <a:schemeClr val="lt1"/>
+          </a:fontRef>
+        </p:style>
+        <p:txBody>
+          <a:bodyPr rtlCol="0" anchor="ctr" wrap="square" lIns="146304" rIns="146304" tIns="0" bIns="0"/>
+          <a:lstStyle/>
+          <a:p>
+            <a:pPr algn="l"/>
+            <a:r>
+              <a:rPr sz="2500" b="1">
+                <a:solidFill>
+                  <a:srgbClr val="FFFFFF"/>
+                </a:solidFill>
+                <a:latin typeface="Calibri"/>
+              </a:rPr>
+              <a:t>Acknowledgements</a:t>
+            </a:r>
+          </a:p>
+        </p:txBody>
+      </p:sp>
+      <p:sp>
+        <p:nvSpPr>
+          <p:cNvPr id="52" name="TextBox 51"/>
+          <p:cNvSpPr txBox="1"/>
+          <p:nvPr/>
+        </p:nvSpPr>
+        <p:spPr>
+          <a:xfrm>
+            <a:off x="14740128" y="28431961"/>
+            <a:ext cx="6638544" cy="1513114"/>
+          </a:xfrm>
+          <a:prstGeom prst="rect">
+            <a:avLst/>
+          </a:prstGeom>
+          <a:noFill/>
+        </p:spPr>
+        <p:txBody>
+          <a:bodyPr wrap="square" lIns="54864" rIns="0" tIns="0" bIns="0">
+            <a:spAutoFit/>
+          </a:bodyPr>
+          <a:lstStyle/>
+          <a:p>
+            <a:pPr indent="-215900" marL="215900">
+              <a:spcBef>
+                <a:spcPts val="0"/>
+              </a:spcBef>
+              <a:spcAft>
+                <a:spcPts val="800"/>
+              </a:spcAft>
+              <a:buFont typeface="Arial"/>
+              <a:buChar char="•"/>
+            </a:pPr>
+            <a:r>
+              <a:rPr sz="1900">
+                <a:solidFill>
+                  <a:srgbClr val="1A1A1A"/>
+                </a:solidFill>
+                <a:latin typeface="Calibri"/>
+              </a:rPr>
+              <a:t>Survey data collected and published by the Centers for Disease Control and Prevention (BRFSS 2023).</a:t>
+            </a:r>
+          </a:p>
+          <a:p>
+            <a:pPr indent="-215900" marL="215900">
+              <a:spcBef>
+                <a:spcPts val="0"/>
+              </a:spcBef>
+              <a:spcAft>
+                <a:spcPts val="800"/>
+              </a:spcAft>
+              <a:buFont typeface="Arial"/>
+              <a:buChar char="•"/>
+            </a:pPr>
+            <a:r>
+              <a:rPr sz="1900">
+                <a:solidFill>
+                  <a:srgbClr val="1A1A1A"/>
+                </a:solidFill>
+                <a:latin typeface="Calibri"/>
+              </a:rPr>
+              <a:t>Carried out in the Computational Healthcare and Biotechnology Lab, University of North Texas.</a:t>
+            </a:r>
+          </a:p>
+        </p:txBody>
+      </p:sp>
     </p:spTree>
     <p:extLst>
       <p:ext uri="{BB962C8B-B14F-4D97-AF65-F5344CB8AC3E}">

--- a/poster/FL_Poster_Chevuri_Aledhari.pptx
+++ b/poster/FL_Poster_Chevuri_Aledhari.pptx
@@ -3631,7 +3631,7 @@
                 </a:solidFill>
                 <a:latin typeface="Calibri"/>
               </a:rPr>
-              <a:t>Dataset</a:t>
+              <a:t>Dataset: two health datasets, split 20 ways</a:t>
             </a:r>
           </a:p>
         </p:txBody>
@@ -3838,7 +3838,7 @@
                 </a:solidFill>
                 <a:latin typeface="Calibri"/>
               </a:rPr>
-              <a:t>Code &amp; Data</a:t>
+              <a:t>Methods: seven merge rules and one control</a:t>
             </a:r>
           </a:p>
         </p:txBody>
@@ -3852,7 +3852,7 @@
         <p:spPr>
           <a:xfrm>
             <a:off x="548640" y="23348986"/>
-            <a:ext cx="4992624" cy="1806810"/>
+            <a:ext cx="6638544" cy="3522181"/>
           </a:xfrm>
           <a:prstGeom prst="rect">
             <a:avLst/>
@@ -3865,13 +3865,15 @@
           </a:bodyPr>
           <a:lstStyle/>
           <a:p>
-            <a:pPr>
+            <a:pPr indent="-215900" marL="215900">
               <a:spcBef>
                 <a:spcPts val="0"/>
               </a:spcBef>
               <a:spcAft>
                 <a:spcPts val="800"/>
               </a:spcAft>
+              <a:buFont typeface="Arial"/>
+              <a:buChar char="•"/>
             </a:pPr>
             <a:r>
               <a:rPr sz="1900">
@@ -3880,17 +3882,19 @@
                 </a:solidFill>
                 <a:latin typeface="Calibri"/>
               </a:rPr>
-              <a:t>All code, the merged results and a script that re-checks every number on this poster are openly available.</a:t>
-            </a:r>
-          </a:p>
-          <a:p>
-            <a:pPr>
+              <a:t>Seven merge rules run head to head: FedAvg, FedProx, CS-Agg, Krum, trimmed mean, coordinate-wise median, and an unweighted mean.</a:t>
+            </a:r>
+          </a:p>
+          <a:p>
+            <a:pPr indent="-215900" marL="215900">
               <a:spcBef>
                 <a:spcPts val="0"/>
               </a:spcBef>
               <a:spcAft>
                 <a:spcPts val="800"/>
               </a:spcAft>
+              <a:buFont typeface="Arial"/>
+              <a:buChar char="•"/>
             </a:pPr>
             <a:r>
               <a:rPr sz="1900">
@@ -3899,44 +3903,62 @@
                 </a:solidFill>
                 <a:latin typeface="Calibri"/>
               </a:rPr>
-              <a:t>github.com/kunalchevuri/federated-learning-health-robustness</a:t>
-            </a:r>
-          </a:p>
-        </p:txBody>
-      </p:sp>
-      <p:pic>
-        <p:nvPicPr>
-          <p:cNvPr id="28" name="Picture 27" descr="posterE_qr.png"/>
-          <p:cNvPicPr>
-            <a:picLocks noChangeAspect="1"/>
-          </p:cNvPicPr>
-          <p:nvPr/>
-        </p:nvPicPr>
-        <p:blipFill>
-          <a:blip r:embed="rId6"/>
-          <a:stretch>
-            <a:fillRect/>
-          </a:stretch>
-        </p:blipFill>
-        <p:spPr>
-          <a:xfrm>
-            <a:off x="5724144" y="23367274"/>
-            <a:ext cx="1417320" cy="1417320"/>
-          </a:xfrm>
-          <a:prstGeom prst="rect">
-            <a:avLst/>
-          </a:prstGeom>
-        </p:spPr>
-      </p:pic>
-      <p:sp>
-        <p:nvSpPr>
-          <p:cNvPr id="29" name="Rectangle 28"/>
+              <a:t>The unweighted mean is our control: it uses no robust statistic and differs from FedAvg only in ignoring how much data each site holds.</a:t>
+            </a:r>
+          </a:p>
+          <a:p>
+            <a:pPr indent="-215900" marL="215900">
+              <a:spcBef>
+                <a:spcPts val="0"/>
+              </a:spcBef>
+              <a:spcAft>
+                <a:spcPts val="800"/>
+              </a:spcAft>
+              <a:buFont typeface="Arial"/>
+              <a:buChar char="•"/>
+            </a:pPr>
+            <a:r>
+              <a:rPr sz="1900">
+                <a:solidFill>
+                  <a:srgbClr val="1A1A1A"/>
+                </a:solidFill>
+                <a:latin typeface="Calibri"/>
+              </a:rPr>
+              <a:t>Anything the control gains over FedAvg is therefore weighting alone, which is what isolates the effect.</a:t>
+            </a:r>
+          </a:p>
+          <a:p>
+            <a:pPr indent="-215900" marL="215900">
+              <a:spcBef>
+                <a:spcPts val="0"/>
+              </a:spcBef>
+              <a:spcAft>
+                <a:spcPts val="800"/>
+              </a:spcAft>
+              <a:buFont typeface="Arial"/>
+              <a:buChar char="•"/>
+            </a:pPr>
+            <a:r>
+              <a:rPr sz="1900">
+                <a:solidFill>
+                  <a:srgbClr val="1A1A1A"/>
+                </a:solidFill>
+                <a:latin typeface="Calibri"/>
+              </a:rPr>
+              <a:t>Labels are flipped at 20% of sites, across 0 to 30% of their records.</a:t>
+            </a:r>
+          </a:p>
+        </p:txBody>
+      </p:sp>
+      <p:sp>
+        <p:nvSpPr>
+          <p:cNvPr id="28" name="Rectangle 27"/>
           <p:cNvSpPr/>
           <p:nvPr/>
         </p:nvSpPr>
         <p:spPr>
           <a:xfrm>
-            <a:off x="548640" y="25338677"/>
+            <a:off x="548640" y="27054047"/>
             <a:ext cx="6638544" cy="713232"/>
           </a:xfrm>
           <a:prstGeom prst="rect">
@@ -3983,13 +4005,13 @@
       </p:sp>
       <p:sp>
         <p:nvSpPr>
-          <p:cNvPr id="30" name="TextBox 29"/>
+          <p:cNvPr id="29" name="TextBox 28"/>
           <p:cNvSpPr txBox="1"/>
           <p:nvPr/>
         </p:nvSpPr>
         <p:spPr>
           <a:xfrm>
-            <a:off x="548640" y="26161637"/>
+            <a:off x="548640" y="27877007"/>
             <a:ext cx="6638544" cy="3552661"/>
           </a:xfrm>
           <a:prstGeom prst="rect">
@@ -4120,7 +4142,7 @@
       </p:sp>
       <p:sp>
         <p:nvSpPr>
-          <p:cNvPr id="31" name="Rectangle 30"/>
+          <p:cNvPr id="30" name="Rectangle 29"/>
           <p:cNvSpPr/>
           <p:nvPr/>
         </p:nvSpPr>
@@ -4166,21 +4188,21 @@
                 </a:solidFill>
                 <a:latin typeface="Calibri"/>
               </a:rPr>
-              <a:t>Methods</a:t>
-            </a:r>
-          </a:p>
-        </p:txBody>
-      </p:sp>
-      <p:sp>
-        <p:nvSpPr>
-          <p:cNvPr id="32" name="TextBox 31"/>
+              <a:t>Methods, continued</a:t>
+            </a:r>
+          </a:p>
+        </p:txBody>
+      </p:sp>
+      <p:sp>
+        <p:nvSpPr>
+          <p:cNvPr id="31" name="TextBox 30"/>
           <p:cNvSpPr txBox="1"/>
           <p:nvPr/>
         </p:nvSpPr>
         <p:spPr>
           <a:xfrm>
             <a:off x="7644383" y="4133088"/>
-            <a:ext cx="6638544" cy="6365530"/>
+            <a:ext cx="6638544" cy="2934788"/>
           </a:xfrm>
           <a:prstGeom prst="rect">
             <a:avLst/>
@@ -4210,7 +4232,7 @@
                 </a:solidFill>
                 <a:latin typeface="Calibri"/>
               </a:rPr>
-              <a:t>Seven merge rules run head to head: FedAvg, FedProx, CS-Agg, Krum, trimmed mean, coordinate-wise median, and an unweighted mean.</a:t>
+              <a:t>On BRFSS we flip them only the way real people err, reporting no depression when they have it.</a:t>
             </a:r>
           </a:p>
           <a:p>
@@ -4231,7 +4253,7 @@
                 </a:solidFill>
                 <a:latin typeface="Calibri"/>
               </a:rPr>
-              <a:t>The unweighted mean is our control: it uses no robust statistic and differs from FedAvg only in ignoring how much data each site holds.</a:t>
+              <a:t>624 conditions cover every combination of rule, dataset, split, noise level and random seed.</a:t>
             </a:r>
           </a:p>
           <a:p>
@@ -4252,7 +4274,7 @@
                 </a:solidFill>
                 <a:latin typeface="Calibri"/>
               </a:rPr>
-              <a:t>Anything the control gains over FedAvg is therefore weighting alone, which is what isolates the effect.</a:t>
+              <a:t>Each runs 50 rounds, scored by AUC-ROC on a clean held-out test set the sites never see.</a:t>
             </a:r>
           </a:p>
           <a:p>
@@ -4273,90 +4295,6 @@
                 </a:solidFill>
                 <a:latin typeface="Calibri"/>
               </a:rPr>
-              <a:t>Labels are flipped at 20% of sites, across 0 to 30% of their records.</a:t>
-            </a:r>
-          </a:p>
-          <a:p>
-            <a:pPr indent="-215900" marL="215900">
-              <a:spcBef>
-                <a:spcPts val="0"/>
-              </a:spcBef>
-              <a:spcAft>
-                <a:spcPts val="800"/>
-              </a:spcAft>
-              <a:buFont typeface="Arial"/>
-              <a:buChar char="•"/>
-            </a:pPr>
-            <a:r>
-              <a:rPr sz="1900">
-                <a:solidFill>
-                  <a:srgbClr val="1A1A1A"/>
-                </a:solidFill>
-                <a:latin typeface="Calibri"/>
-              </a:rPr>
-              <a:t>On BRFSS we flip them only the way real people err, reporting no depression when they have it.</a:t>
-            </a:r>
-          </a:p>
-          <a:p>
-            <a:pPr indent="-215900" marL="215900">
-              <a:spcBef>
-                <a:spcPts val="0"/>
-              </a:spcBef>
-              <a:spcAft>
-                <a:spcPts val="800"/>
-              </a:spcAft>
-              <a:buFont typeface="Arial"/>
-              <a:buChar char="•"/>
-            </a:pPr>
-            <a:r>
-              <a:rPr sz="1900">
-                <a:solidFill>
-                  <a:srgbClr val="1A1A1A"/>
-                </a:solidFill>
-                <a:latin typeface="Calibri"/>
-              </a:rPr>
-              <a:t>624 conditions cover every combination of rule, dataset, split, noise level and random seed.</a:t>
-            </a:r>
-          </a:p>
-          <a:p>
-            <a:pPr indent="-215900" marL="215900">
-              <a:spcBef>
-                <a:spcPts val="0"/>
-              </a:spcBef>
-              <a:spcAft>
-                <a:spcPts val="800"/>
-              </a:spcAft>
-              <a:buFont typeface="Arial"/>
-              <a:buChar char="•"/>
-            </a:pPr>
-            <a:r>
-              <a:rPr sz="1900">
-                <a:solidFill>
-                  <a:srgbClr val="1A1A1A"/>
-                </a:solidFill>
-                <a:latin typeface="Calibri"/>
-              </a:rPr>
-              <a:t>Each runs 50 rounds, scored by AUC-ROC on a clean held-out test set the sites never see.</a:t>
-            </a:r>
-          </a:p>
-          <a:p>
-            <a:pPr indent="-215900" marL="215900">
-              <a:spcBef>
-                <a:spcPts val="0"/>
-              </a:spcBef>
-              <a:spcAft>
-                <a:spcPts val="800"/>
-              </a:spcAft>
-              <a:buFont typeface="Arial"/>
-              <a:buChar char="•"/>
-            </a:pPr>
-            <a:r>
-              <a:rPr sz="1900">
-                <a:solidFill>
-                  <a:srgbClr val="1A1A1A"/>
-                </a:solidFill>
-                <a:latin typeface="Calibri"/>
-              </a:rPr>
               <a:t>Differences are tested with Wilcoxon signed-rank, Holm-corrected within each of three comparison families.</a:t>
             </a:r>
           </a:p>
@@ -4364,13 +4302,13 @@
       </p:sp>
       <p:sp>
         <p:nvSpPr>
-          <p:cNvPr id="33" name="Rectangle 32"/>
+          <p:cNvPr id="32" name="Rectangle 31"/>
           <p:cNvSpPr/>
           <p:nvPr/>
         </p:nvSpPr>
         <p:spPr>
           <a:xfrm>
-            <a:off x="7644383" y="10681498"/>
+            <a:off x="7644383" y="7250756"/>
             <a:ext cx="6638544" cy="713232"/>
           </a:xfrm>
           <a:prstGeom prst="rect">
@@ -4417,13 +4355,13 @@
       </p:sp>
       <p:sp>
         <p:nvSpPr>
-          <p:cNvPr id="34" name="Rectangle 33"/>
+          <p:cNvPr id="33" name="Rectangle 32"/>
           <p:cNvSpPr/>
           <p:nvPr/>
         </p:nvSpPr>
         <p:spPr>
           <a:xfrm>
-            <a:off x="7644383" y="11504458"/>
+            <a:off x="7644383" y="8073716"/>
             <a:ext cx="6638544" cy="566928"/>
           </a:xfrm>
           <a:prstGeom prst="rect">
@@ -4470,21 +4408,21 @@
       </p:sp>
       <p:pic>
         <p:nvPicPr>
-          <p:cNvPr id="35" name="Picture 34" descr="posterA_decomposition.png"/>
+          <p:cNvPr id="34" name="Picture 33" descr="posterA_decomposition.png"/>
           <p:cNvPicPr>
             <a:picLocks noChangeAspect="1"/>
           </p:cNvPicPr>
           <p:nvPr/>
         </p:nvPicPr>
         <p:blipFill>
-          <a:blip r:embed="rId7"/>
+          <a:blip r:embed="rId6"/>
           <a:stretch>
             <a:fillRect/>
           </a:stretch>
         </p:blipFill>
         <p:spPr>
           <a:xfrm>
-            <a:off x="7644383" y="12181114"/>
+            <a:off x="7644383" y="8750372"/>
             <a:ext cx="6638544" cy="6766560"/>
           </a:xfrm>
           <a:prstGeom prst="rect">
@@ -4494,13 +4432,13 @@
       </p:pic>
       <p:sp>
         <p:nvSpPr>
-          <p:cNvPr id="36" name="TextBox 35"/>
+          <p:cNvPr id="35" name="TextBox 34"/>
           <p:cNvSpPr txBox="1"/>
           <p:nvPr/>
         </p:nvSpPr>
         <p:spPr>
           <a:xfrm>
-            <a:off x="7644383" y="19130554"/>
+            <a:off x="7644383" y="15699812"/>
             <a:ext cx="6638544" cy="2223951"/>
           </a:xfrm>
           <a:prstGeom prst="rect">
@@ -4580,13 +4518,13 @@
       </p:sp>
       <p:sp>
         <p:nvSpPr>
-          <p:cNvPr id="37" name="Rectangle 36"/>
+          <p:cNvPr id="36" name="Rectangle 35"/>
           <p:cNvSpPr/>
           <p:nvPr/>
         </p:nvSpPr>
         <p:spPr>
           <a:xfrm>
-            <a:off x="7644383" y="21537385"/>
+            <a:off x="7644383" y="18106643"/>
             <a:ext cx="6638544" cy="566928"/>
           </a:xfrm>
           <a:prstGeom prst="rect">
@@ -4633,21 +4571,21 @@
       </p:sp>
       <p:pic>
         <p:nvPicPr>
-          <p:cNvPr id="38" name="Picture 37" descr="posterC_runlevel.png"/>
+          <p:cNvPr id="37" name="Picture 36" descr="posterC_runlevel.png"/>
           <p:cNvPicPr>
             <a:picLocks noChangeAspect="1"/>
           </p:cNvPicPr>
           <p:nvPr/>
         </p:nvPicPr>
         <p:blipFill>
-          <a:blip r:embed="rId8"/>
+          <a:blip r:embed="rId7"/>
           <a:stretch>
             <a:fillRect/>
           </a:stretch>
         </p:blipFill>
         <p:spPr>
           <a:xfrm>
-            <a:off x="7644383" y="22214041"/>
+            <a:off x="7644383" y="18783299"/>
             <a:ext cx="6638544" cy="5669280"/>
           </a:xfrm>
           <a:prstGeom prst="rect">
@@ -4657,13 +4595,13 @@
       </p:pic>
       <p:sp>
         <p:nvSpPr>
-          <p:cNvPr id="39" name="TextBox 38"/>
+          <p:cNvPr id="38" name="TextBox 37"/>
           <p:cNvSpPr txBox="1"/>
           <p:nvPr/>
         </p:nvSpPr>
         <p:spPr>
           <a:xfrm>
-            <a:off x="7644383" y="28066201"/>
+            <a:off x="7644383" y="24635459"/>
             <a:ext cx="6638544" cy="802277"/>
           </a:xfrm>
           <a:prstGeom prst="rect">
@@ -4701,13 +4639,13 @@
       </p:sp>
       <p:sp>
         <p:nvSpPr>
-          <p:cNvPr id="40" name="Rectangle 39"/>
+          <p:cNvPr id="39" name="Rectangle 38"/>
           <p:cNvSpPr/>
           <p:nvPr/>
         </p:nvSpPr>
         <p:spPr>
           <a:xfrm>
-            <a:off x="14740128" y="3310128"/>
+            <a:off x="7644383" y="25620617"/>
             <a:ext cx="6638544" cy="713232"/>
           </a:xfrm>
           <a:prstGeom prst="rect">
@@ -4747,27 +4685,112 @@
                 </a:solidFill>
                 <a:latin typeface="Calibri"/>
               </a:rPr>
-              <a:t>Results, continued</a:t>
-            </a:r>
-          </a:p>
-        </p:txBody>
-      </p:sp>
-      <p:sp>
-        <p:nvSpPr>
-          <p:cNvPr id="41" name="Rectangle 40"/>
+              <a:t>Code &amp; Data</a:t>
+            </a:r>
+          </a:p>
+        </p:txBody>
+      </p:sp>
+      <p:sp>
+        <p:nvSpPr>
+          <p:cNvPr id="40" name="TextBox 39"/>
+          <p:cNvSpPr txBox="1"/>
+          <p:nvPr/>
+        </p:nvSpPr>
+        <p:spPr>
+          <a:xfrm>
+            <a:off x="7644383" y="26443577"/>
+            <a:ext cx="4992624" cy="1806810"/>
+          </a:xfrm>
+          <a:prstGeom prst="rect">
+            <a:avLst/>
+          </a:prstGeom>
+          <a:noFill/>
+        </p:spPr>
+        <p:txBody>
+          <a:bodyPr wrap="square" lIns="54864" rIns="0" tIns="0" bIns="0">
+            <a:spAutoFit/>
+          </a:bodyPr>
+          <a:lstStyle/>
+          <a:p>
+            <a:pPr>
+              <a:spcBef>
+                <a:spcPts val="0"/>
+              </a:spcBef>
+              <a:spcAft>
+                <a:spcPts val="800"/>
+              </a:spcAft>
+            </a:pPr>
+            <a:r>
+              <a:rPr sz="1900">
+                <a:solidFill>
+                  <a:srgbClr val="1A1A1A"/>
+                </a:solidFill>
+                <a:latin typeface="Calibri"/>
+              </a:rPr>
+              <a:t>All code, the merged results and a script that re-checks every number on this poster are openly available.</a:t>
+            </a:r>
+          </a:p>
+          <a:p>
+            <a:pPr>
+              <a:spcBef>
+                <a:spcPts val="0"/>
+              </a:spcBef>
+              <a:spcAft>
+                <a:spcPts val="800"/>
+              </a:spcAft>
+            </a:pPr>
+            <a:r>
+              <a:rPr sz="1900">
+                <a:solidFill>
+                  <a:srgbClr val="1A1A1A"/>
+                </a:solidFill>
+                <a:latin typeface="Calibri"/>
+              </a:rPr>
+              <a:t>github.com/kunalchevuri/federated-learning-health-robustness</a:t>
+            </a:r>
+          </a:p>
+        </p:txBody>
+      </p:sp>
+      <p:pic>
+        <p:nvPicPr>
+          <p:cNvPr id="41" name="Picture 40" descr="posterE_qr.png"/>
+          <p:cNvPicPr>
+            <a:picLocks noChangeAspect="1"/>
+          </p:cNvPicPr>
+          <p:nvPr/>
+        </p:nvPicPr>
+        <p:blipFill>
+          <a:blip r:embed="rId8"/>
+          <a:stretch>
+            <a:fillRect/>
+          </a:stretch>
+        </p:blipFill>
+        <p:spPr>
+          <a:xfrm>
+            <a:off x="12819888" y="26461865"/>
+            <a:ext cx="1417320" cy="1417320"/>
+          </a:xfrm>
+          <a:prstGeom prst="rect">
+            <a:avLst/>
+          </a:prstGeom>
+        </p:spPr>
+      </p:pic>
+      <p:sp>
+        <p:nvSpPr>
+          <p:cNvPr id="42" name="Rectangle 41"/>
           <p:cNvSpPr/>
           <p:nvPr/>
         </p:nvSpPr>
         <p:spPr>
           <a:xfrm>
-            <a:off x="14740128" y="4133088"/>
-            <a:ext cx="6638544" cy="566928"/>
+            <a:off x="14740128" y="3310128"/>
+            <a:ext cx="6638544" cy="713232"/>
           </a:xfrm>
           <a:prstGeom prst="rect">
             <a:avLst/>
           </a:prstGeom>
           <a:solidFill>
-            <a:srgbClr val="3F8C5C"/>
+            <a:srgbClr val="007439"/>
           </a:solidFill>
           <a:ln>
             <a:noFill/>
@@ -4794,115 +4817,26 @@
           <a:p>
             <a:pPr algn="l"/>
             <a:r>
-              <a:rPr sz="1900" b="1">
+              <a:rPr sz="2500" b="1">
                 <a:solidFill>
                   <a:srgbClr val="FFFFFF"/>
                 </a:solidFill>
                 <a:latin typeface="Calibri"/>
               </a:rPr>
-              <a:t>Lopsided data hurts far more than broken labels</a:t>
-            </a:r>
-          </a:p>
-        </p:txBody>
-      </p:sp>
-      <p:pic>
-        <p:nvPicPr>
-          <p:cNvPr id="42" name="Picture 41" descr="posterG_stressors.png"/>
-          <p:cNvPicPr>
-            <a:picLocks noChangeAspect="1"/>
-          </p:cNvPicPr>
-          <p:nvPr/>
-        </p:nvPicPr>
-        <p:blipFill>
-          <a:blip r:embed="rId9"/>
-          <a:stretch>
-            <a:fillRect/>
-          </a:stretch>
-        </p:blipFill>
-        <p:spPr>
-          <a:xfrm>
-            <a:off x="14740128" y="4809744"/>
-            <a:ext cx="6638544" cy="4023360"/>
-          </a:xfrm>
-          <a:prstGeom prst="rect">
-            <a:avLst/>
-          </a:prstGeom>
-        </p:spPr>
-      </p:pic>
-      <p:sp>
-        <p:nvSpPr>
-          <p:cNvPr id="43" name="TextBox 42"/>
-          <p:cNvSpPr txBox="1"/>
-          <p:nvPr/>
-        </p:nvSpPr>
-        <p:spPr>
-          <a:xfrm>
-            <a:off x="14740128" y="9015984"/>
-            <a:ext cx="6638544" cy="1513114"/>
-          </a:xfrm>
-          <a:prstGeom prst="rect">
-            <a:avLst/>
-          </a:prstGeom>
-          <a:noFill/>
-        </p:spPr>
-        <p:txBody>
-          <a:bodyPr wrap="square" lIns="54864" rIns="0" tIns="0" bIns="0">
-            <a:spAutoFit/>
-          </a:bodyPr>
-          <a:lstStyle/>
-          <a:p>
-            <a:pPr indent="-215900" marL="215900">
-              <a:spcBef>
-                <a:spcPts val="0"/>
-              </a:spcBef>
-              <a:spcAft>
-                <a:spcPts val="800"/>
-              </a:spcAft>
-              <a:buFont typeface="Arial"/>
-              <a:buChar char="•"/>
-            </a:pPr>
-            <a:r>
-              <a:rPr sz="1900">
-                <a:solidFill>
-                  <a:srgbClr val="1A1A1A"/>
-                </a:solidFill>
-                <a:latin typeface="Calibri"/>
-              </a:rPr>
-              <a:t>Moving from alpha = 1.0 to 0.1 costs FedAvg 0.2348 AUC, while 0% to 30% label noise costs it 0.0016.</a:t>
-            </a:r>
-          </a:p>
-          <a:p>
-            <a:pPr indent="-215900" marL="215900">
-              <a:spcBef>
-                <a:spcPts val="0"/>
-              </a:spcBef>
-              <a:spcAft>
-                <a:spcPts val="800"/>
-              </a:spcAft>
-              <a:buFont typeface="Arial"/>
-              <a:buChar char="•"/>
-            </a:pPr>
-            <a:r>
-              <a:rPr sz="1900">
-                <a:solidFill>
-                  <a:srgbClr val="1A1A1A"/>
-                </a:solidFill>
-                <a:latin typeface="Calibri"/>
-              </a:rPr>
-              <a:t>That 149x gap narrows to about 14x when sites track twelve health variables instead of four, but it never closes.</a:t>
-            </a:r>
-          </a:p>
-        </p:txBody>
-      </p:sp>
-      <p:sp>
-        <p:nvSpPr>
-          <p:cNvPr id="44" name="Rectangle 43"/>
+              <a:t>Results, continued</a:t>
+            </a:r>
+          </a:p>
+        </p:txBody>
+      </p:sp>
+      <p:sp>
+        <p:nvSpPr>
+          <p:cNvPr id="43" name="Rectangle 42"/>
           <p:cNvSpPr/>
           <p:nvPr/>
         </p:nvSpPr>
         <p:spPr>
           <a:xfrm>
-            <a:off x="14740128" y="10711978"/>
+            <a:off x="14740128" y="4133088"/>
             <a:ext cx="6638544" cy="566928"/>
           </a:xfrm>
           <a:prstGeom prst="rect">
@@ -4942,29 +4876,29 @@
                 </a:solidFill>
                 <a:latin typeface="Calibri"/>
               </a:rPr>
-              <a:t>A clean benchmark would have hidden all of this</a:t>
+              <a:t>Lopsided data hurts far more than broken labels</a:t>
             </a:r>
           </a:p>
         </p:txBody>
       </p:sp>
       <p:pic>
         <p:nvPicPr>
-          <p:cNvPr id="45" name="Picture 44" descr="posterB_both_datasets.png"/>
+          <p:cNvPr id="44" name="Picture 43" descr="posterG_stressors.png"/>
           <p:cNvPicPr>
             <a:picLocks noChangeAspect="1"/>
           </p:cNvPicPr>
           <p:nvPr/>
         </p:nvPicPr>
         <p:blipFill>
-          <a:blip r:embed="rId10"/>
+          <a:blip r:embed="rId9"/>
           <a:stretch>
             <a:fillRect/>
           </a:stretch>
         </p:blipFill>
         <p:spPr>
           <a:xfrm>
-            <a:off x="14740128" y="11388634"/>
-            <a:ext cx="6638544" cy="6583680"/>
+            <a:off x="14740128" y="4809744"/>
+            <a:ext cx="6638544" cy="3886200"/>
           </a:xfrm>
           <a:prstGeom prst="rect">
             <a:avLst/>
@@ -4973,13 +4907,13 @@
       </p:pic>
       <p:sp>
         <p:nvSpPr>
-          <p:cNvPr id="46" name="TextBox 45"/>
+          <p:cNvPr id="45" name="TextBox 44"/>
           <p:cNvSpPr txBox="1"/>
           <p:nvPr/>
         </p:nvSpPr>
         <p:spPr>
           <a:xfrm>
-            <a:off x="14740128" y="18155194"/>
+            <a:off x="14740128" y="8878824"/>
             <a:ext cx="6638544" cy="1513114"/>
           </a:xfrm>
           <a:prstGeom prst="rect">
@@ -5010,7 +4944,7 @@
                 </a:solidFill>
                 <a:latin typeface="Calibri"/>
               </a:rPr>
-              <a:t>On Breast Cancer every rule but Krum reaches 0.997 AUC or better, where no difference between them is visible.</a:t>
+              <a:t>Moving from alpha = 1.0 to 0.1 costs FedAvg 0.2348 AUC, while 0% to 30% label noise costs it 0.0016.</a:t>
             </a:r>
           </a:p>
           <a:p>
@@ -5031,27 +4965,27 @@
                 </a:solidFill>
                 <a:latin typeface="Calibri"/>
               </a:rPr>
-              <a:t>Messy, self-reported population health data is where these rules actually separate.</a:t>
-            </a:r>
-          </a:p>
-        </p:txBody>
-      </p:sp>
-      <p:sp>
-        <p:nvSpPr>
-          <p:cNvPr id="47" name="Rectangle 46"/>
+              <a:t>That 149x gap narrows to about 14x when sites track twelve health variables instead of four, but it never closes.</a:t>
+            </a:r>
+          </a:p>
+        </p:txBody>
+      </p:sp>
+      <p:sp>
+        <p:nvSpPr>
+          <p:cNvPr id="46" name="Rectangle 45"/>
           <p:cNvSpPr/>
           <p:nvPr/>
         </p:nvSpPr>
         <p:spPr>
           <a:xfrm>
-            <a:off x="14740128" y="19851188"/>
-            <a:ext cx="6638544" cy="713232"/>
+            <a:off x="14740128" y="10574818"/>
+            <a:ext cx="6638544" cy="566928"/>
           </a:xfrm>
           <a:prstGeom prst="rect">
             <a:avLst/>
           </a:prstGeom>
           <a:solidFill>
-            <a:srgbClr val="007439"/>
+            <a:srgbClr val="3F8C5C"/>
           </a:solidFill>
           <a:ln>
             <a:noFill/>
@@ -5078,17 +5012,41 @@
           <a:p>
             <a:pPr algn="l"/>
             <a:r>
-              <a:rPr sz="2500" b="1">
+              <a:rPr sz="1900" b="1">
                 <a:solidFill>
                   <a:srgbClr val="FFFFFF"/>
                 </a:solidFill>
                 <a:latin typeface="Calibri"/>
               </a:rPr>
-              <a:t>Future Directions</a:t>
-            </a:r>
-          </a:p>
-        </p:txBody>
-      </p:sp>
+              <a:t>A clean benchmark would have hidden all of this</a:t>
+            </a:r>
+          </a:p>
+        </p:txBody>
+      </p:sp>
+      <p:pic>
+        <p:nvPicPr>
+          <p:cNvPr id="47" name="Picture 46" descr="posterB_both_datasets.png"/>
+          <p:cNvPicPr>
+            <a:picLocks noChangeAspect="1"/>
+          </p:cNvPicPr>
+          <p:nvPr/>
+        </p:nvPicPr>
+        <p:blipFill>
+          <a:blip r:embed="rId10"/>
+          <a:stretch>
+            <a:fillRect/>
+          </a:stretch>
+        </p:blipFill>
+        <p:spPr>
+          <a:xfrm>
+            <a:off x="14740128" y="11251474"/>
+            <a:ext cx="6638544" cy="6217920"/>
+          </a:xfrm>
+          <a:prstGeom prst="rect">
+            <a:avLst/>
+          </a:prstGeom>
+        </p:spPr>
+      </p:pic>
       <p:sp>
         <p:nvSpPr>
           <p:cNvPr id="48" name="TextBox 47"/>
@@ -5097,8 +5055,8 @@
         </p:nvSpPr>
         <p:spPr>
           <a:xfrm>
-            <a:off x="14740128" y="20674148"/>
-            <a:ext cx="6638544" cy="2223951"/>
+            <a:off x="14740128" y="17652274"/>
+            <a:ext cx="6638544" cy="1513114"/>
           </a:xfrm>
           <a:prstGeom prst="rect">
             <a:avLst/>
@@ -5128,7 +5086,7 @@
                 </a:solidFill>
                 <a:latin typeface="Calibri"/>
               </a:rPr>
-              <a:t>Test adaptive Byzantine attackers, not only the label noise studied here.</a:t>
+              <a:t>On Breast Cancer every rule but Krum reaches 0.997 AUC or better, where no difference between them is visible.</a:t>
             </a:r>
           </a:p>
           <a:p>
@@ -5149,28 +5107,7 @@
                 </a:solidFill>
                 <a:latin typeface="Calibri"/>
               </a:rPr>
-              <a:t>Replace the simulated Dirichlet split with data partitioned across real institutions.</a:t>
-            </a:r>
-          </a:p>
-          <a:p>
-            <a:pPr indent="-215900" marL="215900">
-              <a:spcBef>
-                <a:spcPts val="0"/>
-              </a:spcBef>
-              <a:spcAft>
-                <a:spcPts val="800"/>
-              </a:spcAft>
-              <a:buFont typeface="Arial"/>
-              <a:buChar char="•"/>
-            </a:pPr>
-            <a:r>
-              <a:rPr sz="1900">
-                <a:solidFill>
-                  <a:srgbClr val="1A1A1A"/>
-                </a:solidFill>
-                <a:latin typeface="Calibri"/>
-              </a:rPr>
-              <a:t>Check whether the weighting effect persists for deeper models and larger numbers of sites.</a:t>
+              <a:t>Messy, self-reported population health data is where these rules actually separate.</a:t>
             </a:r>
           </a:p>
         </p:txBody>
@@ -5183,7 +5120,7 @@
         </p:nvSpPr>
         <p:spPr>
           <a:xfrm>
-            <a:off x="14740128" y="23080979"/>
+            <a:off x="14740128" y="19348268"/>
             <a:ext cx="6638544" cy="713232"/>
           </a:xfrm>
           <a:prstGeom prst="rect">
@@ -5223,7 +5160,7 @@
                 </a:solidFill>
                 <a:latin typeface="Calibri"/>
               </a:rPr>
-              <a:t>Conclusions</a:t>
+              <a:t>Future Directions</a:t>
             </a:r>
           </a:p>
         </p:txBody>
@@ -5236,8 +5173,8 @@
         </p:nvSpPr>
         <p:spPr>
           <a:xfrm>
-            <a:off x="14740128" y="23903940"/>
-            <a:ext cx="6638544" cy="3522181"/>
+            <a:off x="14740128" y="20171228"/>
+            <a:ext cx="6638544" cy="2223951"/>
           </a:xfrm>
           <a:prstGeom prst="rect">
             <a:avLst/>
@@ -5267,7 +5204,7 @@
                 </a:solidFill>
                 <a:latin typeface="Calibri"/>
               </a:rPr>
-              <a:t>Most of the advantage robust aggregators hold over FedAvg comes from how they weight sites, not from the robust statistic they are named for.</a:t>
+              <a:t>Test adaptive Byzantine attackers, not only the label noise studied here.</a:t>
             </a:r>
           </a:p>
           <a:p>
@@ -5288,7 +5225,7 @@
                 </a:solidFill>
                 <a:latin typeface="Calibri"/>
               </a:rPr>
-              <a:t>Any robustness evaluation run on size-skewed data should include an unweighted-mean control.</a:t>
+              <a:t>Replace the simulated Dirichlet split with data partitioned across real institutions.</a:t>
             </a:r>
           </a:p>
           <a:p>
@@ -5309,28 +5246,7 @@
                 </a:solidFill>
                 <a:latin typeface="Calibri"/>
               </a:rPr>
-              <a:t>The control costs one line of code, and without it a reported gain cannot be credited to robustness.</a:t>
-            </a:r>
-          </a:p>
-          <a:p>
-            <a:pPr indent="-215900" marL="215900">
-              <a:spcBef>
-                <a:spcPts val="0"/>
-              </a:spcBef>
-              <a:spcAft>
-                <a:spcPts val="800"/>
-              </a:spcAft>
-              <a:buFont typeface="Arial"/>
-              <a:buChar char="•"/>
-            </a:pPr>
-            <a:r>
-              <a:rPr sz="1900">
-                <a:solidFill>
-                  <a:srgbClr val="1A1A1A"/>
-                </a:solidFill>
-                <a:latin typeface="Calibri"/>
-              </a:rPr>
-              <a:t>A rule's reputation is not evidence: Krum is widely cited and failed here, while coordinate-wise median is simple and held.</a:t>
+              <a:t>Check whether the weighting effect persists for deeper models and larger numbers of sites.</a:t>
             </a:r>
           </a:p>
         </p:txBody>
@@ -5343,7 +5259,7 @@
         </p:nvSpPr>
         <p:spPr>
           <a:xfrm>
-            <a:off x="14740128" y="27609001"/>
+            <a:off x="14740128" y="22578060"/>
             <a:ext cx="6638544" cy="713232"/>
           </a:xfrm>
           <a:prstGeom prst="rect">
@@ -5383,7 +5299,7 @@
                 </a:solidFill>
                 <a:latin typeface="Calibri"/>
               </a:rPr>
-              <a:t>Acknowledgements</a:t>
+              <a:t>Conclusions</a:t>
             </a:r>
           </a:p>
         </p:txBody>
@@ -5396,7 +5312,167 @@
         </p:nvSpPr>
         <p:spPr>
           <a:xfrm>
-            <a:off x="14740128" y="28431961"/>
+            <a:off x="14740128" y="23401020"/>
+            <a:ext cx="6638544" cy="3522181"/>
+          </a:xfrm>
+          <a:prstGeom prst="rect">
+            <a:avLst/>
+          </a:prstGeom>
+          <a:noFill/>
+        </p:spPr>
+        <p:txBody>
+          <a:bodyPr wrap="square" lIns="54864" rIns="0" tIns="0" bIns="0">
+            <a:spAutoFit/>
+          </a:bodyPr>
+          <a:lstStyle/>
+          <a:p>
+            <a:pPr indent="-215900" marL="215900">
+              <a:spcBef>
+                <a:spcPts val="0"/>
+              </a:spcBef>
+              <a:spcAft>
+                <a:spcPts val="800"/>
+              </a:spcAft>
+              <a:buFont typeface="Arial"/>
+              <a:buChar char="•"/>
+            </a:pPr>
+            <a:r>
+              <a:rPr sz="1900">
+                <a:solidFill>
+                  <a:srgbClr val="1A1A1A"/>
+                </a:solidFill>
+                <a:latin typeface="Calibri"/>
+              </a:rPr>
+              <a:t>Most of the advantage robust aggregators hold over FedAvg comes from how they weight sites, not from the robust statistic they are named for.</a:t>
+            </a:r>
+          </a:p>
+          <a:p>
+            <a:pPr indent="-215900" marL="215900">
+              <a:spcBef>
+                <a:spcPts val="0"/>
+              </a:spcBef>
+              <a:spcAft>
+                <a:spcPts val="800"/>
+              </a:spcAft>
+              <a:buFont typeface="Arial"/>
+              <a:buChar char="•"/>
+            </a:pPr>
+            <a:r>
+              <a:rPr sz="1900">
+                <a:solidFill>
+                  <a:srgbClr val="1A1A1A"/>
+                </a:solidFill>
+                <a:latin typeface="Calibri"/>
+              </a:rPr>
+              <a:t>Any robustness evaluation run on size-skewed data should include an unweighted-mean control.</a:t>
+            </a:r>
+          </a:p>
+          <a:p>
+            <a:pPr indent="-215900" marL="215900">
+              <a:spcBef>
+                <a:spcPts val="0"/>
+              </a:spcBef>
+              <a:spcAft>
+                <a:spcPts val="800"/>
+              </a:spcAft>
+              <a:buFont typeface="Arial"/>
+              <a:buChar char="•"/>
+            </a:pPr>
+            <a:r>
+              <a:rPr sz="1900">
+                <a:solidFill>
+                  <a:srgbClr val="1A1A1A"/>
+                </a:solidFill>
+                <a:latin typeface="Calibri"/>
+              </a:rPr>
+              <a:t>The control costs one line of code, and without it a reported gain cannot be credited to robustness.</a:t>
+            </a:r>
+          </a:p>
+          <a:p>
+            <a:pPr indent="-215900" marL="215900">
+              <a:spcBef>
+                <a:spcPts val="0"/>
+              </a:spcBef>
+              <a:spcAft>
+                <a:spcPts val="800"/>
+              </a:spcAft>
+              <a:buFont typeface="Arial"/>
+              <a:buChar char="•"/>
+            </a:pPr>
+            <a:r>
+              <a:rPr sz="1900">
+                <a:solidFill>
+                  <a:srgbClr val="1A1A1A"/>
+                </a:solidFill>
+                <a:latin typeface="Calibri"/>
+              </a:rPr>
+              <a:t>A rule's reputation is not evidence: Krum is widely cited and failed here, while coordinate-wise median is simple and held.</a:t>
+            </a:r>
+          </a:p>
+        </p:txBody>
+      </p:sp>
+      <p:sp>
+        <p:nvSpPr>
+          <p:cNvPr id="53" name="Rectangle 52"/>
+          <p:cNvSpPr/>
+          <p:nvPr/>
+        </p:nvSpPr>
+        <p:spPr>
+          <a:xfrm>
+            <a:off x="14740128" y="27106081"/>
+            <a:ext cx="6638544" cy="713232"/>
+          </a:xfrm>
+          <a:prstGeom prst="rect">
+            <a:avLst/>
+          </a:prstGeom>
+          <a:solidFill>
+            <a:srgbClr val="007439"/>
+          </a:solidFill>
+          <a:ln>
+            <a:noFill/>
+          </a:ln>
+          <a:effectLst/>
+        </p:spPr>
+        <p:style>
+          <a:lnRef idx="1">
+            <a:schemeClr val="accent1"/>
+          </a:lnRef>
+          <a:fillRef idx="3">
+            <a:schemeClr val="accent1"/>
+          </a:fillRef>
+          <a:effectRef idx="2">
+            <a:schemeClr val="accent1"/>
+          </a:effectRef>
+          <a:fontRef idx="minor">
+            <a:schemeClr val="lt1"/>
+          </a:fontRef>
+        </p:style>
+        <p:txBody>
+          <a:bodyPr rtlCol="0" anchor="ctr" wrap="square" lIns="146304" rIns="146304" tIns="0" bIns="0"/>
+          <a:lstStyle/>
+          <a:p>
+            <a:pPr algn="l"/>
+            <a:r>
+              <a:rPr sz="2500" b="1">
+                <a:solidFill>
+                  <a:srgbClr val="FFFFFF"/>
+                </a:solidFill>
+                <a:latin typeface="Calibri"/>
+              </a:rPr>
+              <a:t>Acknowledgements</a:t>
+            </a:r>
+          </a:p>
+        </p:txBody>
+      </p:sp>
+      <p:sp>
+        <p:nvSpPr>
+          <p:cNvPr id="54" name="TextBox 53"/>
+          <p:cNvSpPr txBox="1"/>
+          <p:nvPr/>
+        </p:nvSpPr>
+        <p:spPr>
+          <a:xfrm>
+            <a:off x="14740128" y="27929041"/>
             <a:ext cx="6638544" cy="1513114"/>
           </a:xfrm>
           <a:prstGeom prst="rect">

--- a/poster/FL_Poster_Chevuri_Aledhari.pptx
+++ b/poster/FL_Poster_Chevuri_Aledhari.pptx
@@ -3262,6 +3262,79 @@
       </p:sp>
       <p:sp>
         <p:nvSpPr>
+          <p:cNvPr id="16" name="Rectangle 15">
+            <a:extLst>
+              <a:ext uri="{FF2B5EF4-FFF2-40B4-BE49-F238E27FC236}">
+                <a16:creationId xmlns:a16="http://schemas.microsoft.com/office/drawing/2014/main" id="{D3DF3914-160B-4294-A01A-8CB9C6320C14}"/>
+              </a:ext>
+            </a:extLst>
+          </p:cNvPr>
+          <p:cNvSpPr/>
+          <p:nvPr/>
+        </p:nvSpPr>
+        <p:spPr>
+          <a:xfrm>
+            <a:off x="0" y="31455360"/>
+            <a:ext cx="21945600" cy="1463040"/>
+          </a:xfrm>
+          <a:prstGeom prst="rect">
+            <a:avLst/>
+          </a:prstGeom>
+          <a:gradFill flip="none" rotWithShape="1">
+            <a:gsLst>
+              <a:gs pos="0">
+                <a:srgbClr val="007C3F">
+                  <a:shade val="30000"/>
+                  <a:satMod val="115000"/>
+                </a:srgbClr>
+              </a:gs>
+              <a:gs pos="50000">
+                <a:srgbClr val="007C3F">
+                  <a:shade val="67500"/>
+                  <a:satMod val="115000"/>
+                </a:srgbClr>
+              </a:gs>
+              <a:gs pos="100000">
+                <a:srgbClr val="007C3F">
+                  <a:shade val="100000"/>
+                  <a:satMod val="115000"/>
+                </a:srgbClr>
+              </a:gs>
+            </a:gsLst>
+            <a:lin ang="2700000" scaled="1"/>
+            <a:tileRect/>
+          </a:gradFill>
+          <a:ln>
+            <a:noFill/>
+          </a:ln>
+        </p:spPr>
+        <p:style>
+          <a:lnRef idx="2">
+            <a:schemeClr val="accent1">
+              <a:shade val="50000"/>
+            </a:schemeClr>
+          </a:lnRef>
+          <a:fillRef idx="1">
+            <a:schemeClr val="accent1"/>
+          </a:fillRef>
+          <a:effectRef idx="0">
+            <a:schemeClr val="accent1"/>
+          </a:effectRef>
+          <a:fontRef idx="minor">
+            <a:schemeClr val="lt1"/>
+          </a:fontRef>
+        </p:style>
+        <p:txBody>
+          <a:bodyPr rtlCol="0" anchor="ctr"/>
+          <a:lstStyle/>
+          <a:p>
+            <a:pPr algn="ctr"/>
+            <a:endParaRPr lang="en-US" sz="15552" dirty="0"/>
+          </a:p>
+        </p:txBody>
+      </p:sp>
+      <p:sp>
+        <p:nvSpPr>
           <p:cNvPr id="17" name="Rectangle 16"/>
           <p:cNvSpPr/>
           <p:nvPr/>
@@ -3852,7 +3925,7 @@
         <p:spPr>
           <a:xfrm>
             <a:off x="548640" y="23348986"/>
-            <a:ext cx="6638544" cy="3522181"/>
+            <a:ext cx="6638544" cy="2811344"/>
           </a:xfrm>
           <a:prstGeom prst="rect">
             <a:avLst/>
@@ -3927,27 +4000,6 @@
               <a:t>Anything the control gains over FedAvg is therefore weighting alone, which is what isolates the effect.</a:t>
             </a:r>
           </a:p>
-          <a:p>
-            <a:pPr indent="-215900" marL="215900">
-              <a:spcBef>
-                <a:spcPts val="0"/>
-              </a:spcBef>
-              <a:spcAft>
-                <a:spcPts val="800"/>
-              </a:spcAft>
-              <a:buFont typeface="Arial"/>
-              <a:buChar char="•"/>
-            </a:pPr>
-            <a:r>
-              <a:rPr sz="1900">
-                <a:solidFill>
-                  <a:srgbClr val="1A1A1A"/>
-                </a:solidFill>
-                <a:latin typeface="Calibri"/>
-              </a:rPr>
-              <a:t>Labels are flipped at 20% of sites, across 0 to 30% of their records.</a:t>
-            </a:r>
-          </a:p>
         </p:txBody>
       </p:sp>
       <p:sp>
@@ -3958,7 +4010,7 @@
         </p:nvSpPr>
         <p:spPr>
           <a:xfrm>
-            <a:off x="548640" y="27054047"/>
+            <a:off x="548640" y="26343210"/>
             <a:ext cx="6638544" cy="713232"/>
           </a:xfrm>
           <a:prstGeom prst="rect">
@@ -4011,7 +4063,7 @@
         </p:nvSpPr>
         <p:spPr>
           <a:xfrm>
-            <a:off x="548640" y="27877007"/>
+            <a:off x="548640" y="27166170"/>
             <a:ext cx="6638544" cy="3552661"/>
           </a:xfrm>
           <a:prstGeom prst="rect">
@@ -4202,7 +4254,7 @@
         <p:spPr>
           <a:xfrm>
             <a:off x="7644383" y="4133088"/>
-            <a:ext cx="6638544" cy="2934788"/>
+            <a:ext cx="6638544" cy="3645625"/>
           </a:xfrm>
           <a:prstGeom prst="rect">
             <a:avLst/>
@@ -4232,7 +4284,7 @@
                 </a:solidFill>
                 <a:latin typeface="Calibri"/>
               </a:rPr>
-              <a:t>On BRFSS we flip them only the way real people err, reporting no depression when they have it.</a:t>
+              <a:t>Labels are flipped at 20% of sites, across 0 to 30% of their records.</a:t>
             </a:r>
           </a:p>
           <a:p>
@@ -4253,7 +4305,7 @@
                 </a:solidFill>
                 <a:latin typeface="Calibri"/>
               </a:rPr>
-              <a:t>624 conditions cover every combination of rule, dataset, split, noise level and random seed.</a:t>
+              <a:t>On BRFSS we flip them only the way real people err, reporting no depression when they have it.</a:t>
             </a:r>
           </a:p>
           <a:p>
@@ -4274,7 +4326,7 @@
                 </a:solidFill>
                 <a:latin typeface="Calibri"/>
               </a:rPr>
-              <a:t>Each runs 50 rounds, scored by AUC-ROC on a clean held-out test set the sites never see.</a:t>
+              <a:t>624 conditions cover every combination of rule, dataset, split, noise level and random seed.</a:t>
             </a:r>
           </a:p>
           <a:p>
@@ -4295,6 +4347,27 @@
                 </a:solidFill>
                 <a:latin typeface="Calibri"/>
               </a:rPr>
+              <a:t>Each runs 50 rounds, scored by AUC-ROC on a clean held-out test set the sites never see.</a:t>
+            </a:r>
+          </a:p>
+          <a:p>
+            <a:pPr indent="-215900" marL="215900">
+              <a:spcBef>
+                <a:spcPts val="0"/>
+              </a:spcBef>
+              <a:spcAft>
+                <a:spcPts val="800"/>
+              </a:spcAft>
+              <a:buFont typeface="Arial"/>
+              <a:buChar char="•"/>
+            </a:pPr>
+            <a:r>
+              <a:rPr sz="1900">
+                <a:solidFill>
+                  <a:srgbClr val="1A1A1A"/>
+                </a:solidFill>
+                <a:latin typeface="Calibri"/>
+              </a:rPr>
               <a:t>Differences are tested with Wilcoxon signed-rank, Holm-corrected within each of three comparison families.</a:t>
             </a:r>
           </a:p>
@@ -4308,7 +4381,7 @@
         </p:nvSpPr>
         <p:spPr>
           <a:xfrm>
-            <a:off x="7644383" y="7250756"/>
+            <a:off x="7644383" y="7961593"/>
             <a:ext cx="6638544" cy="713232"/>
           </a:xfrm>
           <a:prstGeom prst="rect">
@@ -4361,7 +4434,7 @@
         </p:nvSpPr>
         <p:spPr>
           <a:xfrm>
-            <a:off x="7644383" y="8073716"/>
+            <a:off x="7644383" y="8784553"/>
             <a:ext cx="6638544" cy="566928"/>
           </a:xfrm>
           <a:prstGeom prst="rect">
@@ -4422,7 +4495,7 @@
         </p:blipFill>
         <p:spPr>
           <a:xfrm>
-            <a:off x="7644383" y="8750372"/>
+            <a:off x="7644383" y="9461209"/>
             <a:ext cx="6638544" cy="6766560"/>
           </a:xfrm>
           <a:prstGeom prst="rect">
@@ -4438,7 +4511,7 @@
         </p:nvSpPr>
         <p:spPr>
           <a:xfrm>
-            <a:off x="7644383" y="15699812"/>
+            <a:off x="7644383" y="16410649"/>
             <a:ext cx="6638544" cy="2223951"/>
           </a:xfrm>
           <a:prstGeom prst="rect">
@@ -4524,7 +4597,7 @@
         </p:nvSpPr>
         <p:spPr>
           <a:xfrm>
-            <a:off x="7644383" y="18106643"/>
+            <a:off x="7644383" y="18817481"/>
             <a:ext cx="6638544" cy="566928"/>
           </a:xfrm>
           <a:prstGeom prst="rect">
@@ -4585,7 +4658,7 @@
         </p:blipFill>
         <p:spPr>
           <a:xfrm>
-            <a:off x="7644383" y="18783299"/>
+            <a:off x="7644383" y="19494137"/>
             <a:ext cx="6638544" cy="5669280"/>
           </a:xfrm>
           <a:prstGeom prst="rect">
@@ -4601,7 +4674,7 @@
         </p:nvSpPr>
         <p:spPr>
           <a:xfrm>
-            <a:off x="7644383" y="24635459"/>
+            <a:off x="7644383" y="25346297"/>
             <a:ext cx="6638544" cy="802277"/>
           </a:xfrm>
           <a:prstGeom prst="rect">
@@ -4645,7 +4718,7 @@
         </p:nvSpPr>
         <p:spPr>
           <a:xfrm>
-            <a:off x="7644383" y="25620617"/>
+            <a:off x="7644383" y="26331454"/>
             <a:ext cx="6638544" cy="713232"/>
           </a:xfrm>
           <a:prstGeom prst="rect">
@@ -4698,7 +4771,7 @@
         </p:nvSpPr>
         <p:spPr>
           <a:xfrm>
-            <a:off x="7644383" y="26443577"/>
+            <a:off x="7644383" y="27154414"/>
             <a:ext cx="4992624" cy="1806810"/>
           </a:xfrm>
           <a:prstGeom prst="rect">
@@ -4767,7 +4840,7 @@
         </p:blipFill>
         <p:spPr>
           <a:xfrm>
-            <a:off x="12819888" y="26461865"/>
+            <a:off x="12819888" y="27172702"/>
             <a:ext cx="1417320" cy="1417320"/>
           </a:xfrm>
           <a:prstGeom prst="rect">

--- a/poster/FL_Poster_Chevuri_Aledhari.pptx
+++ b/poster/FL_Poster_Chevuri_Aledhari.pptx
@@ -3135,15 +3135,15 @@
               </a:ext>
             </a:extLst>
           </a:blip>
-          <a:srcRect l="11131" t="24840" r="21220" b="28651"/>
+          <a:srcRect l="11131" t="24840" r="21220" b="45394"/>
           <a:stretch>
             <a:fillRect/>
           </a:stretch>
         </p:blipFill>
         <p:spPr>
           <a:xfrm>
-            <a:off x="17649372" y="139204"/>
-            <a:ext cx="3643086" cy="2504624"/>
+            <a:off x="17647920" y="694944"/>
+            <a:ext cx="3639312" cy="1609344"/>
           </a:xfrm>
           <a:prstGeom prst="rect">
             <a:avLst/>
@@ -3185,7 +3185,7 @@
               <a:buNone/>
             </a:pPr>
             <a:r>
-              <a:rPr lang="en-US" sz="4400" b="1" dirty="0">
+              <a:rPr lang="en-US" sz="4200" b="1" dirty="0">
                 <a:solidFill>
                   <a:schemeClr val="bg1"/>
                 </a:solidFill>
@@ -3212,7 +3212,7 @@
               <a:buNone/>
             </a:pPr>
             <a:r>
-              <a:rPr lang="en-US" sz="3000" b="1" dirty="0">
+              <a:rPr lang="en-US" sz="2800" b="1" dirty="0">
                 <a:solidFill>
                   <a:schemeClr val="bg1"/>
                 </a:solidFill>
@@ -3239,7 +3239,7 @@
               <a:buNone/>
             </a:pPr>
             <a:r>
-              <a:rPr lang="en-US" sz="3000" b="1" dirty="0">
+              <a:rPr lang="en-US" sz="2400" b="1" dirty="0">
                 <a:solidFill>
                   <a:schemeClr val="bg1"/>
                 </a:solidFill>
@@ -3247,7 +3247,34 @@
                 <a:latin typeface="+mn-lt"/>
                 <a:ea typeface="Arial" panose="020B0604020202020204" pitchFamily="34" charset="0"/>
               </a:rPr>
-              <a:t>University of North Texas</a:t>
+              <a:t>Data Science Department</a:t>
+            </a:r>
+            <a:endParaRPr lang="en-US" dirty="0">
+              <a:solidFill>
+                <a:schemeClr val="bg1"/>
+              </a:solidFill>
+              <a:effectLst/>
+              <a:latin typeface="Arial" panose="020B0604020202020204" pitchFamily="34" charset="0"/>
+              <a:ea typeface="Arial" panose="020B0604020202020204" pitchFamily="34" charset="0"/>
+            </a:endParaRPr>
+          </a:p>
+          <a:p>
+            <a:pPr marL="12700" marR="0">
+              <a:spcBef>
+                <a:spcPts val="260"/>
+              </a:spcBef>
+              <a:buNone/>
+            </a:pPr>
+            <a:r>
+              <a:rPr lang="en-US" sz="2400" b="1" dirty="0">
+                <a:solidFill>
+                  <a:schemeClr val="bg1"/>
+                </a:solidFill>
+                <a:effectLst/>
+                <a:latin typeface="+mn-lt"/>
+                <a:ea typeface="Arial" panose="020B0604020202020204" pitchFamily="34" charset="0"/>
+              </a:rPr>
+              <a:t>College of Artificial Intelligence and Advanced Analytics  ·  University of North Texas</a:t>
             </a:r>
             <a:endParaRPr lang="en-US" dirty="0">
               <a:solidFill>
@@ -3419,7 +3446,7 @@
               <a:buChar char="•"/>
             </a:pPr>
             <a:r>
-              <a:rPr sz="1900">
+              <a:rPr sz="1900" i="0">
                 <a:solidFill>
                   <a:srgbClr val="1A1A1A"/>
                 </a:solidFill>
@@ -3440,7 +3467,7 @@
               <a:buChar char="•"/>
             </a:pPr>
             <a:r>
-              <a:rPr sz="1900">
+              <a:rPr sz="1900" i="0">
                 <a:solidFill>
                   <a:srgbClr val="1A1A1A"/>
                 </a:solidFill>
@@ -3461,7 +3488,7 @@
               <a:buChar char="•"/>
             </a:pPr>
             <a:r>
-              <a:rPr sz="1900">
+              <a:rPr sz="1900" i="0">
                 <a:solidFill>
                   <a:srgbClr val="1A1A1A"/>
                 </a:solidFill>
@@ -3482,7 +3509,7 @@
               <a:buChar char="•"/>
             </a:pPr>
             <a:r>
-              <a:rPr sz="1900">
+              <a:rPr sz="1900" i="0">
                 <a:solidFill>
                   <a:srgbClr val="1A1A1A"/>
                 </a:solidFill>
@@ -3503,7 +3530,7 @@
               <a:buChar char="•"/>
             </a:pPr>
             <a:r>
-              <a:rPr sz="1900">
+              <a:rPr sz="1900" i="0">
                 <a:solidFill>
                   <a:srgbClr val="1A1A1A"/>
                 </a:solidFill>
@@ -3524,7 +3551,7 @@
               <a:buChar char="•"/>
             </a:pPr>
             <a:r>
-              <a:rPr sz="1900">
+              <a:rPr sz="1900" i="0">
                 <a:solidFill>
                   <a:srgbClr val="1A1A1A"/>
                 </a:solidFill>
@@ -3543,7 +3570,7 @@
         </p:nvSpPr>
         <p:spPr>
           <a:xfrm>
-            <a:off x="548640" y="9259823"/>
+            <a:off x="548640" y="9551996"/>
             <a:ext cx="6638544" cy="713232"/>
           </a:xfrm>
           <a:prstGeom prst="rect">
@@ -3596,7 +3623,7 @@
         </p:nvSpPr>
         <p:spPr>
           <a:xfrm>
-            <a:off x="548640" y="10082783"/>
+            <a:off x="548640" y="10374956"/>
             <a:ext cx="6638544" cy="802277"/>
           </a:xfrm>
           <a:prstGeom prst="rect">
@@ -3621,7 +3648,7 @@
               <a:buChar char="•"/>
             </a:pPr>
             <a:r>
-              <a:rPr sz="1900">
+              <a:rPr sz="1900" i="0">
                 <a:solidFill>
                   <a:srgbClr val="1A1A1A"/>
                 </a:solidFill>
@@ -3648,8 +3675,8 @@
         </p:blipFill>
         <p:spPr>
           <a:xfrm>
-            <a:off x="548640" y="11067941"/>
-            <a:ext cx="6638544" cy="2606040"/>
+            <a:off x="548640" y="11652286"/>
+            <a:ext cx="6638544" cy="2807208"/>
           </a:xfrm>
           <a:prstGeom prst="rect">
             <a:avLst/>
@@ -3664,7 +3691,7 @@
         </p:nvSpPr>
         <p:spPr>
           <a:xfrm>
-            <a:off x="548640" y="13856861"/>
+            <a:off x="548640" y="14934546"/>
             <a:ext cx="6638544" cy="713232"/>
           </a:xfrm>
           <a:prstGeom prst="rect">
@@ -3717,7 +3744,7 @@
         </p:nvSpPr>
         <p:spPr>
           <a:xfrm>
-            <a:off x="548640" y="14679821"/>
+            <a:off x="548640" y="15757506"/>
             <a:ext cx="6638544" cy="2517648"/>
           </a:xfrm>
           <a:prstGeom prst="rect">
@@ -3742,7 +3769,7 @@
               <a:buChar char="•"/>
             </a:pPr>
             <a:r>
-              <a:rPr sz="1900">
+              <a:rPr sz="1900" i="0">
                 <a:solidFill>
                   <a:srgbClr val="1A1A1A"/>
                 </a:solidFill>
@@ -3763,7 +3790,7 @@
               <a:buChar char="•"/>
             </a:pPr>
             <a:r>
-              <a:rPr sz="1900">
+              <a:rPr sz="1900" i="0">
                 <a:solidFill>
                   <a:srgbClr val="1A1A1A"/>
                 </a:solidFill>
@@ -3784,7 +3811,7 @@
               <a:buChar char="•"/>
             </a:pPr>
             <a:r>
-              <a:rPr sz="1900">
+              <a:rPr sz="1900" i="0">
                 <a:solidFill>
                   <a:srgbClr val="1A1A1A"/>
                 </a:solidFill>
@@ -3811,8 +3838,8 @@
         </p:blipFill>
         <p:spPr>
           <a:xfrm>
-            <a:off x="548640" y="17380349"/>
-            <a:ext cx="6638544" cy="3977639"/>
+            <a:off x="548640" y="18750207"/>
+            <a:ext cx="6638544" cy="5120640"/>
           </a:xfrm>
           <a:prstGeom prst="rect">
             <a:avLst/>
@@ -3827,7 +3854,7 @@
         </p:nvSpPr>
         <p:spPr>
           <a:xfrm>
-            <a:off x="548640" y="21540869"/>
+            <a:off x="548640" y="24345900"/>
             <a:ext cx="6638544" cy="802277"/>
           </a:xfrm>
           <a:prstGeom prst="rect">
@@ -3852,7 +3879,7 @@
               <a:buChar char="•"/>
             </a:pPr>
             <a:r>
-              <a:rPr sz="1900">
+              <a:rPr sz="1900" i="0">
                 <a:solidFill>
                   <a:srgbClr val="1A1A1A"/>
                 </a:solidFill>
@@ -3871,7 +3898,7 @@
         </p:nvSpPr>
         <p:spPr>
           <a:xfrm>
-            <a:off x="548640" y="22526026"/>
+            <a:off x="548640" y="25623229"/>
             <a:ext cx="6638544" cy="713232"/>
           </a:xfrm>
           <a:prstGeom prst="rect">
@@ -3911,7 +3938,7 @@
                 </a:solidFill>
                 <a:latin typeface="Calibri"/>
               </a:rPr>
-              <a:t>Methods: seven merge rules and one control</a:t>
+              <a:t>References</a:t>
             </a:r>
           </a:p>
         </p:txBody>
@@ -3924,147 +3951,8 @@
         </p:nvSpPr>
         <p:spPr>
           <a:xfrm>
-            <a:off x="548640" y="23348986"/>
-            <a:ext cx="6638544" cy="2811344"/>
-          </a:xfrm>
-          <a:prstGeom prst="rect">
-            <a:avLst/>
-          </a:prstGeom>
-          <a:noFill/>
-        </p:spPr>
-        <p:txBody>
-          <a:bodyPr wrap="square" lIns="54864" rIns="0" tIns="0" bIns="0">
-            <a:spAutoFit/>
-          </a:bodyPr>
-          <a:lstStyle/>
-          <a:p>
-            <a:pPr indent="-215900" marL="215900">
-              <a:spcBef>
-                <a:spcPts val="0"/>
-              </a:spcBef>
-              <a:spcAft>
-                <a:spcPts val="800"/>
-              </a:spcAft>
-              <a:buFont typeface="Arial"/>
-              <a:buChar char="•"/>
-            </a:pPr>
-            <a:r>
-              <a:rPr sz="1900">
-                <a:solidFill>
-                  <a:srgbClr val="1A1A1A"/>
-                </a:solidFill>
-                <a:latin typeface="Calibri"/>
-              </a:rPr>
-              <a:t>Seven merge rules run head to head: FedAvg, FedProx, CS-Agg, Krum, trimmed mean, coordinate-wise median, and an unweighted mean.</a:t>
-            </a:r>
-          </a:p>
-          <a:p>
-            <a:pPr indent="-215900" marL="215900">
-              <a:spcBef>
-                <a:spcPts val="0"/>
-              </a:spcBef>
-              <a:spcAft>
-                <a:spcPts val="800"/>
-              </a:spcAft>
-              <a:buFont typeface="Arial"/>
-              <a:buChar char="•"/>
-            </a:pPr>
-            <a:r>
-              <a:rPr sz="1900">
-                <a:solidFill>
-                  <a:srgbClr val="1A1A1A"/>
-                </a:solidFill>
-                <a:latin typeface="Calibri"/>
-              </a:rPr>
-              <a:t>The unweighted mean is our control: it uses no robust statistic and differs from FedAvg only in ignoring how much data each site holds.</a:t>
-            </a:r>
-          </a:p>
-          <a:p>
-            <a:pPr indent="-215900" marL="215900">
-              <a:spcBef>
-                <a:spcPts val="0"/>
-              </a:spcBef>
-              <a:spcAft>
-                <a:spcPts val="800"/>
-              </a:spcAft>
-              <a:buFont typeface="Arial"/>
-              <a:buChar char="•"/>
-            </a:pPr>
-            <a:r>
-              <a:rPr sz="1900">
-                <a:solidFill>
-                  <a:srgbClr val="1A1A1A"/>
-                </a:solidFill>
-                <a:latin typeface="Calibri"/>
-              </a:rPr>
-              <a:t>Anything the control gains over FedAvg is therefore weighting alone, which is what isolates the effect.</a:t>
-            </a:r>
-          </a:p>
-        </p:txBody>
-      </p:sp>
-      <p:sp>
-        <p:nvSpPr>
-          <p:cNvPr id="28" name="Rectangle 27"/>
-          <p:cNvSpPr/>
-          <p:nvPr/>
-        </p:nvSpPr>
-        <p:spPr>
-          <a:xfrm>
-            <a:off x="548640" y="26343210"/>
-            <a:ext cx="6638544" cy="713232"/>
-          </a:xfrm>
-          <a:prstGeom prst="rect">
-            <a:avLst/>
-          </a:prstGeom>
-          <a:solidFill>
-            <a:srgbClr val="007439"/>
-          </a:solidFill>
-          <a:ln>
-            <a:noFill/>
-          </a:ln>
-          <a:effectLst/>
-        </p:spPr>
-        <p:style>
-          <a:lnRef idx="1">
-            <a:schemeClr val="accent1"/>
-          </a:lnRef>
-          <a:fillRef idx="3">
-            <a:schemeClr val="accent1"/>
-          </a:fillRef>
-          <a:effectRef idx="2">
-            <a:schemeClr val="accent1"/>
-          </a:effectRef>
-          <a:fontRef idx="minor">
-            <a:schemeClr val="lt1"/>
-          </a:fontRef>
-        </p:style>
-        <p:txBody>
-          <a:bodyPr rtlCol="0" anchor="ctr" wrap="square" lIns="146304" rIns="146304" tIns="0" bIns="0"/>
-          <a:lstStyle/>
-          <a:p>
-            <a:pPr algn="l"/>
-            <a:r>
-              <a:rPr sz="2500" b="1">
-                <a:solidFill>
-                  <a:srgbClr val="FFFFFF"/>
-                </a:solidFill>
-                <a:latin typeface="Calibri"/>
-              </a:rPr>
-              <a:t>References</a:t>
-            </a:r>
-          </a:p>
-        </p:txBody>
-      </p:sp>
-      <p:sp>
-        <p:nvSpPr>
-          <p:cNvPr id="29" name="TextBox 28"/>
-          <p:cNvSpPr txBox="1"/>
-          <p:nvPr/>
-        </p:nvSpPr>
-        <p:spPr>
-          <a:xfrm>
-            <a:off x="548640" y="27166170"/>
-            <a:ext cx="6638544" cy="3552661"/>
+            <a:off x="548640" y="26446189"/>
+            <a:ext cx="6638544" cy="3985477"/>
           </a:xfrm>
           <a:prstGeom prst="rect">
             <a:avLst/>
@@ -4086,7 +3974,7 @@
               </a:spcAft>
             </a:pPr>
             <a:r>
-              <a:rPr sz="1600">
+              <a:rPr sz="1700" i="0">
                 <a:solidFill>
                   <a:srgbClr val="1A1A1A"/>
                 </a:solidFill>
@@ -4105,7 +3993,7 @@
               </a:spcAft>
             </a:pPr>
             <a:r>
-              <a:rPr sz="1600">
+              <a:rPr sz="1700" i="0">
                 <a:solidFill>
                   <a:srgbClr val="1A1A1A"/>
                 </a:solidFill>
@@ -4124,7 +4012,7 @@
               </a:spcAft>
             </a:pPr>
             <a:r>
-              <a:rPr sz="1600">
+              <a:rPr sz="1700" i="0">
                 <a:solidFill>
                   <a:srgbClr val="1A1A1A"/>
                 </a:solidFill>
@@ -4143,7 +4031,7 @@
               </a:spcAft>
             </a:pPr>
             <a:r>
-              <a:rPr sz="1600">
+              <a:rPr sz="1700" i="0">
                 <a:solidFill>
                   <a:srgbClr val="1A1A1A"/>
                 </a:solidFill>
@@ -4162,7 +4050,7 @@
               </a:spcAft>
             </a:pPr>
             <a:r>
-              <a:rPr sz="1600">
+              <a:rPr sz="1700" i="0">
                 <a:solidFill>
                   <a:srgbClr val="1A1A1A"/>
                 </a:solidFill>
@@ -4181,7 +4069,7 @@
               </a:spcAft>
             </a:pPr>
             <a:r>
-              <a:rPr sz="1600">
+              <a:rPr sz="1700" i="0">
                 <a:solidFill>
                   <a:srgbClr val="1A1A1A"/>
                 </a:solidFill>
@@ -4194,7 +4082,7 @@
       </p:sp>
       <p:sp>
         <p:nvSpPr>
-          <p:cNvPr id="30" name="Rectangle 29"/>
+          <p:cNvPr id="28" name="Rectangle 27"/>
           <p:cNvSpPr/>
           <p:nvPr/>
         </p:nvSpPr>
@@ -4240,21 +4128,21 @@
                 </a:solidFill>
                 <a:latin typeface="Calibri"/>
               </a:rPr>
-              <a:t>Methods, continued</a:t>
-            </a:r>
-          </a:p>
-        </p:txBody>
-      </p:sp>
-      <p:sp>
-        <p:nvSpPr>
-          <p:cNvPr id="31" name="TextBox 30"/>
+              <a:t>Methods: seven merge rules and one control</a:t>
+            </a:r>
+          </a:p>
+        </p:txBody>
+      </p:sp>
+      <p:sp>
+        <p:nvSpPr>
+          <p:cNvPr id="29" name="TextBox 28"/>
           <p:cNvSpPr txBox="1"/>
           <p:nvPr/>
         </p:nvSpPr>
         <p:spPr>
           <a:xfrm>
             <a:off x="7644383" y="4133088"/>
-            <a:ext cx="6638544" cy="3645625"/>
+            <a:ext cx="6638544" cy="3522181"/>
           </a:xfrm>
           <a:prstGeom prst="rect">
             <a:avLst/>
@@ -4278,13 +4166,13 @@
               <a:buChar char="•"/>
             </a:pPr>
             <a:r>
-              <a:rPr sz="1900">
+              <a:rPr sz="1900" i="0">
                 <a:solidFill>
                   <a:srgbClr val="1A1A1A"/>
                 </a:solidFill>
                 <a:latin typeface="Calibri"/>
               </a:rPr>
-              <a:t>Labels are flipped at 20% of sites, across 0 to 30% of their records.</a:t>
+              <a:t>Seven merge rules run head to head: FedAvg, FedProx, CS-Agg, Krum, trimmed mean, coordinate-wise median, and an unweighted mean.</a:t>
             </a:r>
           </a:p>
           <a:p>
@@ -4299,13 +4187,13 @@
               <a:buChar char="•"/>
             </a:pPr>
             <a:r>
-              <a:rPr sz="1900">
+              <a:rPr sz="1900" i="0">
                 <a:solidFill>
                   <a:srgbClr val="1A1A1A"/>
                 </a:solidFill>
                 <a:latin typeface="Calibri"/>
               </a:rPr>
-              <a:t>On BRFSS we flip them only the way real people err, reporting no depression when they have it.</a:t>
+              <a:t>The unweighted mean is our control: it uses no robust statistic and differs from FedAvg only in ignoring how much data each site holds.</a:t>
             </a:r>
           </a:p>
           <a:p>
@@ -4320,13 +4208,13 @@
               <a:buChar char="•"/>
             </a:pPr>
             <a:r>
-              <a:rPr sz="1900">
+              <a:rPr sz="1900" i="0">
                 <a:solidFill>
                   <a:srgbClr val="1A1A1A"/>
                 </a:solidFill>
                 <a:latin typeface="Calibri"/>
               </a:rPr>
-              <a:t>624 conditions cover every combination of rule, dataset, split, noise level and random seed.</a:t>
+              <a:t>Anything the control gains over FedAvg is therefore weighting alone, which is what isolates the effect.</a:t>
             </a:r>
           </a:p>
           <a:p>
@@ -4341,47 +4229,436 @@
               <a:buChar char="•"/>
             </a:pPr>
             <a:r>
-              <a:rPr sz="1900">
+              <a:rPr sz="1900" i="0">
                 <a:solidFill>
                   <a:srgbClr val="1A1A1A"/>
                 </a:solidFill>
                 <a:latin typeface="Calibri"/>
               </a:rPr>
-              <a:t>Each runs 50 rounds, scored by AUC-ROC on a clean held-out test set the sites never see.</a:t>
-            </a:r>
-          </a:p>
-          <a:p>
-            <a:pPr indent="-215900" marL="215900">
-              <a:spcBef>
-                <a:spcPts val="0"/>
-              </a:spcBef>
-              <a:spcAft>
-                <a:spcPts val="800"/>
-              </a:spcAft>
-              <a:buFont typeface="Arial"/>
-              <a:buChar char="•"/>
-            </a:pPr>
-            <a:r>
-              <a:rPr sz="1900">
-                <a:solidFill>
-                  <a:srgbClr val="1A1A1A"/>
-                </a:solidFill>
-                <a:latin typeface="Calibri"/>
-              </a:rPr>
-              <a:t>Differences are tested with Wilcoxon signed-rank, Holm-corrected within each of three comparison families.</a:t>
-            </a:r>
-          </a:p>
-        </p:txBody>
-      </p:sp>
-      <p:sp>
-        <p:nvSpPr>
-          <p:cNvPr id="32" name="Rectangle 31"/>
+              <a:t>On BRFSS we corrupt labels only the way real people err, reporting no depression when they have it.</a:t>
+            </a:r>
+          </a:p>
+        </p:txBody>
+      </p:sp>
+      <p:graphicFrame>
+        <p:nvGraphicFramePr>
+          <p:cNvPr id="30" name="Table 29"/>
+          <p:cNvGraphicFramePr>
+            <a:graphicFrameLocks noGrp="1"/>
+          </p:cNvGraphicFramePr>
+          <p:nvPr/>
+        </p:nvGraphicFramePr>
+        <p:xfrm>
+          <a:off x="7644383" y="7964587"/>
+          <a:ext cx="6638544" cy="3291840"/>
+        </p:xfrm>
+        <a:graphic>
+          <a:graphicData uri="http://schemas.openxmlformats.org/drawingml/2006/table">
+            <a:tbl>
+              <a:tblPr>
+                <a:tableStyleId>{2D5ABB26-0587-4C30-8999-92F81FD0307C}</a:tableStyleId>
+              </a:tblPr>
+              <a:tblGrid>
+                <a:gridCol w="2011680"/>
+                <a:gridCol w="4626864"/>
+              </a:tblGrid>
+              <a:tr h="603504">
+                <a:tc>
+                  <a:txBody>
+                    <a:bodyPr wrap="square"/>
+                    <a:lstStyle/>
+                    <a:p>
+                      <a:pPr algn="l"/>
+                      <a:r>
+                        <a:rPr sz="1500" b="1">
+                          <a:solidFill>
+                            <a:srgbClr val="FFFFFF"/>
+                          </a:solidFill>
+                          <a:latin typeface="Calibri"/>
+                        </a:rPr>
+                        <a:t>What we varied</a:t>
+                      </a:r>
+                    </a:p>
+                  </a:txBody>
+                  <a:tcPr marL="91440" marR="91440" marT="18288" marB="18288" anchor="ctr">
+                    <a:solidFill>
+                      <a:srgbClr val="007439"/>
+                    </a:solidFill>
+                  </a:tcPr>
+                </a:tc>
+                <a:tc>
+                  <a:txBody>
+                    <a:bodyPr wrap="square"/>
+                    <a:lstStyle/>
+                    <a:p>
+                      <a:pPr algn="l"/>
+                      <a:r>
+                        <a:rPr sz="1500" b="1">
+                          <a:solidFill>
+                            <a:srgbClr val="FFFFFF"/>
+                          </a:solidFill>
+                          <a:latin typeface="Calibri"/>
+                        </a:rPr>
+                        <a:t>Levels tested</a:t>
+                      </a:r>
+                    </a:p>
+                  </a:txBody>
+                  <a:tcPr marL="91440" marR="91440" marT="18288" marB="18288" anchor="ctr">
+                    <a:solidFill>
+                      <a:srgbClr val="007439"/>
+                    </a:solidFill>
+                  </a:tcPr>
+                </a:tc>
+              </a:tr>
+              <a:tr h="384048">
+                <a:tc>
+                  <a:txBody>
+                    <a:bodyPr wrap="square"/>
+                    <a:lstStyle/>
+                    <a:p>
+                      <a:pPr algn="l"/>
+                      <a:r>
+                        <a:rPr sz="1500" b="0">
+                          <a:solidFill>
+                            <a:srgbClr val="1A1A1A"/>
+                          </a:solidFill>
+                          <a:latin typeface="Calibri"/>
+                        </a:rPr>
+                        <a:t>Merge rules</a:t>
+                      </a:r>
+                    </a:p>
+                  </a:txBody>
+                  <a:tcPr marL="91440" marR="91440" marT="18288" marB="18288" anchor="ctr">
+                    <a:solidFill>
+                      <a:srgbClr val="FFFFFF"/>
+                    </a:solidFill>
+                  </a:tcPr>
+                </a:tc>
+                <a:tc>
+                  <a:txBody>
+                    <a:bodyPr wrap="square"/>
+                    <a:lstStyle/>
+                    <a:p>
+                      <a:pPr algn="l"/>
+                      <a:r>
+                        <a:rPr sz="1500" b="0">
+                          <a:solidFill>
+                            <a:srgbClr val="1A1A1A"/>
+                          </a:solidFill>
+                          <a:latin typeface="Calibri"/>
+                        </a:rPr>
+                        <a:t>7, including the unweighted-mean control</a:t>
+                      </a:r>
+                    </a:p>
+                  </a:txBody>
+                  <a:tcPr marL="91440" marR="91440" marT="18288" marB="18288" anchor="ctr">
+                    <a:solidFill>
+                      <a:srgbClr val="FFFFFF"/>
+                    </a:solidFill>
+                  </a:tcPr>
+                </a:tc>
+              </a:tr>
+              <a:tr h="384048">
+                <a:tc>
+                  <a:txBody>
+                    <a:bodyPr wrap="square"/>
+                    <a:lstStyle/>
+                    <a:p>
+                      <a:pPr algn="l"/>
+                      <a:r>
+                        <a:rPr sz="1500" b="0">
+                          <a:solidFill>
+                            <a:srgbClr val="1A1A1A"/>
+                          </a:solidFill>
+                          <a:latin typeface="Calibri"/>
+                        </a:rPr>
+                        <a:t>Datasets</a:t>
+                      </a:r>
+                    </a:p>
+                  </a:txBody>
+                  <a:tcPr marL="91440" marR="91440" marT="18288" marB="18288" anchor="ctr">
+                    <a:solidFill>
+                      <a:srgbClr val="E2F0D9"/>
+                    </a:solidFill>
+                  </a:tcPr>
+                </a:tc>
+                <a:tc>
+                  <a:txBody>
+                    <a:bodyPr wrap="square"/>
+                    <a:lstStyle/>
+                    <a:p>
+                      <a:pPr algn="l"/>
+                      <a:r>
+                        <a:rPr sz="1500" b="0">
+                          <a:solidFill>
+                            <a:srgbClr val="1A1A1A"/>
+                          </a:solidFill>
+                          <a:latin typeface="Calibri"/>
+                        </a:rPr>
+                        <a:t>BRFSS 2023 and Breast Cancer Wisconsin</a:t>
+                      </a:r>
+                    </a:p>
+                  </a:txBody>
+                  <a:tcPr marL="91440" marR="91440" marT="18288" marB="18288" anchor="ctr">
+                    <a:solidFill>
+                      <a:srgbClr val="E2F0D9"/>
+                    </a:solidFill>
+                  </a:tcPr>
+                </a:tc>
+              </a:tr>
+              <a:tr h="384048">
+                <a:tc>
+                  <a:txBody>
+                    <a:bodyPr wrap="square"/>
+                    <a:lstStyle/>
+                    <a:p>
+                      <a:pPr algn="l"/>
+                      <a:r>
+                        <a:rPr sz="1500" b="0">
+                          <a:solidFill>
+                            <a:srgbClr val="1A1A1A"/>
+                          </a:solidFill>
+                          <a:latin typeface="Calibri"/>
+                        </a:rPr>
+                        <a:t>Split skew, alpha</a:t>
+                      </a:r>
+                    </a:p>
+                  </a:txBody>
+                  <a:tcPr marL="91440" marR="91440" marT="18288" marB="18288" anchor="ctr">
+                    <a:solidFill>
+                      <a:srgbClr val="FFFFFF"/>
+                    </a:solidFill>
+                  </a:tcPr>
+                </a:tc>
+                <a:tc>
+                  <a:txBody>
+                    <a:bodyPr wrap="square"/>
+                    <a:lstStyle/>
+                    <a:p>
+                      <a:pPr algn="l"/>
+                      <a:r>
+                        <a:rPr sz="1500" b="0">
+                          <a:solidFill>
+                            <a:srgbClr val="1A1A1A"/>
+                          </a:solidFill>
+                          <a:latin typeface="Calibri"/>
+                        </a:rPr>
+                        <a:t>0.1, 0.5, 1.0 — lower is more lopsided</a:t>
+                      </a:r>
+                    </a:p>
+                  </a:txBody>
+                  <a:tcPr marL="91440" marR="91440" marT="18288" marB="18288" anchor="ctr">
+                    <a:solidFill>
+                      <a:srgbClr val="FFFFFF"/>
+                    </a:solidFill>
+                  </a:tcPr>
+                </a:tc>
+              </a:tr>
+              <a:tr h="384048">
+                <a:tc>
+                  <a:txBody>
+                    <a:bodyPr wrap="square"/>
+                    <a:lstStyle/>
+                    <a:p>
+                      <a:pPr algn="l"/>
+                      <a:r>
+                        <a:rPr sz="1500" b="0">
+                          <a:solidFill>
+                            <a:srgbClr val="1A1A1A"/>
+                          </a:solidFill>
+                          <a:latin typeface="Calibri"/>
+                        </a:rPr>
+                        <a:t>Label noise</a:t>
+                      </a:r>
+                    </a:p>
+                  </a:txBody>
+                  <a:tcPr marL="91440" marR="91440" marT="18288" marB="18288" anchor="ctr">
+                    <a:solidFill>
+                      <a:srgbClr val="E2F0D9"/>
+                    </a:solidFill>
+                  </a:tcPr>
+                </a:tc>
+                <a:tc>
+                  <a:txBody>
+                    <a:bodyPr wrap="square"/>
+                    <a:lstStyle/>
+                    <a:p>
+                      <a:pPr algn="l"/>
+                      <a:r>
+                        <a:rPr sz="1500" b="0">
+                          <a:solidFill>
+                            <a:srgbClr val="1A1A1A"/>
+                          </a:solidFill>
+                          <a:latin typeface="Calibri"/>
+                        </a:rPr>
+                        <a:t>0, 10, 20, 30% of records, at 20% of sites</a:t>
+                      </a:r>
+                    </a:p>
+                  </a:txBody>
+                  <a:tcPr marL="91440" marR="91440" marT="18288" marB="18288" anchor="ctr">
+                    <a:solidFill>
+                      <a:srgbClr val="E2F0D9"/>
+                    </a:solidFill>
+                  </a:tcPr>
+                </a:tc>
+              </a:tr>
+              <a:tr h="384048">
+                <a:tc>
+                  <a:txBody>
+                    <a:bodyPr wrap="square"/>
+                    <a:lstStyle/>
+                    <a:p>
+                      <a:pPr algn="l"/>
+                      <a:r>
+                        <a:rPr sz="1500" b="0">
+                          <a:solidFill>
+                            <a:srgbClr val="1A1A1A"/>
+                          </a:solidFill>
+                          <a:latin typeface="Calibri"/>
+                        </a:rPr>
+                        <a:t>Random seeds</a:t>
+                      </a:r>
+                    </a:p>
+                  </a:txBody>
+                  <a:tcPr marL="91440" marR="91440" marT="18288" marB="18288" anchor="ctr">
+                    <a:solidFill>
+                      <a:srgbClr val="FFFFFF"/>
+                    </a:solidFill>
+                  </a:tcPr>
+                </a:tc>
+                <a:tc>
+                  <a:txBody>
+                    <a:bodyPr wrap="square"/>
+                    <a:lstStyle/>
+                    <a:p>
+                      <a:pPr algn="l"/>
+                      <a:r>
+                        <a:rPr sz="1500" b="0">
+                          <a:solidFill>
+                            <a:srgbClr val="1A1A1A"/>
+                          </a:solidFill>
+                          <a:latin typeface="Calibri"/>
+                        </a:rPr>
+                        <a:t>42, 123, 456</a:t>
+                      </a:r>
+                    </a:p>
+                  </a:txBody>
+                  <a:tcPr marL="91440" marR="91440" marT="18288" marB="18288" anchor="ctr">
+                    <a:solidFill>
+                      <a:srgbClr val="FFFFFF"/>
+                    </a:solidFill>
+                  </a:tcPr>
+                </a:tc>
+              </a:tr>
+              <a:tr h="384048">
+                <a:tc>
+                  <a:txBody>
+                    <a:bodyPr wrap="square"/>
+                    <a:lstStyle/>
+                    <a:p>
+                      <a:pPr algn="l"/>
+                      <a:r>
+                        <a:rPr sz="1500" b="0">
+                          <a:solidFill>
+                            <a:srgbClr val="1A1A1A"/>
+                          </a:solidFill>
+                          <a:latin typeface="Calibri"/>
+                        </a:rPr>
+                        <a:t>Every run</a:t>
+                      </a:r>
+                    </a:p>
+                  </a:txBody>
+                  <a:tcPr marL="91440" marR="91440" marT="18288" marB="18288" anchor="ctr">
+                    <a:solidFill>
+                      <a:srgbClr val="E2F0D9"/>
+                    </a:solidFill>
+                  </a:tcPr>
+                </a:tc>
+                <a:tc>
+                  <a:txBody>
+                    <a:bodyPr wrap="square"/>
+                    <a:lstStyle/>
+                    <a:p>
+                      <a:pPr algn="l"/>
+                      <a:r>
+                        <a:rPr sz="1500" b="0">
+                          <a:solidFill>
+                            <a:srgbClr val="1A1A1A"/>
+                          </a:solidFill>
+                          <a:latin typeface="Calibri"/>
+                        </a:rPr>
+                        <a:t>20 sites, 50 rounds, scored by AUC-ROC</a:t>
+                      </a:r>
+                    </a:p>
+                  </a:txBody>
+                  <a:tcPr marL="91440" marR="91440" marT="18288" marB="18288" anchor="ctr">
+                    <a:solidFill>
+                      <a:srgbClr val="E2F0D9"/>
+                    </a:solidFill>
+                  </a:tcPr>
+                </a:tc>
+              </a:tr>
+              <a:tr h="384048">
+                <a:tc>
+                  <a:txBody>
+                    <a:bodyPr wrap="square"/>
+                    <a:lstStyle/>
+                    <a:p>
+                      <a:pPr algn="l"/>
+                      <a:r>
+                        <a:rPr sz="1500" b="0">
+                          <a:solidFill>
+                            <a:srgbClr val="1A1A1A"/>
+                          </a:solidFill>
+                          <a:latin typeface="Calibri"/>
+                        </a:rPr>
+                        <a:t>Total</a:t>
+                      </a:r>
+                    </a:p>
+                  </a:txBody>
+                  <a:tcPr marL="91440" marR="91440" marT="18288" marB="18288" anchor="ctr">
+                    <a:solidFill>
+                      <a:srgbClr val="FFFFFF"/>
+                    </a:solidFill>
+                  </a:tcPr>
+                </a:tc>
+                <a:tc>
+                  <a:txBody>
+                    <a:bodyPr wrap="square"/>
+                    <a:lstStyle/>
+                    <a:p>
+                      <a:pPr algn="l"/>
+                      <a:r>
+                        <a:rPr sz="1500" b="0">
+                          <a:solidFill>
+                            <a:srgbClr val="1A1A1A"/>
+                          </a:solidFill>
+                          <a:latin typeface="Calibri"/>
+                        </a:rPr>
+                        <a:t>624 completed runs</a:t>
+                      </a:r>
+                    </a:p>
+                  </a:txBody>
+                  <a:tcPr marL="91440" marR="91440" marT="18288" marB="18288" anchor="ctr">
+                    <a:solidFill>
+                      <a:srgbClr val="FFFFFF"/>
+                    </a:solidFill>
+                  </a:tcPr>
+                </a:tc>
+              </a:tr>
+            </a:tbl>
+          </a:graphicData>
+        </a:graphic>
+      </p:graphicFrame>
+      <p:sp>
+        <p:nvSpPr>
+          <p:cNvPr id="31" name="Rectangle 30"/>
           <p:cNvSpPr/>
           <p:nvPr/>
         </p:nvSpPr>
         <p:spPr>
           <a:xfrm>
-            <a:off x="7644383" y="7961593"/>
+            <a:off x="7644383" y="11565744"/>
             <a:ext cx="6638544" cy="713232"/>
           </a:xfrm>
           <a:prstGeom prst="rect">
@@ -4428,13 +4705,13 @@
       </p:sp>
       <p:sp>
         <p:nvSpPr>
-          <p:cNvPr id="33" name="Rectangle 32"/>
+          <p:cNvPr id="32" name="Rectangle 31"/>
           <p:cNvSpPr/>
           <p:nvPr/>
         </p:nvSpPr>
         <p:spPr>
           <a:xfrm>
-            <a:off x="7644383" y="8784553"/>
+            <a:off x="7644383" y="12388704"/>
             <a:ext cx="6638544" cy="566928"/>
           </a:xfrm>
           <a:prstGeom prst="rect">
@@ -4481,7 +4758,7 @@
       </p:sp>
       <p:pic>
         <p:nvPicPr>
-          <p:cNvPr id="34" name="Picture 33" descr="posterA_decomposition.png"/>
+          <p:cNvPr id="33" name="Picture 32" descr="posterA_decomposition.png"/>
           <p:cNvPicPr>
             <a:picLocks noChangeAspect="1"/>
           </p:cNvPicPr>
@@ -4495,14 +4772,1224 @@
         </p:blipFill>
         <p:spPr>
           <a:xfrm>
-            <a:off x="7644383" y="9461209"/>
-            <a:ext cx="6638544" cy="6766560"/>
+            <a:off x="7644383" y="13065360"/>
+            <a:ext cx="6638544" cy="4389120"/>
           </a:xfrm>
           <a:prstGeom prst="rect">
             <a:avLst/>
           </a:prstGeom>
         </p:spPr>
       </p:pic>
+      <p:graphicFrame>
+        <p:nvGraphicFramePr>
+          <p:cNvPr id="34" name="Table 33"/>
+          <p:cNvGraphicFramePr>
+            <a:graphicFrameLocks noGrp="1"/>
+          </p:cNvGraphicFramePr>
+          <p:nvPr/>
+        </p:nvGraphicFramePr>
+        <p:xfrm>
+          <a:off x="7644383" y="17763798"/>
+          <a:ext cx="6638544" cy="3291840"/>
+        </p:xfrm>
+        <a:graphic>
+          <a:graphicData uri="http://schemas.openxmlformats.org/drawingml/2006/table">
+            <a:tbl>
+              <a:tblPr>
+                <a:tableStyleId>{2D5ABB26-0587-4C30-8999-92F81FD0307C}</a:tableStyleId>
+              </a:tblPr>
+              <a:tblGrid>
+                <a:gridCol w="1828800"/>
+                <a:gridCol w="822960"/>
+                <a:gridCol w="822960"/>
+                <a:gridCol w="960120"/>
+                <a:gridCol w="960120"/>
+                <a:gridCol w="1243584"/>
+              </a:tblGrid>
+              <a:tr h="603504">
+                <a:tc>
+                  <a:txBody>
+                    <a:bodyPr wrap="square"/>
+                    <a:lstStyle/>
+                    <a:p>
+                      <a:pPr algn="l"/>
+                      <a:r>
+                        <a:rPr sz="1500" b="1">
+                          <a:solidFill>
+                            <a:srgbClr val="FFFFFF"/>
+                          </a:solidFill>
+                          <a:latin typeface="Calibri"/>
+                        </a:rPr>
+                        <a:t>Merge rule</a:t>
+                      </a:r>
+                    </a:p>
+                  </a:txBody>
+                  <a:tcPr marL="91440" marR="91440" marT="18288" marB="18288" anchor="ctr">
+                    <a:solidFill>
+                      <a:srgbClr val="007439"/>
+                    </a:solidFill>
+                  </a:tcPr>
+                </a:tc>
+                <a:tc>
+                  <a:txBody>
+                    <a:bodyPr wrap="square"/>
+                    <a:lstStyle/>
+                    <a:p>
+                      <a:pPr algn="ctr"/>
+                      <a:r>
+                        <a:rPr sz="1500" b="1">
+                          <a:solidFill>
+                            <a:srgbClr val="FFFFFF"/>
+                          </a:solidFill>
+                          <a:latin typeface="Calibri"/>
+                        </a:rPr>
+                        <a:t>Mean</a:t>
+                      </a:r>
+                    </a:p>
+                    <a:p>
+                      <a:pPr algn="ctr"/>
+                      <a:r>
+                        <a:rPr sz="1500" b="1">
+                          <a:solidFill>
+                            <a:srgbClr val="FFFFFF"/>
+                          </a:solidFill>
+                          <a:latin typeface="Calibri"/>
+                        </a:rPr>
+                        <a:t>AUC</a:t>
+                      </a:r>
+                    </a:p>
+                  </a:txBody>
+                  <a:tcPr marL="91440" marR="91440" marT="18288" marB="18288" anchor="ctr">
+                    <a:solidFill>
+                      <a:srgbClr val="007439"/>
+                    </a:solidFill>
+                  </a:tcPr>
+                </a:tc>
+                <a:tc>
+                  <a:txBody>
+                    <a:bodyPr wrap="square"/>
+                    <a:lstStyle/>
+                    <a:p>
+                      <a:pPr algn="ctr"/>
+                      <a:r>
+                        <a:rPr sz="1500" b="1">
+                          <a:solidFill>
+                            <a:srgbClr val="FFFFFF"/>
+                          </a:solidFill>
+                          <a:latin typeface="Calibri"/>
+                        </a:rPr>
+                        <a:t>Worst</a:t>
+                      </a:r>
+                    </a:p>
+                    <a:p>
+                      <a:pPr algn="ctr"/>
+                      <a:r>
+                        <a:rPr sz="1500" b="1">
+                          <a:solidFill>
+                            <a:srgbClr val="FFFFFF"/>
+                          </a:solidFill>
+                          <a:latin typeface="Calibri"/>
+                        </a:rPr>
+                        <a:t>run</a:t>
+                      </a:r>
+                    </a:p>
+                  </a:txBody>
+                  <a:tcPr marL="91440" marR="91440" marT="18288" marB="18288" anchor="ctr">
+                    <a:solidFill>
+                      <a:srgbClr val="007439"/>
+                    </a:solidFill>
+                  </a:tcPr>
+                </a:tc>
+                <a:tc>
+                  <a:txBody>
+                    <a:bodyPr wrap="square"/>
+                    <a:lstStyle/>
+                    <a:p>
+                      <a:pPr algn="ctr"/>
+                      <a:r>
+                        <a:rPr sz="1500" b="1">
+                          <a:solidFill>
+                            <a:srgbClr val="FFFFFF"/>
+                          </a:solidFill>
+                          <a:latin typeface="Calibri"/>
+                        </a:rPr>
+                        <a:t>vs.</a:t>
+                      </a:r>
+                    </a:p>
+                    <a:p>
+                      <a:pPr algn="ctr"/>
+                      <a:r>
+                        <a:rPr sz="1500" b="1">
+                          <a:solidFill>
+                            <a:srgbClr val="FFFFFF"/>
+                          </a:solidFill>
+                          <a:latin typeface="Calibri"/>
+                        </a:rPr>
+                        <a:t>FedAvg</a:t>
+                      </a:r>
+                    </a:p>
+                  </a:txBody>
+                  <a:tcPr marL="91440" marR="91440" marT="18288" marB="18288" anchor="ctr">
+                    <a:solidFill>
+                      <a:srgbClr val="007439"/>
+                    </a:solidFill>
+                  </a:tcPr>
+                </a:tc>
+                <a:tc>
+                  <a:txBody>
+                    <a:bodyPr wrap="square"/>
+                    <a:lstStyle/>
+                    <a:p>
+                      <a:pPr algn="ctr"/>
+                      <a:r>
+                        <a:rPr sz="1500" b="1">
+                          <a:solidFill>
+                            <a:srgbClr val="FFFFFF"/>
+                          </a:solidFill>
+                          <a:latin typeface="Calibri"/>
+                        </a:rPr>
+                        <a:t>vs.</a:t>
+                      </a:r>
+                    </a:p>
+                    <a:p>
+                      <a:pPr algn="ctr"/>
+                      <a:r>
+                        <a:rPr sz="1500" b="1">
+                          <a:solidFill>
+                            <a:srgbClr val="FFFFFF"/>
+                          </a:solidFill>
+                          <a:latin typeface="Calibri"/>
+                        </a:rPr>
+                        <a:t>control</a:t>
+                      </a:r>
+                    </a:p>
+                  </a:txBody>
+                  <a:tcPr marL="91440" marR="91440" marT="18288" marB="18288" anchor="ctr">
+                    <a:solidFill>
+                      <a:srgbClr val="007439"/>
+                    </a:solidFill>
+                  </a:tcPr>
+                </a:tc>
+                <a:tc>
+                  <a:txBody>
+                    <a:bodyPr wrap="square"/>
+                    <a:lstStyle/>
+                    <a:p>
+                      <a:pPr algn="ctr"/>
+                      <a:r>
+                        <a:rPr sz="1500" b="1">
+                          <a:solidFill>
+                            <a:srgbClr val="FFFFFF"/>
+                          </a:solidFill>
+                          <a:latin typeface="Calibri"/>
+                        </a:rPr>
+                        <a:t>Holm p</a:t>
+                      </a:r>
+                    </a:p>
+                    <a:p>
+                      <a:pPr algn="ctr"/>
+                      <a:r>
+                        <a:rPr sz="1500" b="1">
+                          <a:solidFill>
+                            <a:srgbClr val="FFFFFF"/>
+                          </a:solidFill>
+                          <a:latin typeface="Calibri"/>
+                        </a:rPr>
+                        <a:t>vs. control</a:t>
+                      </a:r>
+                    </a:p>
+                  </a:txBody>
+                  <a:tcPr marL="91440" marR="91440" marT="18288" marB="18288" anchor="ctr">
+                    <a:solidFill>
+                      <a:srgbClr val="007439"/>
+                    </a:solidFill>
+                  </a:tcPr>
+                </a:tc>
+              </a:tr>
+              <a:tr h="384048">
+                <a:tc>
+                  <a:txBody>
+                    <a:bodyPr wrap="square"/>
+                    <a:lstStyle/>
+                    <a:p>
+                      <a:pPr algn="l"/>
+                      <a:r>
+                        <a:rPr sz="1500" b="0">
+                          <a:solidFill>
+                            <a:srgbClr val="1A1A1A"/>
+                          </a:solidFill>
+                          <a:latin typeface="Calibri"/>
+                        </a:rPr>
+                        <a:t>FedAvg</a:t>
+                      </a:r>
+                    </a:p>
+                  </a:txBody>
+                  <a:tcPr marL="91440" marR="91440" marT="18288" marB="18288" anchor="ctr">
+                    <a:solidFill>
+                      <a:srgbClr val="FFFFFF"/>
+                    </a:solidFill>
+                  </a:tcPr>
+                </a:tc>
+                <a:tc>
+                  <a:txBody>
+                    <a:bodyPr wrap="square"/>
+                    <a:lstStyle/>
+                    <a:p>
+                      <a:pPr algn="ctr"/>
+                      <a:r>
+                        <a:rPr sz="1500" b="0">
+                          <a:solidFill>
+                            <a:srgbClr val="1A1A1A"/>
+                          </a:solidFill>
+                          <a:latin typeface="Calibri"/>
+                        </a:rPr>
+                        <a:t>0.7081</a:t>
+                      </a:r>
+                    </a:p>
+                  </a:txBody>
+                  <a:tcPr marL="91440" marR="91440" marT="18288" marB="18288" anchor="ctr">
+                    <a:solidFill>
+                      <a:srgbClr val="FFFFFF"/>
+                    </a:solidFill>
+                  </a:tcPr>
+                </a:tc>
+                <a:tc>
+                  <a:txBody>
+                    <a:bodyPr wrap="square"/>
+                    <a:lstStyle/>
+                    <a:p>
+                      <a:pPr algn="ctr"/>
+                      <a:r>
+                        <a:rPr sz="1500" b="0">
+                          <a:solidFill>
+                            <a:srgbClr val="1A1A1A"/>
+                          </a:solidFill>
+                          <a:latin typeface="Calibri"/>
+                        </a:rPr>
+                        <a:t>0.4002</a:t>
+                      </a:r>
+                    </a:p>
+                  </a:txBody>
+                  <a:tcPr marL="91440" marR="91440" marT="18288" marB="18288" anchor="ctr">
+                    <a:solidFill>
+                      <a:srgbClr val="FFFFFF"/>
+                    </a:solidFill>
+                  </a:tcPr>
+                </a:tc>
+                <a:tc>
+                  <a:txBody>
+                    <a:bodyPr wrap="square"/>
+                    <a:lstStyle/>
+                    <a:p>
+                      <a:pPr algn="ctr"/>
+                      <a:r>
+                        <a:rPr sz="1500" b="0">
+                          <a:solidFill>
+                            <a:srgbClr val="1A1A1A"/>
+                          </a:solidFill>
+                          <a:latin typeface="Calibri"/>
+                        </a:rPr>
+                        <a:t>—</a:t>
+                      </a:r>
+                    </a:p>
+                  </a:txBody>
+                  <a:tcPr marL="91440" marR="91440" marT="18288" marB="18288" anchor="ctr">
+                    <a:solidFill>
+                      <a:srgbClr val="FFFFFF"/>
+                    </a:solidFill>
+                  </a:tcPr>
+                </a:tc>
+                <a:tc>
+                  <a:txBody>
+                    <a:bodyPr wrap="square"/>
+                    <a:lstStyle/>
+                    <a:p>
+                      <a:pPr algn="ctr"/>
+                      <a:r>
+                        <a:rPr sz="1500" b="0">
+                          <a:solidFill>
+                            <a:srgbClr val="1A1A1A"/>
+                          </a:solidFill>
+                          <a:latin typeface="Calibri"/>
+                        </a:rPr>
+                        <a:t>-0.0584</a:t>
+                      </a:r>
+                    </a:p>
+                  </a:txBody>
+                  <a:tcPr marL="91440" marR="91440" marT="18288" marB="18288" anchor="ctr">
+                    <a:solidFill>
+                      <a:srgbClr val="FFFFFF"/>
+                    </a:solidFill>
+                  </a:tcPr>
+                </a:tc>
+                <a:tc>
+                  <a:txBody>
+                    <a:bodyPr wrap="square"/>
+                    <a:lstStyle/>
+                    <a:p>
+                      <a:pPr algn="ctr"/>
+                      <a:r>
+                        <a:rPr sz="1500" b="0">
+                          <a:solidFill>
+                            <a:srgbClr val="1A1A1A"/>
+                          </a:solidFill>
+                          <a:latin typeface="Calibri"/>
+                        </a:rPr>
+                        <a:t>0.0036</a:t>
+                      </a:r>
+                    </a:p>
+                  </a:txBody>
+                  <a:tcPr marL="91440" marR="91440" marT="18288" marB="18288" anchor="ctr">
+                    <a:solidFill>
+                      <a:srgbClr val="FFFFFF"/>
+                    </a:solidFill>
+                  </a:tcPr>
+                </a:tc>
+              </a:tr>
+              <a:tr h="384048">
+                <a:tc>
+                  <a:txBody>
+                    <a:bodyPr wrap="square"/>
+                    <a:lstStyle/>
+                    <a:p>
+                      <a:pPr algn="l"/>
+                      <a:r>
+                        <a:rPr sz="1500" b="0">
+                          <a:solidFill>
+                            <a:srgbClr val="1A1A1A"/>
+                          </a:solidFill>
+                          <a:latin typeface="Calibri"/>
+                        </a:rPr>
+                        <a:t>FedProx</a:t>
+                      </a:r>
+                    </a:p>
+                  </a:txBody>
+                  <a:tcPr marL="91440" marR="91440" marT="18288" marB="18288" anchor="ctr">
+                    <a:solidFill>
+                      <a:srgbClr val="E2F0D9"/>
+                    </a:solidFill>
+                  </a:tcPr>
+                </a:tc>
+                <a:tc>
+                  <a:txBody>
+                    <a:bodyPr wrap="square"/>
+                    <a:lstStyle/>
+                    <a:p>
+                      <a:pPr algn="ctr"/>
+                      <a:r>
+                        <a:rPr sz="1500" b="0">
+                          <a:solidFill>
+                            <a:srgbClr val="1A1A1A"/>
+                          </a:solidFill>
+                          <a:latin typeface="Calibri"/>
+                        </a:rPr>
+                        <a:t>0.7286</a:t>
+                      </a:r>
+                    </a:p>
+                  </a:txBody>
+                  <a:tcPr marL="91440" marR="91440" marT="18288" marB="18288" anchor="ctr">
+                    <a:solidFill>
+                      <a:srgbClr val="E2F0D9"/>
+                    </a:solidFill>
+                  </a:tcPr>
+                </a:tc>
+                <a:tc>
+                  <a:txBody>
+                    <a:bodyPr wrap="square"/>
+                    <a:lstStyle/>
+                    <a:p>
+                      <a:pPr algn="ctr"/>
+                      <a:r>
+                        <a:rPr sz="1500" b="0">
+                          <a:solidFill>
+                            <a:srgbClr val="1A1A1A"/>
+                          </a:solidFill>
+                          <a:latin typeface="Calibri"/>
+                        </a:rPr>
+                        <a:t>0.4874</a:t>
+                      </a:r>
+                    </a:p>
+                  </a:txBody>
+                  <a:tcPr marL="91440" marR="91440" marT="18288" marB="18288" anchor="ctr">
+                    <a:solidFill>
+                      <a:srgbClr val="E2F0D9"/>
+                    </a:solidFill>
+                  </a:tcPr>
+                </a:tc>
+                <a:tc>
+                  <a:txBody>
+                    <a:bodyPr wrap="square"/>
+                    <a:lstStyle/>
+                    <a:p>
+                      <a:pPr algn="ctr"/>
+                      <a:r>
+                        <a:rPr sz="1500" b="0">
+                          <a:solidFill>
+                            <a:srgbClr val="1A1A1A"/>
+                          </a:solidFill>
+                          <a:latin typeface="Calibri"/>
+                        </a:rPr>
+                        <a:t>+0.0205</a:t>
+                      </a:r>
+                    </a:p>
+                  </a:txBody>
+                  <a:tcPr marL="91440" marR="91440" marT="18288" marB="18288" anchor="ctr">
+                    <a:solidFill>
+                      <a:srgbClr val="E2F0D9"/>
+                    </a:solidFill>
+                  </a:tcPr>
+                </a:tc>
+                <a:tc>
+                  <a:txBody>
+                    <a:bodyPr wrap="square"/>
+                    <a:lstStyle/>
+                    <a:p>
+                      <a:pPr algn="ctr"/>
+                      <a:r>
+                        <a:rPr sz="1500" b="0">
+                          <a:solidFill>
+                            <a:srgbClr val="1A1A1A"/>
+                          </a:solidFill>
+                          <a:latin typeface="Calibri"/>
+                        </a:rPr>
+                        <a:t>-0.0379</a:t>
+                      </a:r>
+                    </a:p>
+                  </a:txBody>
+                  <a:tcPr marL="91440" marR="91440" marT="18288" marB="18288" anchor="ctr">
+                    <a:solidFill>
+                      <a:srgbClr val="E2F0D9"/>
+                    </a:solidFill>
+                  </a:tcPr>
+                </a:tc>
+                <a:tc>
+                  <a:txBody>
+                    <a:bodyPr wrap="square"/>
+                    <a:lstStyle/>
+                    <a:p>
+                      <a:pPr algn="ctr"/>
+                      <a:r>
+                        <a:rPr sz="1500" b="0">
+                          <a:solidFill>
+                            <a:srgbClr val="1A1A1A"/>
+                          </a:solidFill>
+                          <a:latin typeface="Calibri"/>
+                        </a:rPr>
+                        <a:t>0.0036</a:t>
+                      </a:r>
+                    </a:p>
+                  </a:txBody>
+                  <a:tcPr marL="91440" marR="91440" marT="18288" marB="18288" anchor="ctr">
+                    <a:solidFill>
+                      <a:srgbClr val="E2F0D9"/>
+                    </a:solidFill>
+                  </a:tcPr>
+                </a:tc>
+              </a:tr>
+              <a:tr h="384048">
+                <a:tc>
+                  <a:txBody>
+                    <a:bodyPr wrap="square"/>
+                    <a:lstStyle/>
+                    <a:p>
+                      <a:pPr algn="l"/>
+                      <a:r>
+                        <a:rPr sz="1500" b="0">
+                          <a:solidFill>
+                            <a:srgbClr val="1A1A1A"/>
+                          </a:solidFill>
+                          <a:latin typeface="Calibri"/>
+                        </a:rPr>
+                        <a:t>Krum</a:t>
+                      </a:r>
+                    </a:p>
+                  </a:txBody>
+                  <a:tcPr marL="91440" marR="91440" marT="18288" marB="18288" anchor="ctr">
+                    <a:solidFill>
+                      <a:srgbClr val="FFFFFF"/>
+                    </a:solidFill>
+                  </a:tcPr>
+                </a:tc>
+                <a:tc>
+                  <a:txBody>
+                    <a:bodyPr wrap="square"/>
+                    <a:lstStyle/>
+                    <a:p>
+                      <a:pPr algn="ctr"/>
+                      <a:r>
+                        <a:rPr sz="1500" b="0">
+                          <a:solidFill>
+                            <a:srgbClr val="1A1A1A"/>
+                          </a:solidFill>
+                          <a:latin typeface="Calibri"/>
+                        </a:rPr>
+                        <a:t>0.7439</a:t>
+                      </a:r>
+                    </a:p>
+                  </a:txBody>
+                  <a:tcPr marL="91440" marR="91440" marT="18288" marB="18288" anchor="ctr">
+                    <a:solidFill>
+                      <a:srgbClr val="FFFFFF"/>
+                    </a:solidFill>
+                  </a:tcPr>
+                </a:tc>
+                <a:tc>
+                  <a:txBody>
+                    <a:bodyPr wrap="square"/>
+                    <a:lstStyle/>
+                    <a:p>
+                      <a:pPr algn="ctr"/>
+                      <a:r>
+                        <a:rPr sz="1500" b="0">
+                          <a:solidFill>
+                            <a:srgbClr val="1A1A1A"/>
+                          </a:solidFill>
+                          <a:latin typeface="Calibri"/>
+                        </a:rPr>
+                        <a:t>0.3275</a:t>
+                      </a:r>
+                    </a:p>
+                  </a:txBody>
+                  <a:tcPr marL="91440" marR="91440" marT="18288" marB="18288" anchor="ctr">
+                    <a:solidFill>
+                      <a:srgbClr val="FFFFFF"/>
+                    </a:solidFill>
+                  </a:tcPr>
+                </a:tc>
+                <a:tc>
+                  <a:txBody>
+                    <a:bodyPr wrap="square"/>
+                    <a:lstStyle/>
+                    <a:p>
+                      <a:pPr algn="ctr"/>
+                      <a:r>
+                        <a:rPr sz="1500" b="0">
+                          <a:solidFill>
+                            <a:srgbClr val="1A1A1A"/>
+                          </a:solidFill>
+                          <a:latin typeface="Calibri"/>
+                        </a:rPr>
+                        <a:t>+0.0358</a:t>
+                      </a:r>
+                    </a:p>
+                  </a:txBody>
+                  <a:tcPr marL="91440" marR="91440" marT="18288" marB="18288" anchor="ctr">
+                    <a:solidFill>
+                      <a:srgbClr val="FFFFFF"/>
+                    </a:solidFill>
+                  </a:tcPr>
+                </a:tc>
+                <a:tc>
+                  <a:txBody>
+                    <a:bodyPr wrap="square"/>
+                    <a:lstStyle/>
+                    <a:p>
+                      <a:pPr algn="ctr"/>
+                      <a:r>
+                        <a:rPr sz="1500" b="0">
+                          <a:solidFill>
+                            <a:srgbClr val="1A1A1A"/>
+                          </a:solidFill>
+                          <a:latin typeface="Calibri"/>
+                        </a:rPr>
+                        <a:t>-0.0226</a:t>
+                      </a:r>
+                    </a:p>
+                  </a:txBody>
+                  <a:tcPr marL="91440" marR="91440" marT="18288" marB="18288" anchor="ctr">
+                    <a:solidFill>
+                      <a:srgbClr val="FFFFFF"/>
+                    </a:solidFill>
+                  </a:tcPr>
+                </a:tc>
+                <a:tc>
+                  <a:txBody>
+                    <a:bodyPr wrap="square"/>
+                    <a:lstStyle/>
+                    <a:p>
+                      <a:pPr algn="ctr"/>
+                      <a:r>
+                        <a:rPr sz="1500" b="0">
+                          <a:solidFill>
+                            <a:srgbClr val="1A1A1A"/>
+                          </a:solidFill>
+                          <a:latin typeface="Calibri"/>
+                        </a:rPr>
+                        <a:t>0.22  n.s.</a:t>
+                      </a:r>
+                    </a:p>
+                  </a:txBody>
+                  <a:tcPr marL="91440" marR="91440" marT="18288" marB="18288" anchor="ctr">
+                    <a:solidFill>
+                      <a:srgbClr val="FFFFFF"/>
+                    </a:solidFill>
+                  </a:tcPr>
+                </a:tc>
+              </a:tr>
+              <a:tr h="384048">
+                <a:tc>
+                  <a:txBody>
+                    <a:bodyPr wrap="square"/>
+                    <a:lstStyle/>
+                    <a:p>
+                      <a:pPr algn="l"/>
+                      <a:r>
+                        <a:rPr sz="1500" b="1">
+                          <a:solidFill>
+                            <a:srgbClr val="1A1A1A"/>
+                          </a:solidFill>
+                          <a:latin typeface="Calibri"/>
+                        </a:rPr>
+                        <a:t>Unweighted mean</a:t>
+                      </a:r>
+                    </a:p>
+                  </a:txBody>
+                  <a:tcPr marL="91440" marR="91440" marT="18288" marB="18288" anchor="ctr">
+                    <a:solidFill>
+                      <a:srgbClr val="CFE3C4"/>
+                    </a:solidFill>
+                  </a:tcPr>
+                </a:tc>
+                <a:tc>
+                  <a:txBody>
+                    <a:bodyPr wrap="square"/>
+                    <a:lstStyle/>
+                    <a:p>
+                      <a:pPr algn="ctr"/>
+                      <a:r>
+                        <a:rPr sz="1500" b="1">
+                          <a:solidFill>
+                            <a:srgbClr val="1A1A1A"/>
+                          </a:solidFill>
+                          <a:latin typeface="Calibri"/>
+                        </a:rPr>
+                        <a:t>0.7665</a:t>
+                      </a:r>
+                    </a:p>
+                  </a:txBody>
+                  <a:tcPr marL="91440" marR="91440" marT="18288" marB="18288" anchor="ctr">
+                    <a:solidFill>
+                      <a:srgbClr val="CFE3C4"/>
+                    </a:solidFill>
+                  </a:tcPr>
+                </a:tc>
+                <a:tc>
+                  <a:txBody>
+                    <a:bodyPr wrap="square"/>
+                    <a:lstStyle/>
+                    <a:p>
+                      <a:pPr algn="ctr"/>
+                      <a:r>
+                        <a:rPr sz="1500" b="1">
+                          <a:solidFill>
+                            <a:srgbClr val="1A1A1A"/>
+                          </a:solidFill>
+                          <a:latin typeface="Calibri"/>
+                        </a:rPr>
+                        <a:t>0.6405</a:t>
+                      </a:r>
+                    </a:p>
+                  </a:txBody>
+                  <a:tcPr marL="91440" marR="91440" marT="18288" marB="18288" anchor="ctr">
+                    <a:solidFill>
+                      <a:srgbClr val="CFE3C4"/>
+                    </a:solidFill>
+                  </a:tcPr>
+                </a:tc>
+                <a:tc>
+                  <a:txBody>
+                    <a:bodyPr wrap="square"/>
+                    <a:lstStyle/>
+                    <a:p>
+                      <a:pPr algn="ctr"/>
+                      <a:r>
+                        <a:rPr sz="1500" b="1">
+                          <a:solidFill>
+                            <a:srgbClr val="1A1A1A"/>
+                          </a:solidFill>
+                          <a:latin typeface="Calibri"/>
+                        </a:rPr>
+                        <a:t>+0.0584</a:t>
+                      </a:r>
+                    </a:p>
+                  </a:txBody>
+                  <a:tcPr marL="91440" marR="91440" marT="18288" marB="18288" anchor="ctr">
+                    <a:solidFill>
+                      <a:srgbClr val="CFE3C4"/>
+                    </a:solidFill>
+                  </a:tcPr>
+                </a:tc>
+                <a:tc>
+                  <a:txBody>
+                    <a:bodyPr wrap="square"/>
+                    <a:lstStyle/>
+                    <a:p>
+                      <a:pPr algn="ctr"/>
+                      <a:r>
+                        <a:rPr sz="1500" b="1">
+                          <a:solidFill>
+                            <a:srgbClr val="1A1A1A"/>
+                          </a:solidFill>
+                          <a:latin typeface="Calibri"/>
+                        </a:rPr>
+                        <a:t>—</a:t>
+                      </a:r>
+                    </a:p>
+                  </a:txBody>
+                  <a:tcPr marL="91440" marR="91440" marT="18288" marB="18288" anchor="ctr">
+                    <a:solidFill>
+                      <a:srgbClr val="CFE3C4"/>
+                    </a:solidFill>
+                  </a:tcPr>
+                </a:tc>
+                <a:tc>
+                  <a:txBody>
+                    <a:bodyPr wrap="square"/>
+                    <a:lstStyle/>
+                    <a:p>
+                      <a:pPr algn="ctr"/>
+                      <a:r>
+                        <a:rPr sz="1500" b="1">
+                          <a:solidFill>
+                            <a:srgbClr val="1A1A1A"/>
+                          </a:solidFill>
+                          <a:latin typeface="Calibri"/>
+                        </a:rPr>
+                        <a:t>control</a:t>
+                      </a:r>
+                    </a:p>
+                  </a:txBody>
+                  <a:tcPr marL="91440" marR="91440" marT="18288" marB="18288" anchor="ctr">
+                    <a:solidFill>
+                      <a:srgbClr val="CFE3C4"/>
+                    </a:solidFill>
+                  </a:tcPr>
+                </a:tc>
+              </a:tr>
+              <a:tr h="384048">
+                <a:tc>
+                  <a:txBody>
+                    <a:bodyPr wrap="square"/>
+                    <a:lstStyle/>
+                    <a:p>
+                      <a:pPr algn="l"/>
+                      <a:r>
+                        <a:rPr sz="1500" b="0">
+                          <a:solidFill>
+                            <a:srgbClr val="1A1A1A"/>
+                          </a:solidFill>
+                          <a:latin typeface="Calibri"/>
+                        </a:rPr>
+                        <a:t>Trimmed mean</a:t>
+                      </a:r>
+                    </a:p>
+                  </a:txBody>
+                  <a:tcPr marL="91440" marR="91440" marT="18288" marB="18288" anchor="ctr">
+                    <a:solidFill>
+                      <a:srgbClr val="FFFFFF"/>
+                    </a:solidFill>
+                  </a:tcPr>
+                </a:tc>
+                <a:tc>
+                  <a:txBody>
+                    <a:bodyPr wrap="square"/>
+                    <a:lstStyle/>
+                    <a:p>
+                      <a:pPr algn="ctr"/>
+                      <a:r>
+                        <a:rPr sz="1500" b="0">
+                          <a:solidFill>
+                            <a:srgbClr val="1A1A1A"/>
+                          </a:solidFill>
+                          <a:latin typeface="Calibri"/>
+                        </a:rPr>
+                        <a:t>0.7691</a:t>
+                      </a:r>
+                    </a:p>
+                  </a:txBody>
+                  <a:tcPr marL="91440" marR="91440" marT="18288" marB="18288" anchor="ctr">
+                    <a:solidFill>
+                      <a:srgbClr val="FFFFFF"/>
+                    </a:solidFill>
+                  </a:tcPr>
+                </a:tc>
+                <a:tc>
+                  <a:txBody>
+                    <a:bodyPr wrap="square"/>
+                    <a:lstStyle/>
+                    <a:p>
+                      <a:pPr algn="ctr"/>
+                      <a:r>
+                        <a:rPr sz="1500" b="0">
+                          <a:solidFill>
+                            <a:srgbClr val="1A1A1A"/>
+                          </a:solidFill>
+                          <a:latin typeface="Calibri"/>
+                        </a:rPr>
+                        <a:t>0.6143</a:t>
+                      </a:r>
+                    </a:p>
+                  </a:txBody>
+                  <a:tcPr marL="91440" marR="91440" marT="18288" marB="18288" anchor="ctr">
+                    <a:solidFill>
+                      <a:srgbClr val="FFFFFF"/>
+                    </a:solidFill>
+                  </a:tcPr>
+                </a:tc>
+                <a:tc>
+                  <a:txBody>
+                    <a:bodyPr wrap="square"/>
+                    <a:lstStyle/>
+                    <a:p>
+                      <a:pPr algn="ctr"/>
+                      <a:r>
+                        <a:rPr sz="1500" b="0">
+                          <a:solidFill>
+                            <a:srgbClr val="1A1A1A"/>
+                          </a:solidFill>
+                          <a:latin typeface="Calibri"/>
+                        </a:rPr>
+                        <a:t>+0.0610</a:t>
+                      </a:r>
+                    </a:p>
+                  </a:txBody>
+                  <a:tcPr marL="91440" marR="91440" marT="18288" marB="18288" anchor="ctr">
+                    <a:solidFill>
+                      <a:srgbClr val="FFFFFF"/>
+                    </a:solidFill>
+                  </a:tcPr>
+                </a:tc>
+                <a:tc>
+                  <a:txBody>
+                    <a:bodyPr wrap="square"/>
+                    <a:lstStyle/>
+                    <a:p>
+                      <a:pPr algn="ctr"/>
+                      <a:r>
+                        <a:rPr sz="1500" b="0">
+                          <a:solidFill>
+                            <a:srgbClr val="1A1A1A"/>
+                          </a:solidFill>
+                          <a:latin typeface="Calibri"/>
+                        </a:rPr>
+                        <a:t>+0.0026</a:t>
+                      </a:r>
+                    </a:p>
+                  </a:txBody>
+                  <a:tcPr marL="91440" marR="91440" marT="18288" marB="18288" anchor="ctr">
+                    <a:solidFill>
+                      <a:srgbClr val="FFFFFF"/>
+                    </a:solidFill>
+                  </a:tcPr>
+                </a:tc>
+                <a:tc>
+                  <a:txBody>
+                    <a:bodyPr wrap="square"/>
+                    <a:lstStyle/>
+                    <a:p>
+                      <a:pPr algn="ctr"/>
+                      <a:r>
+                        <a:rPr sz="1500" b="0">
+                          <a:solidFill>
+                            <a:srgbClr val="1A1A1A"/>
+                          </a:solidFill>
+                          <a:latin typeface="Calibri"/>
+                        </a:rPr>
+                        <a:t>0.0036</a:t>
+                      </a:r>
+                    </a:p>
+                  </a:txBody>
+                  <a:tcPr marL="91440" marR="91440" marT="18288" marB="18288" anchor="ctr">
+                    <a:solidFill>
+                      <a:srgbClr val="FFFFFF"/>
+                    </a:solidFill>
+                  </a:tcPr>
+                </a:tc>
+              </a:tr>
+              <a:tr h="384048">
+                <a:tc>
+                  <a:txBody>
+                    <a:bodyPr wrap="square"/>
+                    <a:lstStyle/>
+                    <a:p>
+                      <a:pPr algn="l"/>
+                      <a:r>
+                        <a:rPr sz="1500" b="0">
+                          <a:solidFill>
+                            <a:srgbClr val="1A1A1A"/>
+                          </a:solidFill>
+                          <a:latin typeface="Calibri"/>
+                        </a:rPr>
+                        <a:t>CS-Agg</a:t>
+                      </a:r>
+                    </a:p>
+                  </a:txBody>
+                  <a:tcPr marL="91440" marR="91440" marT="18288" marB="18288" anchor="ctr">
+                    <a:solidFill>
+                      <a:srgbClr val="E2F0D9"/>
+                    </a:solidFill>
+                  </a:tcPr>
+                </a:tc>
+                <a:tc>
+                  <a:txBody>
+                    <a:bodyPr wrap="square"/>
+                    <a:lstStyle/>
+                    <a:p>
+                      <a:pPr algn="ctr"/>
+                      <a:r>
+                        <a:rPr sz="1500" b="0">
+                          <a:solidFill>
+                            <a:srgbClr val="1A1A1A"/>
+                          </a:solidFill>
+                          <a:latin typeface="Calibri"/>
+                        </a:rPr>
+                        <a:t>0.7746</a:t>
+                      </a:r>
+                    </a:p>
+                  </a:txBody>
+                  <a:tcPr marL="91440" marR="91440" marT="18288" marB="18288" anchor="ctr">
+                    <a:solidFill>
+                      <a:srgbClr val="E2F0D9"/>
+                    </a:solidFill>
+                  </a:tcPr>
+                </a:tc>
+                <a:tc>
+                  <a:txBody>
+                    <a:bodyPr wrap="square"/>
+                    <a:lstStyle/>
+                    <a:p>
+                      <a:pPr algn="ctr"/>
+                      <a:r>
+                        <a:rPr sz="1500" b="0">
+                          <a:solidFill>
+                            <a:srgbClr val="1A1A1A"/>
+                          </a:solidFill>
+                          <a:latin typeface="Calibri"/>
+                        </a:rPr>
+                        <a:t>0.7025</a:t>
+                      </a:r>
+                    </a:p>
+                  </a:txBody>
+                  <a:tcPr marL="91440" marR="91440" marT="18288" marB="18288" anchor="ctr">
+                    <a:solidFill>
+                      <a:srgbClr val="E2F0D9"/>
+                    </a:solidFill>
+                  </a:tcPr>
+                </a:tc>
+                <a:tc>
+                  <a:txBody>
+                    <a:bodyPr wrap="square"/>
+                    <a:lstStyle/>
+                    <a:p>
+                      <a:pPr algn="ctr"/>
+                      <a:r>
+                        <a:rPr sz="1500" b="0">
+                          <a:solidFill>
+                            <a:srgbClr val="1A1A1A"/>
+                          </a:solidFill>
+                          <a:latin typeface="Calibri"/>
+                        </a:rPr>
+                        <a:t>+0.0665</a:t>
+                      </a:r>
+                    </a:p>
+                  </a:txBody>
+                  <a:tcPr marL="91440" marR="91440" marT="18288" marB="18288" anchor="ctr">
+                    <a:solidFill>
+                      <a:srgbClr val="E2F0D9"/>
+                    </a:solidFill>
+                  </a:tcPr>
+                </a:tc>
+                <a:tc>
+                  <a:txBody>
+                    <a:bodyPr wrap="square"/>
+                    <a:lstStyle/>
+                    <a:p>
+                      <a:pPr algn="ctr"/>
+                      <a:r>
+                        <a:rPr sz="1500" b="0">
+                          <a:solidFill>
+                            <a:srgbClr val="1A1A1A"/>
+                          </a:solidFill>
+                          <a:latin typeface="Calibri"/>
+                        </a:rPr>
+                        <a:t>+0.0081</a:t>
+                      </a:r>
+                    </a:p>
+                  </a:txBody>
+                  <a:tcPr marL="91440" marR="91440" marT="18288" marB="18288" anchor="ctr">
+                    <a:solidFill>
+                      <a:srgbClr val="E2F0D9"/>
+                    </a:solidFill>
+                  </a:tcPr>
+                </a:tc>
+                <a:tc>
+                  <a:txBody>
+                    <a:bodyPr wrap="square"/>
+                    <a:lstStyle/>
+                    <a:p>
+                      <a:pPr algn="ctr"/>
+                      <a:r>
+                        <a:rPr sz="1500" b="0">
+                          <a:solidFill>
+                            <a:srgbClr val="1A1A1A"/>
+                          </a:solidFill>
+                          <a:latin typeface="Calibri"/>
+                        </a:rPr>
+                        <a:t>0.22  n.s.</a:t>
+                      </a:r>
+                    </a:p>
+                  </a:txBody>
+                  <a:tcPr marL="91440" marR="91440" marT="18288" marB="18288" anchor="ctr">
+                    <a:solidFill>
+                      <a:srgbClr val="E2F0D9"/>
+                    </a:solidFill>
+                  </a:tcPr>
+                </a:tc>
+              </a:tr>
+              <a:tr h="384048">
+                <a:tc>
+                  <a:txBody>
+                    <a:bodyPr wrap="square"/>
+                    <a:lstStyle/>
+                    <a:p>
+                      <a:pPr algn="l"/>
+                      <a:r>
+                        <a:rPr sz="1500" b="0">
+                          <a:solidFill>
+                            <a:srgbClr val="1A1A1A"/>
+                          </a:solidFill>
+                          <a:latin typeface="Calibri"/>
+                        </a:rPr>
+                        <a:t>Coord. median</a:t>
+                      </a:r>
+                    </a:p>
+                  </a:txBody>
+                  <a:tcPr marL="91440" marR="91440" marT="18288" marB="18288" anchor="ctr">
+                    <a:solidFill>
+                      <a:srgbClr val="FFFFFF"/>
+                    </a:solidFill>
+                  </a:tcPr>
+                </a:tc>
+                <a:tc>
+                  <a:txBody>
+                    <a:bodyPr wrap="square"/>
+                    <a:lstStyle/>
+                    <a:p>
+                      <a:pPr algn="ctr"/>
+                      <a:r>
+                        <a:rPr sz="1500" b="0">
+                          <a:solidFill>
+                            <a:srgbClr val="1A1A1A"/>
+                          </a:solidFill>
+                          <a:latin typeface="Calibri"/>
+                        </a:rPr>
+                        <a:t>0.7828</a:t>
+                      </a:r>
+                    </a:p>
+                  </a:txBody>
+                  <a:tcPr marL="91440" marR="91440" marT="18288" marB="18288" anchor="ctr">
+                    <a:solidFill>
+                      <a:srgbClr val="FFFFFF"/>
+                    </a:solidFill>
+                  </a:tcPr>
+                </a:tc>
+                <a:tc>
+                  <a:txBody>
+                    <a:bodyPr wrap="square"/>
+                    <a:lstStyle/>
+                    <a:p>
+                      <a:pPr algn="ctr"/>
+                      <a:r>
+                        <a:rPr sz="1500" b="0">
+                          <a:solidFill>
+                            <a:srgbClr val="1A1A1A"/>
+                          </a:solidFill>
+                          <a:latin typeface="Calibri"/>
+                        </a:rPr>
+                        <a:t>0.7279</a:t>
+                      </a:r>
+                    </a:p>
+                  </a:txBody>
+                  <a:tcPr marL="91440" marR="91440" marT="18288" marB="18288" anchor="ctr">
+                    <a:solidFill>
+                      <a:srgbClr val="FFFFFF"/>
+                    </a:solidFill>
+                  </a:tcPr>
+                </a:tc>
+                <a:tc>
+                  <a:txBody>
+                    <a:bodyPr wrap="square"/>
+                    <a:lstStyle/>
+                    <a:p>
+                      <a:pPr algn="ctr"/>
+                      <a:r>
+                        <a:rPr sz="1500" b="0">
+                          <a:solidFill>
+                            <a:srgbClr val="1A1A1A"/>
+                          </a:solidFill>
+                          <a:latin typeface="Calibri"/>
+                        </a:rPr>
+                        <a:t>+0.0747</a:t>
+                      </a:r>
+                    </a:p>
+                  </a:txBody>
+                  <a:tcPr marL="91440" marR="91440" marT="18288" marB="18288" anchor="ctr">
+                    <a:solidFill>
+                      <a:srgbClr val="FFFFFF"/>
+                    </a:solidFill>
+                  </a:tcPr>
+                </a:tc>
+                <a:tc>
+                  <a:txBody>
+                    <a:bodyPr wrap="square"/>
+                    <a:lstStyle/>
+                    <a:p>
+                      <a:pPr algn="ctr"/>
+                      <a:r>
+                        <a:rPr sz="1500" b="0">
+                          <a:solidFill>
+                            <a:srgbClr val="1A1A1A"/>
+                          </a:solidFill>
+                          <a:latin typeface="Calibri"/>
+                        </a:rPr>
+                        <a:t>+0.0163</a:t>
+                      </a:r>
+                    </a:p>
+                  </a:txBody>
+                  <a:tcPr marL="91440" marR="91440" marT="18288" marB="18288" anchor="ctr">
+                    <a:solidFill>
+                      <a:srgbClr val="FFFFFF"/>
+                    </a:solidFill>
+                  </a:tcPr>
+                </a:tc>
+                <a:tc>
+                  <a:txBody>
+                    <a:bodyPr wrap="square"/>
+                    <a:lstStyle/>
+                    <a:p>
+                      <a:pPr algn="ctr"/>
+                      <a:r>
+                        <a:rPr sz="1500" b="0">
+                          <a:solidFill>
+                            <a:srgbClr val="1A1A1A"/>
+                          </a:solidFill>
+                          <a:latin typeface="Calibri"/>
+                        </a:rPr>
+                        <a:t>&lt; 0.0001</a:t>
+                      </a:r>
+                    </a:p>
+                  </a:txBody>
+                  <a:tcPr marL="91440" marR="91440" marT="18288" marB="18288" anchor="ctr">
+                    <a:solidFill>
+                      <a:srgbClr val="FFFFFF"/>
+                    </a:solidFill>
+                  </a:tcPr>
+                </a:tc>
+              </a:tr>
+            </a:tbl>
+          </a:graphicData>
+        </a:graphic>
+      </p:graphicFrame>
       <p:sp>
         <p:nvSpPr>
           <p:cNvPr id="35" name="TextBox 34"/>
@@ -4511,8 +5998,50 @@
         </p:nvSpPr>
         <p:spPr>
           <a:xfrm>
-            <a:off x="7644383" y="16410649"/>
-            <a:ext cx="6638544" cy="2223951"/>
+            <a:off x="7644383" y="21364956"/>
+            <a:ext cx="6638544" cy="740446"/>
+          </a:xfrm>
+          <a:prstGeom prst="rect">
+            <a:avLst/>
+          </a:prstGeom>
+          <a:noFill/>
+        </p:spPr>
+        <p:txBody>
+          <a:bodyPr wrap="square" lIns="54864" rIns="0" tIns="0" bIns="0">
+            <a:spAutoFit/>
+          </a:bodyPr>
+          <a:lstStyle/>
+          <a:p>
+            <a:pPr>
+              <a:spcBef>
+                <a:spcPts val="0"/>
+              </a:spcBef>
+              <a:spcAft>
+                <a:spcPts val="800"/>
+              </a:spcAft>
+            </a:pPr>
+            <a:r>
+              <a:rPr sz="1700" i="1">
+                <a:solidFill>
+                  <a:srgbClr val="444444"/>
+                </a:solidFill>
+                <a:latin typeface="Calibri"/>
+              </a:rPr>
+              <a:t>36 runs per rule on BRFSS. The three robust rules that beat the control beat it by far less than the control beats FedAvg.</a:t>
+            </a:r>
+          </a:p>
+        </p:txBody>
+      </p:sp>
+      <p:sp>
+        <p:nvSpPr>
+          <p:cNvPr id="36" name="TextBox 35"/>
+          <p:cNvSpPr txBox="1"/>
+          <p:nvPr/>
+        </p:nvSpPr>
+        <p:spPr>
+          <a:xfrm>
+            <a:off x="7644383" y="22414719"/>
+            <a:ext cx="6638544" cy="1513114"/>
           </a:xfrm>
           <a:prstGeom prst="rect">
             <a:avLst/>
@@ -4536,7 +6065,7 @@
               <a:buChar char="•"/>
             </a:pPr>
             <a:r>
-              <a:rPr sz="1900">
+              <a:rPr sz="1900" i="0">
                 <a:solidFill>
                   <a:srgbClr val="1A1A1A"/>
                 </a:solidFill>
@@ -4557,47 +6086,26 @@
               <a:buChar char="•"/>
             </a:pPr>
             <a:r>
-              <a:rPr sz="1900">
+              <a:rPr sz="1900" i="0">
                 <a:solidFill>
                   <a:srgbClr val="1A1A1A"/>
                 </a:solidFill>
                 <a:latin typeface="Calibri"/>
               </a:rPr>
-              <a:t>Only coordinate-wise median clearly clears it, at +0.0163 AUC (Holm p &lt; 0.0001).</a:t>
-            </a:r>
-          </a:p>
-          <a:p>
-            <a:pPr indent="-215900" marL="215900">
-              <a:spcBef>
-                <a:spcPts val="0"/>
-              </a:spcBef>
-              <a:spcAft>
-                <a:spcPts val="800"/>
-              </a:spcAft>
-              <a:buFont typeface="Arial"/>
-              <a:buChar char="•"/>
-            </a:pPr>
-            <a:r>
-              <a:rPr sz="1900">
-                <a:solidFill>
-                  <a:srgbClr val="1A1A1A"/>
-                </a:solidFill>
-                <a:latin typeface="Calibri"/>
-              </a:rPr>
-              <a:t>Trimmed mean's +0.0026 is significant but negligible, and CS-Agg cannot be told apart from the control (p = 0.22).</a:t>
-            </a:r>
-          </a:p>
-        </p:txBody>
-      </p:sp>
-      <p:sp>
-        <p:nvSpPr>
-          <p:cNvPr id="36" name="Rectangle 35"/>
+              <a:t>Only coordinate-wise median clearly clears the control, and CS-Agg cannot be told apart from it at all.</a:t>
+            </a:r>
+          </a:p>
+        </p:txBody>
+      </p:sp>
+      <p:sp>
+        <p:nvSpPr>
+          <p:cNvPr id="37" name="Rectangle 36"/>
           <p:cNvSpPr/>
           <p:nvPr/>
         </p:nvSpPr>
         <p:spPr>
           <a:xfrm>
-            <a:off x="7644383" y="18817481"/>
+            <a:off x="7644383" y="24237151"/>
             <a:ext cx="6638544" cy="566928"/>
           </a:xfrm>
           <a:prstGeom prst="rect">
@@ -4644,7 +6152,7 @@
       </p:sp>
       <p:pic>
         <p:nvPicPr>
-          <p:cNvPr id="37" name="Picture 36" descr="posterC_runlevel.png"/>
+          <p:cNvPr id="38" name="Picture 37" descr="posterC_runlevel.png"/>
           <p:cNvPicPr>
             <a:picLocks noChangeAspect="1"/>
           </p:cNvPicPr>
@@ -4658,8 +6166,8 @@
         </p:blipFill>
         <p:spPr>
           <a:xfrm>
-            <a:off x="7644383" y="19494137"/>
-            <a:ext cx="6638544" cy="5669280"/>
+            <a:off x="7644383" y="24913807"/>
+            <a:ext cx="6638544" cy="4572000"/>
           </a:xfrm>
           <a:prstGeom prst="rect">
             <a:avLst/>
@@ -4668,13 +6176,13 @@
       </p:pic>
       <p:sp>
         <p:nvSpPr>
-          <p:cNvPr id="38" name="TextBox 37"/>
+          <p:cNvPr id="39" name="TextBox 38"/>
           <p:cNvSpPr txBox="1"/>
           <p:nvPr/>
         </p:nvSpPr>
         <p:spPr>
           <a:xfrm>
-            <a:off x="7644383" y="25346297"/>
+            <a:off x="7644383" y="29795125"/>
             <a:ext cx="6638544" cy="802277"/>
           </a:xfrm>
           <a:prstGeom prst="rect">
@@ -4699,7 +6207,7 @@
               <a:buChar char="•"/>
             </a:pPr>
             <a:r>
-              <a:rPr sz="1900">
+              <a:rPr sz="1900" i="0">
                 <a:solidFill>
                   <a:srgbClr val="1A1A1A"/>
                 </a:solidFill>
@@ -4712,145 +6220,7 @@
       </p:sp>
       <p:sp>
         <p:nvSpPr>
-          <p:cNvPr id="39" name="Rectangle 38"/>
-          <p:cNvSpPr/>
-          <p:nvPr/>
-        </p:nvSpPr>
-        <p:spPr>
-          <a:xfrm>
-            <a:off x="7644383" y="26331454"/>
-            <a:ext cx="6638544" cy="713232"/>
-          </a:xfrm>
-          <a:prstGeom prst="rect">
-            <a:avLst/>
-          </a:prstGeom>
-          <a:solidFill>
-            <a:srgbClr val="007439"/>
-          </a:solidFill>
-          <a:ln>
-            <a:noFill/>
-          </a:ln>
-          <a:effectLst/>
-        </p:spPr>
-        <p:style>
-          <a:lnRef idx="1">
-            <a:schemeClr val="accent1"/>
-          </a:lnRef>
-          <a:fillRef idx="3">
-            <a:schemeClr val="accent1"/>
-          </a:fillRef>
-          <a:effectRef idx="2">
-            <a:schemeClr val="accent1"/>
-          </a:effectRef>
-          <a:fontRef idx="minor">
-            <a:schemeClr val="lt1"/>
-          </a:fontRef>
-        </p:style>
-        <p:txBody>
-          <a:bodyPr rtlCol="0" anchor="ctr" wrap="square" lIns="146304" rIns="146304" tIns="0" bIns="0"/>
-          <a:lstStyle/>
-          <a:p>
-            <a:pPr algn="l"/>
-            <a:r>
-              <a:rPr sz="2500" b="1">
-                <a:solidFill>
-                  <a:srgbClr val="FFFFFF"/>
-                </a:solidFill>
-                <a:latin typeface="Calibri"/>
-              </a:rPr>
-              <a:t>Code &amp; Data</a:t>
-            </a:r>
-          </a:p>
-        </p:txBody>
-      </p:sp>
-      <p:sp>
-        <p:nvSpPr>
-          <p:cNvPr id="40" name="TextBox 39"/>
-          <p:cNvSpPr txBox="1"/>
-          <p:nvPr/>
-        </p:nvSpPr>
-        <p:spPr>
-          <a:xfrm>
-            <a:off x="7644383" y="27154414"/>
-            <a:ext cx="4992624" cy="1806810"/>
-          </a:xfrm>
-          <a:prstGeom prst="rect">
-            <a:avLst/>
-          </a:prstGeom>
-          <a:noFill/>
-        </p:spPr>
-        <p:txBody>
-          <a:bodyPr wrap="square" lIns="54864" rIns="0" tIns="0" bIns="0">
-            <a:spAutoFit/>
-          </a:bodyPr>
-          <a:lstStyle/>
-          <a:p>
-            <a:pPr>
-              <a:spcBef>
-                <a:spcPts val="0"/>
-              </a:spcBef>
-              <a:spcAft>
-                <a:spcPts val="800"/>
-              </a:spcAft>
-            </a:pPr>
-            <a:r>
-              <a:rPr sz="1900">
-                <a:solidFill>
-                  <a:srgbClr val="1A1A1A"/>
-                </a:solidFill>
-                <a:latin typeface="Calibri"/>
-              </a:rPr>
-              <a:t>All code, the merged results and a script that re-checks every number on this poster are openly available.</a:t>
-            </a:r>
-          </a:p>
-          <a:p>
-            <a:pPr>
-              <a:spcBef>
-                <a:spcPts val="0"/>
-              </a:spcBef>
-              <a:spcAft>
-                <a:spcPts val="800"/>
-              </a:spcAft>
-            </a:pPr>
-            <a:r>
-              <a:rPr sz="1900">
-                <a:solidFill>
-                  <a:srgbClr val="1A1A1A"/>
-                </a:solidFill>
-                <a:latin typeface="Calibri"/>
-              </a:rPr>
-              <a:t>github.com/kunalchevuri/federated-learning-health-robustness</a:t>
-            </a:r>
-          </a:p>
-        </p:txBody>
-      </p:sp>
-      <p:pic>
-        <p:nvPicPr>
-          <p:cNvPr id="41" name="Picture 40" descr="posterE_qr.png"/>
-          <p:cNvPicPr>
-            <a:picLocks noChangeAspect="1"/>
-          </p:cNvPicPr>
-          <p:nvPr/>
-        </p:nvPicPr>
-        <p:blipFill>
-          <a:blip r:embed="rId8"/>
-          <a:stretch>
-            <a:fillRect/>
-          </a:stretch>
-        </p:blipFill>
-        <p:spPr>
-          <a:xfrm>
-            <a:off x="12819888" y="27172702"/>
-            <a:ext cx="1417320" cy="1417320"/>
-          </a:xfrm>
-          <a:prstGeom prst="rect">
-            <a:avLst/>
-          </a:prstGeom>
-        </p:spPr>
-      </p:pic>
-      <p:sp>
-        <p:nvSpPr>
-          <p:cNvPr id="42" name="Rectangle 41"/>
+          <p:cNvPr id="40" name="Rectangle 39"/>
           <p:cNvSpPr/>
           <p:nvPr/>
         </p:nvSpPr>
@@ -4903,7 +6273,7 @@
       </p:sp>
       <p:sp>
         <p:nvSpPr>
-          <p:cNvPr id="43" name="Rectangle 42"/>
+          <p:cNvPr id="41" name="Rectangle 40"/>
           <p:cNvSpPr/>
           <p:nvPr/>
         </p:nvSpPr>
@@ -4956,14 +6326,14 @@
       </p:sp>
       <p:pic>
         <p:nvPicPr>
-          <p:cNvPr id="44" name="Picture 43" descr="posterG_stressors.png"/>
+          <p:cNvPr id="42" name="Picture 41" descr="posterG_stressors.png"/>
           <p:cNvPicPr>
             <a:picLocks noChangeAspect="1"/>
           </p:cNvPicPr>
           <p:nvPr/>
         </p:nvPicPr>
         <p:blipFill>
-          <a:blip r:embed="rId9"/>
+          <a:blip r:embed="rId8"/>
           <a:stretch>
             <a:fillRect/>
           </a:stretch>
@@ -4971,7 +6341,7 @@
         <p:spPr>
           <a:xfrm>
             <a:off x="14740128" y="4809744"/>
-            <a:ext cx="6638544" cy="3886200"/>
+            <a:ext cx="6638544" cy="2743200"/>
           </a:xfrm>
           <a:prstGeom prst="rect">
             <a:avLst/>
@@ -4980,13 +6350,13 @@
       </p:pic>
       <p:sp>
         <p:nvSpPr>
-          <p:cNvPr id="45" name="TextBox 44"/>
+          <p:cNvPr id="43" name="TextBox 42"/>
           <p:cNvSpPr txBox="1"/>
           <p:nvPr/>
         </p:nvSpPr>
         <p:spPr>
           <a:xfrm>
-            <a:off x="14740128" y="8878824"/>
+            <a:off x="14740128" y="7938788"/>
             <a:ext cx="6638544" cy="1513114"/>
           </a:xfrm>
           <a:prstGeom prst="rect">
@@ -5011,7 +6381,7 @@
               <a:buChar char="•"/>
             </a:pPr>
             <a:r>
-              <a:rPr sz="1900">
+              <a:rPr sz="1900" i="0">
                 <a:solidFill>
                   <a:srgbClr val="1A1A1A"/>
                 </a:solidFill>
@@ -5032,7 +6402,7 @@
               <a:buChar char="•"/>
             </a:pPr>
             <a:r>
-              <a:rPr sz="1900">
+              <a:rPr sz="1900" i="0">
                 <a:solidFill>
                   <a:srgbClr val="1A1A1A"/>
                 </a:solidFill>
@@ -5045,13 +6415,13 @@
       </p:sp>
       <p:sp>
         <p:nvSpPr>
-          <p:cNvPr id="46" name="Rectangle 45"/>
+          <p:cNvPr id="44" name="Rectangle 43"/>
           <p:cNvSpPr/>
           <p:nvPr/>
         </p:nvSpPr>
         <p:spPr>
           <a:xfrm>
-            <a:off x="14740128" y="10574818"/>
+            <a:off x="14740128" y="9837746"/>
             <a:ext cx="6638544" cy="566928"/>
           </a:xfrm>
           <a:prstGeom prst="rect">
@@ -5098,22 +6468,22 @@
       </p:sp>
       <p:pic>
         <p:nvPicPr>
-          <p:cNvPr id="47" name="Picture 46" descr="posterB_both_datasets.png"/>
+          <p:cNvPr id="45" name="Picture 44" descr="posterB_both_datasets.png"/>
           <p:cNvPicPr>
             <a:picLocks noChangeAspect="1"/>
           </p:cNvPicPr>
           <p:nvPr/>
         </p:nvPicPr>
         <p:blipFill>
-          <a:blip r:embed="rId10"/>
+          <a:blip r:embed="rId9"/>
           <a:stretch>
             <a:fillRect/>
           </a:stretch>
         </p:blipFill>
         <p:spPr>
           <a:xfrm>
-            <a:off x="14740128" y="11251474"/>
-            <a:ext cx="6638544" cy="6217920"/>
+            <a:off x="14740128" y="10514402"/>
+            <a:ext cx="6638544" cy="4206240"/>
           </a:xfrm>
           <a:prstGeom prst="rect">
             <a:avLst/>
@@ -5122,13 +6492,13 @@
       </p:pic>
       <p:sp>
         <p:nvSpPr>
-          <p:cNvPr id="48" name="TextBox 47"/>
+          <p:cNvPr id="46" name="TextBox 45"/>
           <p:cNvSpPr txBox="1"/>
           <p:nvPr/>
         </p:nvSpPr>
         <p:spPr>
           <a:xfrm>
-            <a:off x="14740128" y="17652274"/>
+            <a:off x="14740128" y="15106486"/>
             <a:ext cx="6638544" cy="1513114"/>
           </a:xfrm>
           <a:prstGeom prst="rect">
@@ -5153,7 +6523,7 @@
               <a:buChar char="•"/>
             </a:pPr>
             <a:r>
-              <a:rPr sz="1900">
+              <a:rPr sz="1900" i="0">
                 <a:solidFill>
                   <a:srgbClr val="1A1A1A"/>
                 </a:solidFill>
@@ -5174,7 +6544,7 @@
               <a:buChar char="•"/>
             </a:pPr>
             <a:r>
-              <a:rPr sz="1900">
+              <a:rPr sz="1900" i="0">
                 <a:solidFill>
                   <a:srgbClr val="1A1A1A"/>
                 </a:solidFill>
@@ -5187,13 +6557,13 @@
       </p:sp>
       <p:sp>
         <p:nvSpPr>
-          <p:cNvPr id="49" name="Rectangle 48"/>
+          <p:cNvPr id="47" name="Rectangle 46"/>
           <p:cNvSpPr/>
           <p:nvPr/>
         </p:nvSpPr>
         <p:spPr>
           <a:xfrm>
-            <a:off x="14740128" y="19348268"/>
+            <a:off x="14740128" y="17005445"/>
             <a:ext cx="6638544" cy="713232"/>
           </a:xfrm>
           <a:prstGeom prst="rect">
@@ -5240,13 +6610,13 @@
       </p:sp>
       <p:sp>
         <p:nvSpPr>
-          <p:cNvPr id="50" name="TextBox 49"/>
+          <p:cNvPr id="48" name="TextBox 47"/>
           <p:cNvSpPr txBox="1"/>
           <p:nvPr/>
         </p:nvSpPr>
         <p:spPr>
           <a:xfrm>
-            <a:off x="14740128" y="20171228"/>
+            <a:off x="14740128" y="17828405"/>
             <a:ext cx="6638544" cy="2223951"/>
           </a:xfrm>
           <a:prstGeom prst="rect">
@@ -5271,7 +6641,7 @@
               <a:buChar char="•"/>
             </a:pPr>
             <a:r>
-              <a:rPr sz="1900">
+              <a:rPr sz="1900" i="0">
                 <a:solidFill>
                   <a:srgbClr val="1A1A1A"/>
                 </a:solidFill>
@@ -5292,7 +6662,7 @@
               <a:buChar char="•"/>
             </a:pPr>
             <a:r>
-              <a:rPr sz="1900">
+              <a:rPr sz="1900" i="0">
                 <a:solidFill>
                   <a:srgbClr val="1A1A1A"/>
                 </a:solidFill>
@@ -5313,7 +6683,7 @@
               <a:buChar char="•"/>
             </a:pPr>
             <a:r>
-              <a:rPr sz="1900">
+              <a:rPr sz="1900" i="0">
                 <a:solidFill>
                   <a:srgbClr val="1A1A1A"/>
                 </a:solidFill>
@@ -5326,13 +6696,13 @@
       </p:sp>
       <p:sp>
         <p:nvSpPr>
-          <p:cNvPr id="51" name="Rectangle 50"/>
+          <p:cNvPr id="49" name="Rectangle 48"/>
           <p:cNvSpPr/>
           <p:nvPr/>
         </p:nvSpPr>
         <p:spPr>
           <a:xfrm>
-            <a:off x="14740128" y="22578060"/>
+            <a:off x="14740128" y="20438200"/>
             <a:ext cx="6638544" cy="713232"/>
           </a:xfrm>
           <a:prstGeom prst="rect">
@@ -5379,13 +6749,13 @@
       </p:sp>
       <p:sp>
         <p:nvSpPr>
-          <p:cNvPr id="52" name="TextBox 51"/>
+          <p:cNvPr id="50" name="TextBox 49"/>
           <p:cNvSpPr txBox="1"/>
           <p:nvPr/>
         </p:nvSpPr>
         <p:spPr>
           <a:xfrm>
-            <a:off x="14740128" y="23401020"/>
+            <a:off x="14740128" y="21261160"/>
             <a:ext cx="6638544" cy="3522181"/>
           </a:xfrm>
           <a:prstGeom prst="rect">
@@ -5410,7 +6780,7 @@
               <a:buChar char="•"/>
             </a:pPr>
             <a:r>
-              <a:rPr sz="1900">
+              <a:rPr sz="1900" i="0">
                 <a:solidFill>
                   <a:srgbClr val="1A1A1A"/>
                 </a:solidFill>
@@ -5431,7 +6801,7 @@
               <a:buChar char="•"/>
             </a:pPr>
             <a:r>
-              <a:rPr sz="1900">
+              <a:rPr sz="1900" i="0">
                 <a:solidFill>
                   <a:srgbClr val="1A1A1A"/>
                 </a:solidFill>
@@ -5452,7 +6822,7 @@
               <a:buChar char="•"/>
             </a:pPr>
             <a:r>
-              <a:rPr sz="1900">
+              <a:rPr sz="1900" i="0">
                 <a:solidFill>
                   <a:srgbClr val="1A1A1A"/>
                 </a:solidFill>
@@ -5473,7 +6843,7 @@
               <a:buChar char="•"/>
             </a:pPr>
             <a:r>
-              <a:rPr sz="1900">
+              <a:rPr sz="1900" i="0">
                 <a:solidFill>
                   <a:srgbClr val="1A1A1A"/>
                 </a:solidFill>
@@ -5486,13 +6856,13 @@
       </p:sp>
       <p:sp>
         <p:nvSpPr>
-          <p:cNvPr id="53" name="Rectangle 52"/>
+          <p:cNvPr id="51" name="Rectangle 50"/>
           <p:cNvSpPr/>
           <p:nvPr/>
         </p:nvSpPr>
         <p:spPr>
           <a:xfrm>
-            <a:off x="14740128" y="27106081"/>
+            <a:off x="14740128" y="25169186"/>
             <a:ext cx="6638544" cy="713232"/>
           </a:xfrm>
           <a:prstGeom prst="rect">
@@ -5532,20 +6902,158 @@
                 </a:solidFill>
                 <a:latin typeface="Calibri"/>
               </a:rPr>
-              <a:t>Acknowledgements</a:t>
-            </a:r>
-          </a:p>
-        </p:txBody>
-      </p:sp>
-      <p:sp>
-        <p:nvSpPr>
-          <p:cNvPr id="54" name="TextBox 53"/>
+              <a:t>Code &amp; Data</a:t>
+            </a:r>
+          </a:p>
+        </p:txBody>
+      </p:sp>
+      <p:sp>
+        <p:nvSpPr>
+          <p:cNvPr id="52" name="TextBox 51"/>
           <p:cNvSpPr txBox="1"/>
           <p:nvPr/>
         </p:nvSpPr>
         <p:spPr>
           <a:xfrm>
-            <a:off x="14740128" y="27929041"/>
+            <a:off x="14740128" y="25992146"/>
+            <a:ext cx="4992624" cy="1806810"/>
+          </a:xfrm>
+          <a:prstGeom prst="rect">
+            <a:avLst/>
+          </a:prstGeom>
+          <a:noFill/>
+        </p:spPr>
+        <p:txBody>
+          <a:bodyPr wrap="square" lIns="54864" rIns="0" tIns="0" bIns="0">
+            <a:spAutoFit/>
+          </a:bodyPr>
+          <a:lstStyle/>
+          <a:p>
+            <a:pPr>
+              <a:spcBef>
+                <a:spcPts val="0"/>
+              </a:spcBef>
+              <a:spcAft>
+                <a:spcPts val="800"/>
+              </a:spcAft>
+            </a:pPr>
+            <a:r>
+              <a:rPr sz="1900" i="0">
+                <a:solidFill>
+                  <a:srgbClr val="1A1A1A"/>
+                </a:solidFill>
+                <a:latin typeface="Calibri"/>
+              </a:rPr>
+              <a:t>All code, the merged results and a script that re-checks every number on this poster are openly available.</a:t>
+            </a:r>
+          </a:p>
+          <a:p>
+            <a:pPr>
+              <a:spcBef>
+                <a:spcPts val="0"/>
+              </a:spcBef>
+              <a:spcAft>
+                <a:spcPts val="800"/>
+              </a:spcAft>
+            </a:pPr>
+            <a:r>
+              <a:rPr sz="1900" i="0">
+                <a:solidFill>
+                  <a:srgbClr val="1A1A1A"/>
+                </a:solidFill>
+                <a:latin typeface="Calibri"/>
+              </a:rPr>
+              <a:t>github.com/kunalchevuri/federated-learning-health-robustness</a:t>
+            </a:r>
+          </a:p>
+        </p:txBody>
+      </p:sp>
+      <p:pic>
+        <p:nvPicPr>
+          <p:cNvPr id="53" name="Picture 52" descr="posterE_qr.png"/>
+          <p:cNvPicPr>
+            <a:picLocks noChangeAspect="1"/>
+          </p:cNvPicPr>
+          <p:nvPr/>
+        </p:nvPicPr>
+        <p:blipFill>
+          <a:blip r:embed="rId10"/>
+          <a:stretch>
+            <a:fillRect/>
+          </a:stretch>
+        </p:blipFill>
+        <p:spPr>
+          <a:xfrm>
+            <a:off x="19915632" y="26010434"/>
+            <a:ext cx="1417320" cy="1417320"/>
+          </a:xfrm>
+          <a:prstGeom prst="rect">
+            <a:avLst/>
+          </a:prstGeom>
+        </p:spPr>
+      </p:pic>
+      <p:sp>
+        <p:nvSpPr>
+          <p:cNvPr id="54" name="Rectangle 53"/>
+          <p:cNvSpPr/>
+          <p:nvPr/>
+        </p:nvSpPr>
+        <p:spPr>
+          <a:xfrm>
+            <a:off x="14740128" y="28184801"/>
+            <a:ext cx="6638544" cy="713232"/>
+          </a:xfrm>
+          <a:prstGeom prst="rect">
+            <a:avLst/>
+          </a:prstGeom>
+          <a:solidFill>
+            <a:srgbClr val="007439"/>
+          </a:solidFill>
+          <a:ln>
+            <a:noFill/>
+          </a:ln>
+          <a:effectLst/>
+        </p:spPr>
+        <p:style>
+          <a:lnRef idx="1">
+            <a:schemeClr val="accent1"/>
+          </a:lnRef>
+          <a:fillRef idx="3">
+            <a:schemeClr val="accent1"/>
+          </a:fillRef>
+          <a:effectRef idx="2">
+            <a:schemeClr val="accent1"/>
+          </a:effectRef>
+          <a:fontRef idx="minor">
+            <a:schemeClr val="lt1"/>
+          </a:fontRef>
+        </p:style>
+        <p:txBody>
+          <a:bodyPr rtlCol="0" anchor="ctr" wrap="square" lIns="146304" rIns="146304" tIns="0" bIns="0"/>
+          <a:lstStyle/>
+          <a:p>
+            <a:pPr algn="l"/>
+            <a:r>
+              <a:rPr sz="2500" b="1">
+                <a:solidFill>
+                  <a:srgbClr val="FFFFFF"/>
+                </a:solidFill>
+                <a:latin typeface="Calibri"/>
+              </a:rPr>
+              <a:t>Acknowledgements</a:t>
+            </a:r>
+          </a:p>
+        </p:txBody>
+      </p:sp>
+      <p:sp>
+        <p:nvSpPr>
+          <p:cNvPr id="55" name="TextBox 54"/>
+          <p:cNvSpPr txBox="1"/>
+          <p:nvPr/>
+        </p:nvSpPr>
+        <p:spPr>
+          <a:xfrm>
+            <a:off x="14740128" y="29007761"/>
             <a:ext cx="6638544" cy="1513114"/>
           </a:xfrm>
           <a:prstGeom prst="rect">
@@ -5570,7 +7078,7 @@
               <a:buChar char="•"/>
             </a:pPr>
             <a:r>
-              <a:rPr sz="1900">
+              <a:rPr sz="1900" i="0">
                 <a:solidFill>
                   <a:srgbClr val="1A1A1A"/>
                 </a:solidFill>
@@ -5591,7 +7099,7 @@
               <a:buChar char="•"/>
             </a:pPr>
             <a:r>
-              <a:rPr sz="1900">
+              <a:rPr sz="1900" i="0">
                 <a:solidFill>
                   <a:srgbClr val="1A1A1A"/>
                 </a:solidFill>

--- a/poster/FL_Poster_Chevuri_Aledhari.pptx
+++ b/poster/FL_Poster_Chevuri_Aledhari.pptx
@@ -3422,7 +3422,7 @@
         <p:spPr>
           <a:xfrm>
             <a:off x="548640" y="4133088"/>
-            <a:ext cx="6638544" cy="4943856"/>
+            <a:ext cx="6638544" cy="4526715"/>
           </a:xfrm>
           <a:prstGeom prst="rect">
             <a:avLst/>
@@ -3515,7 +3515,7 @@
                 </a:solidFill>
                 <a:latin typeface="Calibri"/>
               </a:rPr>
-              <a:t>Robust rules are always scored against FedAvg, which weights each site by how much data it holds, so the biggest site gets the loudest vote.</a:t>
+              <a:t>Robust rules are scored against FedAvg, which weights each site by how much data it holds -- and they discard that weighting entirely, so two things change at once and nobody had separated them.</a:t>
             </a:r>
           </a:p>
           <a:p>
@@ -3536,27 +3536,6 @@
                 </a:solidFill>
                 <a:latin typeface="Calibri"/>
               </a:rPr>
-              <a:t>Robust rules discard that weighting entirely, so two things change at once and nobody had separated them.</a:t>
-            </a:r>
-          </a:p>
-          <a:p>
-            <a:pPr indent="-215900" marL="215900">
-              <a:spcBef>
-                <a:spcPts val="0"/>
-              </a:spcBef>
-              <a:spcAft>
-                <a:spcPts val="800"/>
-              </a:spcAft>
-              <a:buFont typeface="Arial"/>
-              <a:buChar char="•"/>
-            </a:pPr>
-            <a:r>
-              <a:rPr sz="1900" i="0">
-                <a:solidFill>
-                  <a:srgbClr val="1A1A1A"/>
-                </a:solidFill>
-                <a:latin typeface="Calibri"/>
-              </a:rPr>
               <a:t>We ask: when a robust rule wins, is it the robust statistic winning, or just the end of the loudest vote?</a:t>
             </a:r>
           </a:p>
@@ -3570,7 +3549,7 @@
         </p:nvSpPr>
         <p:spPr>
           <a:xfrm>
-            <a:off x="548640" y="9551996"/>
+            <a:off x="548640" y="8914384"/>
             <a:ext cx="6638544" cy="713232"/>
           </a:xfrm>
           <a:prstGeom prst="rect">
@@ -3623,8 +3602,8 @@
         </p:nvSpPr>
         <p:spPr>
           <a:xfrm>
-            <a:off x="548640" y="10374956"/>
-            <a:ext cx="6638544" cy="802277"/>
+            <a:off x="548640" y="9737343"/>
+            <a:ext cx="6638544" cy="1095973"/>
           </a:xfrm>
           <a:prstGeom prst="rect">
             <a:avLst/>
@@ -3654,7 +3633,7 @@
                 </a:solidFill>
                 <a:latin typeface="Calibri"/>
               </a:rPr>
-              <a:t>Each site trains on its own data and sends only the model update, which the server merges into one shared model.</a:t>
+              <a:t>Each site trains on its own data and sends only the model update -- no patient record ever leaves the institution holding it.</a:t>
             </a:r>
           </a:p>
         </p:txBody>
@@ -3675,8 +3654,8 @@
         </p:blipFill>
         <p:spPr>
           <a:xfrm>
-            <a:off x="548640" y="11652286"/>
-            <a:ext cx="6638544" cy="2807208"/>
+            <a:off x="548640" y="11087898"/>
+            <a:ext cx="6638544" cy="3611880"/>
           </a:xfrm>
           <a:prstGeom prst="rect">
             <a:avLst/>
@@ -3685,13 +3664,55 @@
       </p:pic>
       <p:sp>
         <p:nvSpPr>
-          <p:cNvPr id="22" name="Rectangle 21"/>
+          <p:cNvPr id="22" name="TextBox 21"/>
+          <p:cNvSpPr txBox="1"/>
+          <p:nvPr/>
+        </p:nvSpPr>
+        <p:spPr>
+          <a:xfrm>
+            <a:off x="548640" y="14791218"/>
+            <a:ext cx="6638544" cy="1142346"/>
+          </a:xfrm>
+          <a:prstGeom prst="rect">
+            <a:avLst/>
+          </a:prstGeom>
+          <a:noFill/>
+        </p:spPr>
+        <p:txBody>
+          <a:bodyPr wrap="square" lIns="54864" rIns="0" tIns="0" bIns="0">
+            <a:spAutoFit/>
+          </a:bodyPr>
+          <a:lstStyle/>
+          <a:p>
+            <a:pPr>
+              <a:spcBef>
+                <a:spcPts val="0"/>
+              </a:spcBef>
+              <a:spcAft>
+                <a:spcPts val="800"/>
+              </a:spcAft>
+            </a:pPr>
+            <a:r>
+              <a:rPr sz="1500" i="0">
+                <a:solidFill>
+                  <a:srgbClr val="333333"/>
+                </a:solidFill>
+                <a:latin typeface="Calibri"/>
+              </a:rPr>
+              <a:t>Figure 1. One training round, run two ways. The same 20 sites send the same updates; only the merge rule differs. FedAvg hands the largest site 34.8% of the vote, the control gives every site 5% -- worth +0.172 AUC on its own.</a:t>
+            </a:r>
+          </a:p>
+        </p:txBody>
+      </p:sp>
+      <p:sp>
+        <p:nvSpPr>
+          <p:cNvPr id="23" name="Rectangle 22"/>
           <p:cNvSpPr/>
           <p:nvPr/>
         </p:nvSpPr>
         <p:spPr>
           <a:xfrm>
-            <a:off x="548640" y="14934546"/>
+            <a:off x="548640" y="16188145"/>
             <a:ext cx="6638544" cy="713232"/>
           </a:xfrm>
           <a:prstGeom prst="rect">
@@ -3738,13 +3759,13 @@
       </p:sp>
       <p:sp>
         <p:nvSpPr>
-          <p:cNvPr id="23" name="TextBox 22"/>
+          <p:cNvPr id="24" name="TextBox 23"/>
           <p:cNvSpPr txBox="1"/>
           <p:nvPr/>
         </p:nvSpPr>
         <p:spPr>
           <a:xfrm>
-            <a:off x="548640" y="15757506"/>
+            <a:off x="548640" y="17011105"/>
             <a:ext cx="6638544" cy="2517648"/>
           </a:xfrm>
           <a:prstGeom prst="rect">
@@ -3824,7 +3845,7 @@
       </p:sp>
       <p:pic>
         <p:nvPicPr>
-          <p:cNvPr id="24" name="Picture 23" descr="posterF_partition.png"/>
+          <p:cNvPr id="25" name="Picture 24" descr="posterF_partition.png"/>
           <p:cNvPicPr>
             <a:picLocks noChangeAspect="1"/>
           </p:cNvPicPr>
@@ -3838,8 +3859,8 @@
         </p:blipFill>
         <p:spPr>
           <a:xfrm>
-            <a:off x="548640" y="18750207"/>
-            <a:ext cx="6638544" cy="5120640"/>
+            <a:off x="548640" y="19783334"/>
+            <a:ext cx="6638544" cy="4572000"/>
           </a:xfrm>
           <a:prstGeom prst="rect">
             <a:avLst/>
@@ -3848,14 +3869,14 @@
       </p:pic>
       <p:sp>
         <p:nvSpPr>
-          <p:cNvPr id="25" name="TextBox 24"/>
+          <p:cNvPr id="26" name="TextBox 25"/>
           <p:cNvSpPr txBox="1"/>
           <p:nvPr/>
         </p:nvSpPr>
         <p:spPr>
           <a:xfrm>
-            <a:off x="548640" y="24345900"/>
-            <a:ext cx="6638544" cy="802277"/>
+            <a:off x="548640" y="24446774"/>
+            <a:ext cx="6638544" cy="1142346"/>
           </a:xfrm>
           <a:prstGeom prst="rect">
             <a:avLst/>
@@ -3868,37 +3889,35 @@
           </a:bodyPr>
           <a:lstStyle/>
           <a:p>
-            <a:pPr indent="-215900" marL="215900">
+            <a:pPr>
               <a:spcBef>
                 <a:spcPts val="0"/>
               </a:spcBef>
               <a:spcAft>
                 <a:spcPts val="800"/>
               </a:spcAft>
-              <a:buFont typeface="Arial"/>
-              <a:buChar char="•"/>
             </a:pPr>
             <a:r>
-              <a:rPr sz="1900" i="0">
+              <a:rPr sz="1500" i="0">
                 <a:solidFill>
-                  <a:srgbClr val="1A1A1A"/>
+                  <a:srgbClr val="333333"/>
                 </a:solidFill>
                 <a:latin typeface="Calibri"/>
               </a:rPr>
-              <a:t>At alpha = 0.1 one site holds 106,481 training rows, 34.8% of the total, while two sites receive nothing at all.</a:t>
-            </a:r>
-          </a:p>
-        </p:txBody>
-      </p:sp>
-      <p:sp>
-        <p:nvSpPr>
-          <p:cNvPr id="26" name="Rectangle 25"/>
+              <a:t>Figure 2. How the training data is dealt across 20 sites. At alpha = 0.1 one site holds 34.8% of it and two sites get none; at alpha = 1.0 the split is mild. This skew is what gives FedAvg's size-weighting something to get wrong.</a:t>
+            </a:r>
+          </a:p>
+        </p:txBody>
+      </p:sp>
+      <p:sp>
+        <p:nvSpPr>
+          <p:cNvPr id="27" name="Rectangle 26"/>
           <p:cNvSpPr/>
           <p:nvPr/>
         </p:nvSpPr>
         <p:spPr>
           <a:xfrm>
-            <a:off x="548640" y="25623229"/>
+            <a:off x="548640" y="25843701"/>
             <a:ext cx="6638544" cy="713232"/>
           </a:xfrm>
           <a:prstGeom prst="rect">
@@ -3945,13 +3964,13 @@
       </p:sp>
       <p:sp>
         <p:nvSpPr>
-          <p:cNvPr id="27" name="TextBox 26"/>
+          <p:cNvPr id="28" name="TextBox 27"/>
           <p:cNvSpPr txBox="1"/>
           <p:nvPr/>
         </p:nvSpPr>
         <p:spPr>
           <a:xfrm>
-            <a:off x="548640" y="26446189"/>
+            <a:off x="548640" y="26666661"/>
             <a:ext cx="6638544" cy="3985477"/>
           </a:xfrm>
           <a:prstGeom prst="rect">
@@ -4082,7 +4101,7 @@
       </p:sp>
       <p:sp>
         <p:nvSpPr>
-          <p:cNvPr id="28" name="Rectangle 27"/>
+          <p:cNvPr id="29" name="Rectangle 28"/>
           <p:cNvSpPr/>
           <p:nvPr/>
         </p:nvSpPr>
@@ -4135,7 +4154,7 @@
       </p:sp>
       <p:sp>
         <p:nvSpPr>
-          <p:cNvPr id="29" name="TextBox 28"/>
+          <p:cNvPr id="30" name="TextBox 29"/>
           <p:cNvSpPr txBox="1"/>
           <p:nvPr/>
         </p:nvSpPr>
@@ -4242,15 +4261,15 @@
       </p:sp>
       <p:graphicFrame>
         <p:nvGraphicFramePr>
-          <p:cNvPr id="30" name="Table 29"/>
+          <p:cNvPr id="31" name="Table 30"/>
           <p:cNvGraphicFramePr>
             <a:graphicFrameLocks noGrp="1"/>
           </p:cNvGraphicFramePr>
           <p:nvPr/>
         </p:nvGraphicFramePr>
         <p:xfrm>
-          <a:off x="7644383" y="7964587"/>
-          <a:ext cx="6638544" cy="3291840"/>
+          <a:off x="7644383" y="7838149"/>
+          <a:ext cx="6638544" cy="2907792"/>
         </p:xfrm>
         <a:graphic>
           <a:graphicData uri="http://schemas.openxmlformats.org/drawingml/2006/table">
@@ -4516,7 +4535,7 @@
                           </a:solidFill>
                           <a:latin typeface="Calibri"/>
                         </a:rPr>
-                        <a:t>Random seeds</a:t>
+                        <a:t>Every run</a:t>
                       </a:r>
                     </a:p>
                   </a:txBody>
@@ -4539,7 +4558,7 @@
                           </a:solidFill>
                           <a:latin typeface="Calibri"/>
                         </a:rPr>
-                        <a:t>42, 123, 456</a:t>
+                        <a:t>20 sites, 50 rounds, seeds 42 / 123 / 456</a:t>
                       </a:r>
                     </a:p>
                   </a:txBody>
@@ -4564,7 +4583,7 @@
                           </a:solidFill>
                           <a:latin typeface="Calibri"/>
                         </a:rPr>
-                        <a:t>Every run</a:t>
+                        <a:t>Total</a:t>
                       </a:r>
                     </a:p>
                   </a:txBody>
@@ -4587,7 +4606,7 @@
                           </a:solidFill>
                           <a:latin typeface="Calibri"/>
                         </a:rPr>
-                        <a:t>20 sites, 50 rounds, scored by AUC-ROC</a:t>
+                        <a:t>624 completed runs</a:t>
                       </a:r>
                     </a:p>
                   </a:txBody>
@@ -4598,67 +4617,19 @@
                   </a:tcPr>
                 </a:tc>
               </a:tr>
-              <a:tr h="384048">
-                <a:tc>
-                  <a:txBody>
-                    <a:bodyPr wrap="square"/>
-                    <a:lstStyle/>
-                    <a:p>
-                      <a:pPr algn="l"/>
-                      <a:r>
-                        <a:rPr sz="1500" b="0">
-                          <a:solidFill>
-                            <a:srgbClr val="1A1A1A"/>
-                          </a:solidFill>
-                          <a:latin typeface="Calibri"/>
-                        </a:rPr>
-                        <a:t>Total</a:t>
-                      </a:r>
-                    </a:p>
-                  </a:txBody>
-                  <a:tcPr marL="91440" marR="91440" marT="18288" marB="18288" anchor="ctr">
-                    <a:solidFill>
-                      <a:srgbClr val="FFFFFF"/>
-                    </a:solidFill>
-                  </a:tcPr>
-                </a:tc>
-                <a:tc>
-                  <a:txBody>
-                    <a:bodyPr wrap="square"/>
-                    <a:lstStyle/>
-                    <a:p>
-                      <a:pPr algn="l"/>
-                      <a:r>
-                        <a:rPr sz="1500" b="0">
-                          <a:solidFill>
-                            <a:srgbClr val="1A1A1A"/>
-                          </a:solidFill>
-                          <a:latin typeface="Calibri"/>
-                        </a:rPr>
-                        <a:t>624 completed runs</a:t>
-                      </a:r>
-                    </a:p>
-                  </a:txBody>
-                  <a:tcPr marL="91440" marR="91440" marT="18288" marB="18288" anchor="ctr">
-                    <a:solidFill>
-                      <a:srgbClr val="FFFFFF"/>
-                    </a:solidFill>
-                  </a:tcPr>
-                </a:tc>
-              </a:tr>
             </a:tbl>
           </a:graphicData>
         </a:graphic>
       </p:graphicFrame>
       <p:sp>
         <p:nvSpPr>
-          <p:cNvPr id="31" name="Rectangle 30"/>
+          <p:cNvPr id="32" name="Rectangle 31"/>
           <p:cNvSpPr/>
           <p:nvPr/>
         </p:nvSpPr>
         <p:spPr>
           <a:xfrm>
-            <a:off x="7644383" y="11565744"/>
+            <a:off x="7644383" y="10928821"/>
             <a:ext cx="6638544" cy="713232"/>
           </a:xfrm>
           <a:prstGeom prst="rect">
@@ -4705,13 +4676,13 @@
       </p:sp>
       <p:sp>
         <p:nvSpPr>
-          <p:cNvPr id="32" name="Rectangle 31"/>
+          <p:cNvPr id="33" name="Rectangle 32"/>
           <p:cNvSpPr/>
           <p:nvPr/>
         </p:nvSpPr>
         <p:spPr>
           <a:xfrm>
-            <a:off x="7644383" y="12388704"/>
+            <a:off x="7644383" y="11751781"/>
             <a:ext cx="6638544" cy="566928"/>
           </a:xfrm>
           <a:prstGeom prst="rect">
@@ -4758,7 +4729,7 @@
       </p:sp>
       <p:pic>
         <p:nvPicPr>
-          <p:cNvPr id="33" name="Picture 32" descr="posterA_decomposition.png"/>
+          <p:cNvPr id="34" name="Picture 33" descr="posterA_decomposition.png"/>
           <p:cNvPicPr>
             <a:picLocks noChangeAspect="1"/>
           </p:cNvPicPr>
@@ -4772,24 +4743,66 @@
         </p:blipFill>
         <p:spPr>
           <a:xfrm>
-            <a:off x="7644383" y="13065360"/>
-            <a:ext cx="6638544" cy="4389120"/>
+            <a:off x="7644383" y="12428437"/>
+            <a:ext cx="6638544" cy="4846320"/>
           </a:xfrm>
           <a:prstGeom prst="rect">
             <a:avLst/>
           </a:prstGeom>
         </p:spPr>
       </p:pic>
+      <p:sp>
+        <p:nvSpPr>
+          <p:cNvPr id="35" name="TextBox 34"/>
+          <p:cNvSpPr txBox="1"/>
+          <p:nvPr/>
+        </p:nvSpPr>
+        <p:spPr>
+          <a:xfrm>
+            <a:off x="7644383" y="17366197"/>
+            <a:ext cx="6638544" cy="910481"/>
+          </a:xfrm>
+          <a:prstGeom prst="rect">
+            <a:avLst/>
+          </a:prstGeom>
+          <a:noFill/>
+        </p:spPr>
+        <p:txBody>
+          <a:bodyPr wrap="square" lIns="54864" rIns="0" tIns="0" bIns="0">
+            <a:spAutoFit/>
+          </a:bodyPr>
+          <a:lstStyle/>
+          <a:p>
+            <a:pPr>
+              <a:spcBef>
+                <a:spcPts val="0"/>
+              </a:spcBef>
+              <a:spcAft>
+                <a:spcPts val="800"/>
+              </a:spcAft>
+            </a:pPr>
+            <a:r>
+              <a:rPr sz="1500" i="0">
+                <a:solidFill>
+                  <a:srgbClr val="333333"/>
+                </a:solidFill>
+                <a:latin typeface="Calibri"/>
+              </a:rPr>
+              <a:t>Figure 3. All seven rules under the harshest split, 12 runs each. Three robust rules clear the dashed control line, but only by 0.004 to 0.045, against the 0.172 the control alone gains over FedAvg.</a:t>
+            </a:r>
+          </a:p>
+        </p:txBody>
+      </p:sp>
       <p:graphicFrame>
         <p:nvGraphicFramePr>
-          <p:cNvPr id="34" name="Table 33"/>
+          <p:cNvPr id="36" name="Table 35"/>
           <p:cNvGraphicFramePr>
             <a:graphicFrameLocks noGrp="1"/>
           </p:cNvGraphicFramePr>
           <p:nvPr/>
         </p:nvGraphicFramePr>
         <p:xfrm>
-          <a:off x="7644383" y="17763798"/>
+          <a:off x="7644383" y="18459558"/>
           <a:ext cx="6638544" cy="3291840"/>
         </p:xfrm>
         <a:graphic>
@@ -5992,13 +6005,13 @@
       </p:graphicFrame>
       <p:sp>
         <p:nvSpPr>
-          <p:cNvPr id="35" name="TextBox 34"/>
+          <p:cNvPr id="37" name="TextBox 36"/>
           <p:cNvSpPr txBox="1"/>
           <p:nvPr/>
         </p:nvSpPr>
         <p:spPr>
           <a:xfrm>
-            <a:off x="7644383" y="21364956"/>
+            <a:off x="7644383" y="21934278"/>
             <a:ext cx="6638544" cy="740446"/>
           </a:xfrm>
           <a:prstGeom prst="rect">
@@ -6027,21 +6040,21 @@
                 </a:solidFill>
                 <a:latin typeface="Calibri"/>
               </a:rPr>
-              <a:t>36 runs per rule on BRFSS. The three robust rules that beat the control beat it by far less than the control beats FedAvg.</a:t>
-            </a:r>
-          </a:p>
-        </p:txBody>
-      </p:sp>
-      <p:sp>
-        <p:nvSpPr>
-          <p:cNvPr id="36" name="TextBox 35"/>
+              <a:t>36 runs per rule on BRFSS, every condition pooled. Holm-corrected Wilcoxon signed-rank against the control.</a:t>
+            </a:r>
+          </a:p>
+        </p:txBody>
+      </p:sp>
+      <p:sp>
+        <p:nvSpPr>
+          <p:cNvPr id="38" name="TextBox 37"/>
           <p:cNvSpPr txBox="1"/>
           <p:nvPr/>
         </p:nvSpPr>
         <p:spPr>
           <a:xfrm>
-            <a:off x="7644383" y="22414719"/>
-            <a:ext cx="6638544" cy="1513114"/>
+            <a:off x="7644383" y="22857605"/>
+            <a:ext cx="6638544" cy="1095973"/>
           </a:xfrm>
           <a:prstGeom prst="rect">
             <a:avLst/>
@@ -6071,41 +6084,20 @@
                 </a:solidFill>
                 <a:latin typeface="Calibri"/>
               </a:rPr>
-              <a:t>The control alone recovers 79 to 98% of what the three strongest robust rules gain over FedAvg.</a:t>
-            </a:r>
-          </a:p>
-          <a:p>
-            <a:pPr indent="-215900" marL="215900">
-              <a:spcBef>
-                <a:spcPts val="0"/>
-              </a:spcBef>
-              <a:spcAft>
-                <a:spcPts val="800"/>
-              </a:spcAft>
-              <a:buFont typeface="Arial"/>
-              <a:buChar char="•"/>
-            </a:pPr>
-            <a:r>
-              <a:rPr sz="1900" i="0">
-                <a:solidFill>
-                  <a:srgbClr val="1A1A1A"/>
-                </a:solidFill>
-                <a:latin typeface="Calibri"/>
-              </a:rPr>
-              <a:t>Only coordinate-wise median clearly clears the control, and CS-Agg cannot be told apart from it at all.</a:t>
-            </a:r>
-          </a:p>
-        </p:txBody>
-      </p:sp>
-      <p:sp>
-        <p:nvSpPr>
-          <p:cNvPr id="37" name="Rectangle 36"/>
+              <a:t>Pooled across every condition the control recovers 78 to 96% of what the three strongest robust rules gain, and CS-Agg cannot be told apart from it.</a:t>
+            </a:r>
+          </a:p>
+        </p:txBody>
+      </p:sp>
+      <p:sp>
+        <p:nvSpPr>
+          <p:cNvPr id="39" name="Rectangle 38"/>
           <p:cNvSpPr/>
           <p:nvPr/>
         </p:nvSpPr>
         <p:spPr>
           <a:xfrm>
-            <a:off x="7644383" y="24237151"/>
+            <a:off x="7644383" y="24136458"/>
             <a:ext cx="6638544" cy="566928"/>
           </a:xfrm>
           <a:prstGeom prst="rect">
@@ -6152,7 +6144,7 @@
       </p:sp>
       <p:pic>
         <p:nvPicPr>
-          <p:cNvPr id="38" name="Picture 37" descr="posterC_runlevel.png"/>
+          <p:cNvPr id="40" name="Picture 39" descr="posterC_runlevel.png"/>
           <p:cNvPicPr>
             <a:picLocks noChangeAspect="1"/>
           </p:cNvPicPr>
@@ -6166,8 +6158,8 @@
         </p:blipFill>
         <p:spPr>
           <a:xfrm>
-            <a:off x="7644383" y="24913807"/>
-            <a:ext cx="6638544" cy="4572000"/>
+            <a:off x="7644383" y="24813114"/>
+            <a:ext cx="6638544" cy="4937760"/>
           </a:xfrm>
           <a:prstGeom prst="rect">
             <a:avLst/>
@@ -6176,14 +6168,14 @@
       </p:pic>
       <p:sp>
         <p:nvSpPr>
-          <p:cNvPr id="39" name="TextBox 38"/>
+          <p:cNvPr id="41" name="TextBox 40"/>
           <p:cNvSpPr txBox="1"/>
           <p:nvPr/>
         </p:nvSpPr>
         <p:spPr>
           <a:xfrm>
-            <a:off x="7644383" y="29795125"/>
-            <a:ext cx="6638544" cy="802277"/>
+            <a:off x="7644383" y="29842314"/>
+            <a:ext cx="6638544" cy="910481"/>
           </a:xfrm>
           <a:prstGeom prst="rect">
             <a:avLst/>
@@ -6196,31 +6188,29 @@
           </a:bodyPr>
           <a:lstStyle/>
           <a:p>
-            <a:pPr indent="-215900" marL="215900">
+            <a:pPr>
               <a:spcBef>
                 <a:spcPts val="0"/>
               </a:spcBef>
               <a:spcAft>
                 <a:spcPts val="800"/>
               </a:spcAft>
-              <a:buFont typeface="Arial"/>
-              <a:buChar char="•"/>
             </a:pPr>
             <a:r>
-              <a:rPr sz="1900" i="0">
+              <a:rPr sz="1500" i="0">
                 <a:solidFill>
-                  <a:srgbClr val="1A1A1A"/>
+                  <a:srgbClr val="333333"/>
                 </a:solidFill>
                 <a:latin typeface="Calibri"/>
               </a:rPr>
-              <a:t>Krum lands below the control and collapses to 0.328 AUC on one run, worse than a coin flip.</a:t>
-            </a:r>
-          </a:p>
-        </p:txBody>
-      </p:sp>
-      <p:sp>
-        <p:nvSpPr>
-          <p:cNvPr id="40" name="Rectangle 39"/>
+              <a:t>Figure 4. The individual runs behind those means. Krum's average of 0.658 hides a run at 0.328, worse than a coin flip, while the control never falls below 0.64. An average is not evidence a rule is safe.</a:t>
+            </a:r>
+          </a:p>
+        </p:txBody>
+      </p:sp>
+      <p:sp>
+        <p:nvSpPr>
+          <p:cNvPr id="42" name="Rectangle 41"/>
           <p:cNvSpPr/>
           <p:nvPr/>
         </p:nvSpPr>
@@ -6273,7 +6263,7 @@
       </p:sp>
       <p:sp>
         <p:nvSpPr>
-          <p:cNvPr id="41" name="Rectangle 40"/>
+          <p:cNvPr id="43" name="Rectangle 42"/>
           <p:cNvSpPr/>
           <p:nvPr/>
         </p:nvSpPr>
@@ -6326,7 +6316,7 @@
       </p:sp>
       <p:pic>
         <p:nvPicPr>
-          <p:cNvPr id="42" name="Picture 41" descr="posterG_stressors.png"/>
+          <p:cNvPr id="44" name="Picture 43" descr="posterG_stressors.png"/>
           <p:cNvPicPr>
             <a:picLocks noChangeAspect="1"/>
           </p:cNvPicPr>
@@ -6341,7 +6331,7 @@
         <p:spPr>
           <a:xfrm>
             <a:off x="14740128" y="4809744"/>
-            <a:ext cx="6638544" cy="2743200"/>
+            <a:ext cx="6638544" cy="3931920"/>
           </a:xfrm>
           <a:prstGeom prst="rect">
             <a:avLst/>
@@ -6350,14 +6340,56 @@
       </p:pic>
       <p:sp>
         <p:nvSpPr>
-          <p:cNvPr id="43" name="TextBox 42"/>
+          <p:cNvPr id="45" name="TextBox 44"/>
           <p:cNvSpPr txBox="1"/>
           <p:nvPr/>
         </p:nvSpPr>
         <p:spPr>
           <a:xfrm>
-            <a:off x="14740128" y="7938788"/>
-            <a:ext cx="6638544" cy="1513114"/>
+            <a:off x="14740128" y="8833104"/>
+            <a:ext cx="6638544" cy="910481"/>
+          </a:xfrm>
+          <a:prstGeom prst="rect">
+            <a:avLst/>
+          </a:prstGeom>
+          <a:noFill/>
+        </p:spPr>
+        <p:txBody>
+          <a:bodyPr wrap="square" lIns="54864" rIns="0" tIns="0" bIns="0">
+            <a:spAutoFit/>
+          </a:bodyPr>
+          <a:lstStyle/>
+          <a:p>
+            <a:pPr>
+              <a:spcBef>
+                <a:spcPts val="0"/>
+              </a:spcBef>
+              <a:spcAft>
+                <a:spcPts val="800"/>
+              </a:spcAft>
+            </a:pPr>
+            <a:r>
+              <a:rPr sz="1500" i="0">
+                <a:solidFill>
+                  <a:srgbClr val="333333"/>
+                </a:solidFill>
+                <a:latin typeface="Calibri"/>
+              </a:rPr>
+              <a:t>Figure 5. Both stressors, measured on FedAvg. Lopsided data costs 149 times more AUC than broken labels do, so robustness work aimed at noisy labels is aimed at the smaller problem.</a:t>
+            </a:r>
+          </a:p>
+        </p:txBody>
+      </p:sp>
+      <p:sp>
+        <p:nvSpPr>
+          <p:cNvPr id="46" name="TextBox 45"/>
+          <p:cNvSpPr txBox="1"/>
+          <p:nvPr/>
+        </p:nvSpPr>
+        <p:spPr>
+          <a:xfrm>
+            <a:off x="14740128" y="9926465"/>
+            <a:ext cx="6638544" cy="802277"/>
           </a:xfrm>
           <a:prstGeom prst="rect">
             <a:avLst/>
@@ -6387,27 +6419,6 @@
                 </a:solidFill>
                 <a:latin typeface="Calibri"/>
               </a:rPr>
-              <a:t>Moving from alpha = 1.0 to 0.1 costs FedAvg 0.2348 AUC, while 0% to 30% label noise costs it 0.0016.</a:t>
-            </a:r>
-          </a:p>
-          <a:p>
-            <a:pPr indent="-215900" marL="215900">
-              <a:spcBef>
-                <a:spcPts val="0"/>
-              </a:spcBef>
-              <a:spcAft>
-                <a:spcPts val="800"/>
-              </a:spcAft>
-              <a:buFont typeface="Arial"/>
-              <a:buChar char="•"/>
-            </a:pPr>
-            <a:r>
-              <a:rPr sz="1900" i="0">
-                <a:solidFill>
-                  <a:srgbClr val="1A1A1A"/>
-                </a:solidFill>
-                <a:latin typeface="Calibri"/>
-              </a:rPr>
               <a:t>That 149x gap narrows to about 14x when sites track twelve health variables instead of four, but it never closes.</a:t>
             </a:r>
           </a:p>
@@ -6415,13 +6426,13 @@
       </p:sp>
       <p:sp>
         <p:nvSpPr>
-          <p:cNvPr id="44" name="Rectangle 43"/>
+          <p:cNvPr id="47" name="Rectangle 46"/>
           <p:cNvSpPr/>
           <p:nvPr/>
         </p:nvSpPr>
         <p:spPr>
           <a:xfrm>
-            <a:off x="14740128" y="9837746"/>
+            <a:off x="14740128" y="10911622"/>
             <a:ext cx="6638544" cy="566928"/>
           </a:xfrm>
           <a:prstGeom prst="rect">
@@ -6468,7 +6479,7 @@
       </p:sp>
       <p:pic>
         <p:nvPicPr>
-          <p:cNvPr id="45" name="Picture 44" descr="posterB_both_datasets.png"/>
+          <p:cNvPr id="48" name="Picture 47" descr="posterB_both_datasets.png"/>
           <p:cNvPicPr>
             <a:picLocks noChangeAspect="1"/>
           </p:cNvPicPr>
@@ -6482,8 +6493,8 @@
         </p:blipFill>
         <p:spPr>
           <a:xfrm>
-            <a:off x="14740128" y="10514402"/>
-            <a:ext cx="6638544" cy="4206240"/>
+            <a:off x="14740128" y="11588278"/>
+            <a:ext cx="6638544" cy="4663440"/>
           </a:xfrm>
           <a:prstGeom prst="rect">
             <a:avLst/>
@@ -6492,14 +6503,56 @@
       </p:pic>
       <p:sp>
         <p:nvSpPr>
-          <p:cNvPr id="46" name="TextBox 45"/>
+          <p:cNvPr id="49" name="TextBox 48"/>
           <p:cNvSpPr txBox="1"/>
           <p:nvPr/>
         </p:nvSpPr>
         <p:spPr>
           <a:xfrm>
-            <a:off x="14740128" y="15106486"/>
-            <a:ext cx="6638544" cy="1513114"/>
+            <a:off x="14740128" y="16343158"/>
+            <a:ext cx="6638544" cy="910481"/>
+          </a:xfrm>
+          <a:prstGeom prst="rect">
+            <a:avLst/>
+          </a:prstGeom>
+          <a:noFill/>
+        </p:spPr>
+        <p:txBody>
+          <a:bodyPr wrap="square" lIns="54864" rIns="0" tIns="0" bIns="0">
+            <a:spAutoFit/>
+          </a:bodyPr>
+          <a:lstStyle/>
+          <a:p>
+            <a:pPr>
+              <a:spcBef>
+                <a:spcPts val="0"/>
+              </a:spcBef>
+              <a:spcAft>
+                <a:spcPts val="800"/>
+              </a:spcAft>
+            </a:pPr>
+            <a:r>
+              <a:rPr sz="1500" i="0">
+                <a:solidFill>
+                  <a:srgbClr val="333333"/>
+                </a:solidFill>
+                <a:latin typeface="Calibri"/>
+              </a:rPr>
+              <a:t>Figure 6. Both datasets, averaged over every split, noise level and seed (252 runs each). On the clean benchmark every rule but Krum reaches 0.997, so a study run only there would have found nothing.</a:t>
+            </a:r>
+          </a:p>
+        </p:txBody>
+      </p:sp>
+      <p:sp>
+        <p:nvSpPr>
+          <p:cNvPr id="50" name="TextBox 49"/>
+          <p:cNvSpPr txBox="1"/>
+          <p:nvPr/>
+        </p:nvSpPr>
+        <p:spPr>
+          <a:xfrm>
+            <a:off x="14740128" y="17436519"/>
+            <a:ext cx="6638544" cy="802277"/>
           </a:xfrm>
           <a:prstGeom prst="rect">
             <a:avLst/>
@@ -6529,27 +6582,6 @@
                 </a:solidFill>
                 <a:latin typeface="Calibri"/>
               </a:rPr>
-              <a:t>On Breast Cancer every rule but Krum reaches 0.997 AUC or better, where no difference between them is visible.</a:t>
-            </a:r>
-          </a:p>
-          <a:p>
-            <a:pPr indent="-215900" marL="215900">
-              <a:spcBef>
-                <a:spcPts val="0"/>
-              </a:spcBef>
-              <a:spcAft>
-                <a:spcPts val="800"/>
-              </a:spcAft>
-              <a:buFont typeface="Arial"/>
-              <a:buChar char="•"/>
-            </a:pPr>
-            <a:r>
-              <a:rPr sz="1900" i="0">
-                <a:solidFill>
-                  <a:srgbClr val="1A1A1A"/>
-                </a:solidFill>
-                <a:latin typeface="Calibri"/>
-              </a:rPr>
               <a:t>Messy, self-reported population health data is where these rules actually separate.</a:t>
             </a:r>
           </a:p>
@@ -6557,13 +6589,13 @@
       </p:sp>
       <p:sp>
         <p:nvSpPr>
-          <p:cNvPr id="47" name="Rectangle 46"/>
+          <p:cNvPr id="51" name="Rectangle 50"/>
           <p:cNvSpPr/>
           <p:nvPr/>
         </p:nvSpPr>
         <p:spPr>
           <a:xfrm>
-            <a:off x="14740128" y="17005445"/>
+            <a:off x="14740128" y="18421676"/>
             <a:ext cx="6638544" cy="713232"/>
           </a:xfrm>
           <a:prstGeom prst="rect">
@@ -6610,14 +6642,14 @@
       </p:sp>
       <p:sp>
         <p:nvSpPr>
-          <p:cNvPr id="48" name="TextBox 47"/>
+          <p:cNvPr id="52" name="TextBox 51"/>
           <p:cNvSpPr txBox="1"/>
           <p:nvPr/>
         </p:nvSpPr>
         <p:spPr>
           <a:xfrm>
-            <a:off x="14740128" y="17828405"/>
-            <a:ext cx="6638544" cy="2223951"/>
+            <a:off x="14740128" y="19244636"/>
+            <a:ext cx="6638544" cy="1806810"/>
           </a:xfrm>
           <a:prstGeom prst="rect">
             <a:avLst/>
@@ -6668,41 +6700,20 @@
                 </a:solidFill>
                 <a:latin typeface="Calibri"/>
               </a:rPr>
-              <a:t>Replace the simulated Dirichlet split with data partitioned across real institutions.</a:t>
-            </a:r>
-          </a:p>
-          <a:p>
-            <a:pPr indent="-215900" marL="215900">
-              <a:spcBef>
-                <a:spcPts val="0"/>
-              </a:spcBef>
-              <a:spcAft>
-                <a:spcPts val="800"/>
-              </a:spcAft>
-              <a:buFont typeface="Arial"/>
-              <a:buChar char="•"/>
-            </a:pPr>
-            <a:r>
-              <a:rPr sz="1900" i="0">
-                <a:solidFill>
-                  <a:srgbClr val="1A1A1A"/>
-                </a:solidFill>
-                <a:latin typeface="Calibri"/>
-              </a:rPr>
-              <a:t>Check whether the weighting effect persists for deeper models and larger numbers of sites.</a:t>
-            </a:r>
-          </a:p>
-        </p:txBody>
-      </p:sp>
-      <p:sp>
-        <p:nvSpPr>
-          <p:cNvPr id="49" name="Rectangle 48"/>
+              <a:t>Replace the simulated split with data partitioned across real institutions, and check that the weighting effect holds for deeper models and more sites.</a:t>
+            </a:r>
+          </a:p>
+        </p:txBody>
+      </p:sp>
+      <p:sp>
+        <p:nvSpPr>
+          <p:cNvPr id="53" name="Rectangle 52"/>
           <p:cNvSpPr/>
           <p:nvPr/>
         </p:nvSpPr>
         <p:spPr>
           <a:xfrm>
-            <a:off x="14740128" y="20438200"/>
+            <a:off x="14740128" y="21234327"/>
             <a:ext cx="6638544" cy="713232"/>
           </a:xfrm>
           <a:prstGeom prst="rect">
@@ -6749,13 +6760,13 @@
       </p:sp>
       <p:sp>
         <p:nvSpPr>
-          <p:cNvPr id="50" name="TextBox 49"/>
+          <p:cNvPr id="54" name="TextBox 53"/>
           <p:cNvSpPr txBox="1"/>
           <p:nvPr/>
         </p:nvSpPr>
         <p:spPr>
           <a:xfrm>
-            <a:off x="14740128" y="21261160"/>
+            <a:off x="14740128" y="22057287"/>
             <a:ext cx="6638544" cy="3522181"/>
           </a:xfrm>
           <a:prstGeom prst="rect">
@@ -6856,13 +6867,13 @@
       </p:sp>
       <p:sp>
         <p:nvSpPr>
-          <p:cNvPr id="51" name="Rectangle 50"/>
+          <p:cNvPr id="55" name="Rectangle 54"/>
           <p:cNvSpPr/>
           <p:nvPr/>
         </p:nvSpPr>
         <p:spPr>
           <a:xfrm>
-            <a:off x="14740128" y="25169186"/>
+            <a:off x="14740128" y="25762349"/>
             <a:ext cx="6638544" cy="713232"/>
           </a:xfrm>
           <a:prstGeom prst="rect">
@@ -6909,13 +6920,13 @@
       </p:sp>
       <p:sp>
         <p:nvSpPr>
-          <p:cNvPr id="52" name="TextBox 51"/>
+          <p:cNvPr id="56" name="TextBox 55"/>
           <p:cNvSpPr txBox="1"/>
           <p:nvPr/>
         </p:nvSpPr>
         <p:spPr>
           <a:xfrm>
-            <a:off x="14740128" y="25992146"/>
+            <a:off x="14740128" y="26585309"/>
             <a:ext cx="4992624" cy="1806810"/>
           </a:xfrm>
           <a:prstGeom prst="rect">
@@ -6970,7 +6981,7 @@
       </p:sp>
       <p:pic>
         <p:nvPicPr>
-          <p:cNvPr id="53" name="Picture 52" descr="posterE_qr.png"/>
+          <p:cNvPr id="57" name="Picture 56" descr="posterE_qr.png"/>
           <p:cNvPicPr>
             <a:picLocks noChangeAspect="1"/>
           </p:cNvPicPr>
@@ -6984,7 +6995,7 @@
         </p:blipFill>
         <p:spPr>
           <a:xfrm>
-            <a:off x="19915632" y="26010434"/>
+            <a:off x="19915632" y="26603597"/>
             <a:ext cx="1417320" cy="1417320"/>
           </a:xfrm>
           <a:prstGeom prst="rect">
@@ -6994,13 +7005,13 @@
       </p:pic>
       <p:sp>
         <p:nvSpPr>
-          <p:cNvPr id="54" name="Rectangle 53"/>
+          <p:cNvPr id="58" name="Rectangle 57"/>
           <p:cNvSpPr/>
           <p:nvPr/>
         </p:nvSpPr>
         <p:spPr>
           <a:xfrm>
-            <a:off x="14740128" y="28184801"/>
+            <a:off x="14740128" y="28575000"/>
             <a:ext cx="6638544" cy="713232"/>
           </a:xfrm>
           <a:prstGeom prst="rect">
@@ -7047,13 +7058,13 @@
       </p:sp>
       <p:sp>
         <p:nvSpPr>
-          <p:cNvPr id="55" name="TextBox 54"/>
+          <p:cNvPr id="59" name="TextBox 58"/>
           <p:cNvSpPr txBox="1"/>
           <p:nvPr/>
         </p:nvSpPr>
         <p:spPr>
           <a:xfrm>
-            <a:off x="14740128" y="29007761"/>
+            <a:off x="14740128" y="29397960"/>
             <a:ext cx="6638544" cy="1513114"/>
           </a:xfrm>
           <a:prstGeom prst="rect">
